--- a/RAPTOR-Command-Brief.pptx
+++ b/RAPTOR-Command-Brief.pptx
@@ -13,9 +13,11 @@
     <p:sldId id="261" r:id="rId7"/>
     <p:sldId id="262" r:id="rId8"/>
     <p:sldId id="263" r:id="rId9"/>
+    <p:sldId id="264" r:id="rId10"/>
+    <p:sldId id="265" r:id="rId11"/>
   </p:sldIdLst>
   <p:notesMasterIdLst>
-    <p:notesMasterId r:id="rId10"/>
+    <p:notesMasterId r:id="rId12"/>
   </p:notesMasterIdLst>
   <p:sldSz cx="12188952" cy="6858000"/>
   <p:notesSz cx="6858000" cy="12188952"/>
@@ -551,6 +553,94 @@
 </p:notes>
 </file>
 
+<file path=ppt/notesSlides/notesSlide10.xml><?xml version="1.0" encoding="utf-8"?>
+<p:notes xmlns:a="http://schemas.openxmlformats.org/drawingml/2006/main" xmlns:r="http://schemas.openxmlformats.org/officeDocument/2006/relationships" xmlns:p="http://schemas.openxmlformats.org/presentationml/2006/main">
+  <p:cSld>
+    <p:spTree>
+      <p:nvGrpSpPr>
+        <p:cNvPr id="1" name=""/>
+        <p:cNvGrpSpPr/>
+        <p:nvPr/>
+      </p:nvGrpSpPr>
+      <p:grpSpPr>
+        <a:xfrm>
+          <a:off x="0" y="0"/>
+          <a:ext cx="0" cy="0"/>
+          <a:chOff x="0" y="0"/>
+          <a:chExt cx="0" cy="0"/>
+        </a:xfrm>
+      </p:grpSpPr>
+      <p:sp>
+        <p:nvSpPr>
+          <p:cNvPr id="2" name="Slide Image Placeholder 1"/>
+          <p:cNvSpPr>
+            <a:spLocks noGrp="1" noRot="1" noChangeAspect="1"/>
+          </p:cNvSpPr>
+          <p:nvPr>
+            <p:ph type="sldImg"/>
+          </p:nvPr>
+        </p:nvSpPr>
+        <p:spPr/>
+      </p:sp>
+      <p:sp>
+        <p:nvSpPr>
+          <p:cNvPr id="3" name="Notes Placeholder 2"/>
+          <p:cNvSpPr>
+            <a:spLocks noGrp="1"/>
+          </p:cNvSpPr>
+          <p:nvPr>
+            <p:ph type="body" idx="1"/>
+          </p:nvPr>
+        </p:nvSpPr>
+        <p:spPr/>
+        <p:txBody>
+          <a:bodyPr/>
+          <a:lstStyle/>
+          <a:p>
+            <a:r>
+              <a:rPr lang="en-US" dirty="0"/>
+              <a:t>The path from here. One: off the demo and onto the squadron's own Microsoft platform — Power Apps inside Teams on a live shared database, genuinely multi-user. Two: robustness — extensive testing with the RAID office over the next three months. Three: the OCU tracker folds in, completing the one stop shop. Then the roll-out: 142 Squadron first, 149 once proven, potentially FG-wide. One squadron, one source of truth — built with AI over more than five hundred rounds of testing, behind six automated quality gates.</a:t>
+            </a:r>
+            <a:endParaRPr lang="en-US" dirty="0"/>
+          </a:p>
+        </p:txBody>
+      </p:sp>
+      <p:sp>
+        <p:nvSpPr>
+          <p:cNvPr id="4" name="Slide Number Placeholder 3"/>
+          <p:cNvSpPr>
+            <a:spLocks noGrp="1"/>
+          </p:cNvSpPr>
+          <p:nvPr>
+            <p:ph type="sldNum" sz="quarter" idx="10"/>
+          </p:nvPr>
+        </p:nvSpPr>
+        <p:spPr/>
+        <p:txBody>
+          <a:bodyPr/>
+          <a:lstStyle/>
+          <a:p>
+            <a:fld id="{F7021451-1387-4CA6-816F-3879F97B5CBC}" type="slidenum">
+              <a:rPr lang="en-US"/>
+              <a:t>10</a:t>
+            </a:fld>
+            <a:endParaRPr lang="en-US"/>
+          </a:p>
+        </p:txBody>
+      </p:sp>
+    </p:spTree>
+    <p:extLst>
+      <p:ext uri="{BB962C8B-B14F-4D97-AF65-F5344CB8AC3E}">
+        <p14:creationId xmlns:p14="http://schemas.microsoft.com/office/powerpoint/2010/main" val="1024086991"/>
+      </p:ext>
+    </p:extLst>
+  </p:cSld>
+  <p:clrMapOvr>
+    <a:masterClrMapping/>
+  </p:clrMapOvr>
+</p:notes>
+</file>
+
 <file path=ppt/notesSlides/notesSlide2.xml><?xml version="1.0" encoding="utf-8"?>
 <p:notes xmlns:a="http://schemas.openxmlformats.org/drawingml/2006/main" xmlns:r="http://schemas.openxmlformats.org/officeDocument/2006/relationships" xmlns:p="http://schemas.openxmlformats.org/presentationml/2006/main">
   <p:cSld>
@@ -597,7 +687,7 @@
           <a:p>
             <a:r>
               <a:rPr lang="en-US" dirty="0"/>
-              <a:t>This is the real problem. Everything a squadron plans against sits in a different place — the programme in one spreadsheet, leave over chat, medical certs in email, up-chits on paper, quals in another sheet, student progress in yet another tool. The same fact gets entered again and again, and because nothing is joined up, mistakes slip through and nobody is ever sure they're looking at the current picture. RAPTOR pulls all of it into one application, so a fact is entered once and everyone sees the same thing.</a:t>
+              <a:t>This is the real problem. Everything a squadron plans against sits in a different place — the programme in one spreadsheet, leave over chat, medical certs in email, up-chits on paper, quals in another sheet, student progress in yet another tool. The same fact gets entered again and again, and mistakes slip through because nothing is joined up. RAPTOR pulls all of it into one application — enter a fact once, and everyone sees the same picture.</a:t>
             </a:r>
             <a:endParaRPr lang="en-US" dirty="0"/>
           </a:p>
@@ -685,7 +775,7 @@
           <a:p>
             <a:r>
               <a:rPr lang="en-US" dirty="0"/>
-              <a:t>This is what makes RAPTOR a wingman rather than a spreadsheet. The moment a line changes, the engine re-checks the whole day and flags anything that breaks the rules — and these are real examples from the app: a crew-rest breach where it has actually done the maths on last night's landing versus this morning's report; a person double-booked across two events; someone medically down still on a flying line; a flight whose brief window is eaten by a meeting; a qualification or currency problem. It grades them — red for a hard breach, amber for a tight advisory — but it never blocks the planner. It catches the mistake before it flies.</a:t>
+              <a:t>The wingman half of RAPTOR. The moment a line changes, the engine re-checks the whole day and flags what breaks the rules — every example here is real, from the app: a crew-rest breach with the maths done for you; double-bookings across sorties, sims, duties and meetings; someone medically down still on a flying line; a flight whose brief window is eaten by a meeting; and an illegal crew combination — an OCU student paired without the authorised crew. Red for a hard breach, amber for a tight advisory — but the planner stays in command; nothing is silently blocked.</a:t>
             </a:r>
             <a:endParaRPr lang="en-US" dirty="0"/>
           </a:p>
@@ -773,7 +863,7 @@
           <a:p>
             <a:r>
               <a:rPr lang="en-US" dirty="0"/>
-              <a:t>Placing crew is where the rules engine meets the roster. On the right of the schedule is the available-crew palette — the placeholders — showing exactly who is free, and striking out anyone already flying, on duty or on leave. When you click a crew member, every slot they could legally fill lights up green, so you can see at a glance where they can go. And selecting a puck highlights that person across the whole week, so you can read where they are all week without hunting. All of it qualification-, rest- and conflict-aware — and if you override and place someone anyway, the breach is flagged right on the puck.</a:t>
+              <a:t>Placing crew is where the rules engine meets the roster. The available-crew placeholders on the right of the schedule show exactly who is free, striking out anyone already flying, on duty or on leave. Click a crew member and every slot they could legally fill lights up green. Select a puck and that person is highlighted across the whole week — easy to read where they are, day by day. And if you override and place someone anyway, the breach is flagged right on the puck.</a:t>
             </a:r>
             <a:endParaRPr lang="en-US" dirty="0"/>
           </a:p>
@@ -861,7 +951,7 @@
           <a:p>
             <a:r>
               <a:rPr lang="en-US" dirty="0"/>
-              <a:t>Leave, medical and manpower are the other half. Leave is approved once and appears on the programme automatically; file it on the schedule side and the balances draw down. Two things people will feel immediately: they can just screenshot their leave application or a medical cert and upload it — no forms to re-fill — and the app reminds anyone who's due to be up-chitted but hasn't been, so it isn't tracked on someone's personal note. Underneath is the manpower red line: management sets the daily floor for each category, and the grid turns amber then red the instant manning drops below it. This is a whole year of leave and duties in one view, always in step with the flying programme.</a:t>
+              <a:t>Two things commanders usually ask next. First — the flag lands where the decision is: here an OCU student has been crewed without the authorised pairing, and both pucks ring red on the board itself, with the reason written in plain English underneath. Second — the rules aren't a black box. The Logic tab lists all 58 rules the engine applies, in plain English, shows which ones fired this week, and the numbers — crew-rest hours, brief lead, report time — are squadron-editable right on the page. Policy changes don't need a programmer.</a:t>
             </a:r>
             <a:endParaRPr lang="en-US" dirty="0"/>
           </a:p>
@@ -949,7 +1039,7 @@
           <a:p>
             <a:r>
               <a:rPr lang="en-US" dirty="0"/>
-              <a:t>A scheduling tool only helps if people actually use it, so the interface was a first-class concern. On a phone it reads top to bottom, stays spacious, and every control is reachable with a thumb. On a desktop it uses the full width — three days side by side, the crew palette docked on the right, drag-to-place. Same data, same rules, shaped for whichever screen the planner or a squadron member happens to have in front of them.</a:t>
+              <a:t>Everything personal is filed in one place — the Inputs page. Leave types, medical statuses like ATT C and OML, off-days, appointments, even 'fly with' requests — each with its dates and remarks, and late filings visibly marked. People can screenshot their approved leave application or their medical cert and upload it right here, instead of re-filling forms. The app reminds anyone due an up-chit who hasn't got one. And the month calendar view lays every input out at a glance. Filed once, it syncs to the schedule, the availability palette, the warnings and Leave War.</a:t>
             </a:r>
             <a:endParaRPr lang="en-US" dirty="0"/>
           </a:p>
@@ -1037,7 +1127,7 @@
           <a:p>
             <a:r>
               <a:rPr lang="en-US" dirty="0"/>
-              <a:t>The direction from here. First, move off the demo and onto the squadron's own Microsoft platform — Power Apps inside Teams, backed by a live shared database — so it becomes genuinely multi-user and real-time inside tools the squadron already runs. Second, make it robust: extensive testing with the RAID office is the priority for the next three months. Third, fold in the OCU syllabus tracker that already exists, so every student's progress lives right beside the flying programme. It was built with AI over more than 500 rounds of testing behind six automated quality gates, and that same discipline carries into the hardening work.</a:t>
+              <a:t>Leave War is the manpower half. A whole year, all fifty people, every leave type — green chips approved, purple pending. Above it, the manning counts: management sets the day-to-day floor for each category, and the numbers turn amber, then red, the instant a day drops below the line — with the under-manned days counted in the header. And it's synced both ways with the schedule: approve a bid and it lands on the programme; leave filed on the Inputs page draws the balances down here. Note: some cells on this screenshot carry illustrative demo data.</a:t>
             </a:r>
             <a:endParaRPr lang="en-US" dirty="0"/>
           </a:p>
@@ -1125,7 +1215,7 @@
           <a:p>
             <a:r>
               <a:rPr lang="en-US" dirty="0"/>
-              <a:t>To close: RAPTOR brings the programme, the crew, the rules and the manpower into one place — planned, checked and synced — a wingman that catches the mistake before it flies. The near-term ask is simple: harden it with the RAID office over the next three months and put it in 142 Squadron's hands, then extend to 149 Squadron once it's proven, and potentially wider across FG. One squadron, one source of truth.</a:t>
+              <a:t>The OCU upgrade tracker — already built, and folding into RAPTOR. Today, planning a student means squinting at a paper flow chart, then the syllabus details, then crew pairing rules, then working out the statistics by hand. Here it's one click: the whole syllabus as an interactive flow chart graded per student, with the stats beside it — progress by type, currency and flex, which events are plannable right now, and a forecast of when they should finish. It knows when a student needs an IP and which pairings the syllabus allows — the same rules the schedule flags. The scheduler looks at one screen and plans the student. Once it's inside RAPTOR, that's the one stop shop complete.</a:t>
             </a:r>
             <a:endParaRPr lang="en-US" dirty="0"/>
           </a:p>
@@ -1149,6 +1239,94 @@
             <a:fld id="{F7021451-1387-4CA6-816F-3879F97B5CBC}" type="slidenum">
               <a:rPr lang="en-US"/>
               <a:t>8</a:t>
+            </a:fld>
+            <a:endParaRPr lang="en-US"/>
+          </a:p>
+        </p:txBody>
+      </p:sp>
+    </p:spTree>
+    <p:extLst>
+      <p:ext uri="{BB962C8B-B14F-4D97-AF65-F5344CB8AC3E}">
+        <p14:creationId xmlns:p14="http://schemas.microsoft.com/office/powerpoint/2010/main" val="1024086991"/>
+      </p:ext>
+    </p:extLst>
+  </p:cSld>
+  <p:clrMapOvr>
+    <a:masterClrMapping/>
+  </p:clrMapOvr>
+</p:notes>
+</file>
+
+<file path=ppt/notesSlides/notesSlide9.xml><?xml version="1.0" encoding="utf-8"?>
+<p:notes xmlns:a="http://schemas.openxmlformats.org/drawingml/2006/main" xmlns:r="http://schemas.openxmlformats.org/officeDocument/2006/relationships" xmlns:p="http://schemas.openxmlformats.org/presentationml/2006/main">
+  <p:cSld>
+    <p:spTree>
+      <p:nvGrpSpPr>
+        <p:cNvPr id="1" name=""/>
+        <p:cNvGrpSpPr/>
+        <p:nvPr/>
+      </p:nvGrpSpPr>
+      <p:grpSpPr>
+        <a:xfrm>
+          <a:off x="0" y="0"/>
+          <a:ext cx="0" cy="0"/>
+          <a:chOff x="0" y="0"/>
+          <a:chExt cx="0" cy="0"/>
+        </a:xfrm>
+      </p:grpSpPr>
+      <p:sp>
+        <p:nvSpPr>
+          <p:cNvPr id="2" name="Slide Image Placeholder 1"/>
+          <p:cNvSpPr>
+            <a:spLocks noGrp="1" noRot="1" noChangeAspect="1"/>
+          </p:cNvSpPr>
+          <p:nvPr>
+            <p:ph type="sldImg"/>
+          </p:nvPr>
+        </p:nvSpPr>
+        <p:spPr/>
+      </p:sp>
+      <p:sp>
+        <p:nvSpPr>
+          <p:cNvPr id="3" name="Notes Placeholder 2"/>
+          <p:cNvSpPr>
+            <a:spLocks noGrp="1"/>
+          </p:cNvSpPr>
+          <p:nvPr>
+            <p:ph type="body" idx="1"/>
+          </p:nvPr>
+        </p:nvSpPr>
+        <p:spPr/>
+        <p:txBody>
+          <a:bodyPr/>
+          <a:lstStyle/>
+          <a:p>
+            <a:r>
+              <a:rPr lang="en-US" dirty="0"/>
+              <a:t>The interface was a first-class concern, because a tool only helps if people use it. On a phone it reads top to bottom, stays spacious, and every control is reachable with a thumb. On a desktop it uses the full width — days side by side, the crew palette docked on the right, drag-to-place. Same data, same rules, shaped for whichever screen is in front of the planner.</a:t>
+            </a:r>
+            <a:endParaRPr lang="en-US" dirty="0"/>
+          </a:p>
+        </p:txBody>
+      </p:sp>
+      <p:sp>
+        <p:nvSpPr>
+          <p:cNvPr id="4" name="Slide Number Placeholder 3"/>
+          <p:cNvSpPr>
+            <a:spLocks noGrp="1"/>
+          </p:cNvSpPr>
+          <p:nvPr>
+            <p:ph type="sldNum" sz="quarter" idx="10"/>
+          </p:nvPr>
+        </p:nvSpPr>
+        <p:spPr/>
+        <p:txBody>
+          <a:bodyPr/>
+          <a:lstStyle/>
+          <a:p>
+            <a:fld id="{F7021451-1387-4CA6-816F-3879F97B5CBC}" type="slidenum">
+              <a:rPr lang="en-US"/>
+              <a:t>9</a:t>
             </a:fld>
             <a:endParaRPr lang="en-US"/>
           </a:p>
@@ -1506,26 +1684,6 @@
         </p:nvSpPr>
         <p:spPr>
           <a:xfrm>
-            <a:off x="0" y="0"/>
-            <a:ext cx="12188952" cy="6858000"/>
-          </a:xfrm>
-          <a:prstGeom prst="rect">
-            <a:avLst/>
-          </a:prstGeom>
-          <a:solidFill>
-            <a:srgbClr val="0B0D10"/>
-          </a:solidFill>
-          <a:ln/>
-        </p:spPr>
-      </p:sp>
-      <p:sp>
-        <p:nvSpPr>
-          <p:cNvPr id="3" name="Shape 1"/>
-          <p:cNvSpPr/>
-          <p:nvPr/>
-        </p:nvSpPr>
-        <p:spPr>
-          <a:xfrm>
             <a:off x="-2194560" y="3383280"/>
             <a:ext cx="6035040" cy="6035040"/>
           </a:xfrm>
@@ -1542,7 +1700,7 @@
       </p:sp>
       <p:sp>
         <p:nvSpPr>
-          <p:cNvPr id="4" name="Shape 2"/>
+          <p:cNvPr id="3" name="Shape 1"/>
           <p:cNvSpPr/>
           <p:nvPr/>
         </p:nvSpPr>
@@ -1564,7 +1722,7 @@
       </p:sp>
       <p:sp>
         <p:nvSpPr>
-          <p:cNvPr id="5" name="Shape 3"/>
+          <p:cNvPr id="4" name="Shape 2"/>
           <p:cNvSpPr/>
           <p:nvPr/>
         </p:nvSpPr>
@@ -1588,7 +1746,7 @@
       </p:sp>
       <p:pic>
         <p:nvPicPr>
-          <p:cNvPr id="6" name="Image 0" descr="preencoded.png">    </p:cNvPr>
+          <p:cNvPr id="5" name="Image 0" descr="preencoded.png">    </p:cNvPr>
           <p:cNvPicPr>
             <a:picLocks noChangeAspect="1"/>
           </p:cNvPicPr>
@@ -1612,7 +1770,7 @@
       </p:pic>
       <p:sp>
         <p:nvSpPr>
-          <p:cNvPr id="7" name="Text 4"/>
+          <p:cNvPr id="6" name="Text 3"/>
           <p:cNvSpPr/>
           <p:nvPr/>
         </p:nvSpPr>
@@ -1651,7 +1809,7 @@
       </p:sp>
       <p:sp>
         <p:nvSpPr>
-          <p:cNvPr id="8" name="Text 5"/>
+          <p:cNvPr id="7" name="Text 4"/>
           <p:cNvSpPr/>
           <p:nvPr/>
         </p:nvSpPr>
@@ -1690,7 +1848,7 @@
       </p:sp>
       <p:sp>
         <p:nvSpPr>
-          <p:cNvPr id="9" name="Text 6"/>
+          <p:cNvPr id="8" name="Text 5"/>
           <p:cNvSpPr/>
           <p:nvPr/>
         </p:nvSpPr>
@@ -1799,7 +1957,7 @@
       </p:sp>
       <p:sp>
         <p:nvSpPr>
-          <p:cNvPr id="10" name="Text 7"/>
+          <p:cNvPr id="9" name="Text 6"/>
           <p:cNvSpPr/>
           <p:nvPr/>
         </p:nvSpPr>
@@ -1908,7 +2066,7 @@
       </p:sp>
       <p:sp>
         <p:nvSpPr>
-          <p:cNvPr id="11" name="Text 8"/>
+          <p:cNvPr id="10" name="Text 7"/>
           <p:cNvSpPr/>
           <p:nvPr/>
         </p:nvSpPr>
@@ -1968,7 +2126,7 @@
       </p:sp>
       <p:sp>
         <p:nvSpPr>
-          <p:cNvPr id="12" name="Shape 9"/>
+          <p:cNvPr id="11" name="Shape 8"/>
           <p:cNvSpPr/>
           <p:nvPr/>
         </p:nvSpPr>
@@ -1995,7 +2153,7 @@
       </p:sp>
       <p:sp>
         <p:nvSpPr>
-          <p:cNvPr id="13" name="Shape 10"/>
+          <p:cNvPr id="12" name="Shape 9"/>
           <p:cNvSpPr/>
           <p:nvPr/>
         </p:nvSpPr>
@@ -2017,7 +2175,7 @@
       </p:sp>
       <p:sp>
         <p:nvSpPr>
-          <p:cNvPr id="14" name="Text 11"/>
+          <p:cNvPr id="13" name="Text 10"/>
           <p:cNvSpPr/>
           <p:nvPr/>
         </p:nvSpPr>
@@ -2056,7 +2214,7 @@
       </p:sp>
       <p:sp>
         <p:nvSpPr>
-          <p:cNvPr id="15" name="Shape 12"/>
+          <p:cNvPr id="14" name="Shape 11"/>
           <p:cNvSpPr/>
           <p:nvPr/>
         </p:nvSpPr>
@@ -2083,7 +2241,7 @@
       </p:sp>
       <p:sp>
         <p:nvSpPr>
-          <p:cNvPr id="16" name="Shape 13"/>
+          <p:cNvPr id="15" name="Shape 12"/>
           <p:cNvSpPr/>
           <p:nvPr/>
         </p:nvSpPr>
@@ -2105,7 +2263,7 @@
       </p:sp>
       <p:sp>
         <p:nvSpPr>
-          <p:cNvPr id="17" name="Text 14"/>
+          <p:cNvPr id="16" name="Text 13"/>
           <p:cNvSpPr/>
           <p:nvPr/>
         </p:nvSpPr>
@@ -2144,7 +2302,7 @@
       </p:sp>
       <p:sp>
         <p:nvSpPr>
-          <p:cNvPr id="18" name="Text 15"/>
+          <p:cNvPr id="17" name="Text 14"/>
           <p:cNvSpPr/>
           <p:nvPr/>
         </p:nvSpPr>
@@ -2183,7 +2341,7 @@
       </p:sp>
       <p:sp>
         <p:nvSpPr>
-          <p:cNvPr id="19" name="Shape 16"/>
+          <p:cNvPr id="18" name="Shape 15"/>
           <p:cNvSpPr/>
           <p:nvPr/>
         </p:nvSpPr>
@@ -2212,7 +2370,7 @@
       </p:sp>
       <p:sp>
         <p:nvSpPr>
-          <p:cNvPr id="20" name="Shape 17"/>
+          <p:cNvPr id="19" name="Shape 16"/>
           <p:cNvSpPr/>
           <p:nvPr/>
         </p:nvSpPr>
@@ -2239,7 +2397,7 @@
       </p:sp>
       <p:pic>
         <p:nvPicPr>
-          <p:cNvPr id="21" name="Image 1" descr="preencoded.png">    </p:cNvPr>
+          <p:cNvPr id="20" name="Image 1" descr="preencoded.png">    </p:cNvPr>
           <p:cNvPicPr>
             <a:picLocks noChangeAspect="1"/>
           </p:cNvPicPr>
@@ -2263,7 +2421,7 @@
       </p:pic>
       <p:sp>
         <p:nvSpPr>
-          <p:cNvPr id="22" name="Text 18"/>
+          <p:cNvPr id="21" name="Text 17"/>
           <p:cNvSpPr/>
           <p:nvPr/>
         </p:nvSpPr>
@@ -2302,7 +2460,7 @@
       </p:sp>
       <p:sp>
         <p:nvSpPr>
-          <p:cNvPr id="23" name="Shape 19"/>
+          <p:cNvPr id="22" name="Shape 18"/>
           <p:cNvSpPr/>
           <p:nvPr/>
         </p:nvSpPr>
@@ -2331,7 +2489,7 @@
       </p:sp>
       <p:sp>
         <p:nvSpPr>
-          <p:cNvPr id="24" name="Shape 20"/>
+          <p:cNvPr id="23" name="Shape 19"/>
           <p:cNvSpPr/>
           <p:nvPr/>
         </p:nvSpPr>
@@ -2358,7 +2516,7 @@
       </p:sp>
       <p:pic>
         <p:nvPicPr>
-          <p:cNvPr id="25" name="Image 2" descr="preencoded.png">    </p:cNvPr>
+          <p:cNvPr id="24" name="Image 2" descr="preencoded.png">    </p:cNvPr>
           <p:cNvPicPr>
             <a:picLocks noChangeAspect="1"/>
           </p:cNvPicPr>
@@ -2380,6 +2538,1199 @@
           </a:prstGeom>
         </p:spPr>
       </p:pic>
+    </p:spTree>
+  </p:cSld>
+  <p:clrMapOvr>
+    <a:masterClrMapping/>
+  </p:clrMapOvr>
+</p:sld>
+</file>
+
+<file path=ppt/slides/slide10.xml><?xml version="1.0" encoding="utf-8"?>
+<p:sld xmlns:a="http://schemas.openxmlformats.org/drawingml/2006/main" xmlns:r="http://schemas.openxmlformats.org/officeDocument/2006/relationships" xmlns:p="http://schemas.openxmlformats.org/presentationml/2006/main">
+  <p:cSld name="Slide 10">
+    <p:bg>
+      <p:bgPr>
+        <a:solidFill>
+          <a:srgbClr val="0E1116"/>
+        </a:solidFill>
+      </p:bgPr>
+    </p:bg>
+    <p:spTree>
+      <p:nvGrpSpPr>
+        <p:cNvPr id="1" name=""/>
+        <p:cNvGrpSpPr/>
+        <p:nvPr/>
+      </p:nvGrpSpPr>
+      <p:grpSpPr>
+        <a:xfrm>
+          <a:off x="0" y="0"/>
+          <a:ext cx="0" cy="0"/>
+          <a:chOff x="0" y="0"/>
+          <a:chExt cx="0" cy="0"/>
+        </a:xfrm>
+      </p:grpSpPr>
+      <p:pic>
+        <p:nvPicPr>
+          <p:cNvPr id="2" name="Image 0" descr="preencoded.png">    </p:cNvPr>
+          <p:cNvPicPr>
+            <a:picLocks noChangeAspect="1"/>
+          </p:cNvPicPr>
+          <p:nvPr/>
+        </p:nvPicPr>
+        <p:blipFill>
+          <a:blip r:embed="rId1">
+            <a:alphaModFix amt="65000"/>
+          </a:blip>
+          <a:stretch>
+            <a:fillRect/>
+          </a:stretch>
+        </p:blipFill>
+        <p:spPr>
+          <a:xfrm>
+            <a:off x="11137392" y="384048"/>
+            <a:ext cx="548640" cy="548640"/>
+          </a:xfrm>
+          <a:prstGeom prst="rect">
+            <a:avLst/>
+          </a:prstGeom>
+        </p:spPr>
+      </p:pic>
+      <p:pic>
+        <p:nvPicPr>
+          <p:cNvPr id="3" name="Image 1" descr="preencoded.png">    </p:cNvPr>
+          <p:cNvPicPr>
+            <a:picLocks noChangeAspect="1"/>
+          </p:cNvPicPr>
+          <p:nvPr/>
+        </p:nvPicPr>
+        <p:blipFill>
+          <a:blip r:embed="rId2">
+            <a:alphaModFix amt="80000"/>
+          </a:blip>
+          <a:stretch>
+            <a:fillRect/>
+          </a:stretch>
+        </p:blipFill>
+        <p:spPr>
+          <a:xfrm>
+            <a:off x="640080" y="6291072"/>
+            <a:ext cx="219456" cy="219456"/>
+          </a:xfrm>
+          <a:prstGeom prst="rect">
+            <a:avLst/>
+          </a:prstGeom>
+        </p:spPr>
+      </p:pic>
+      <p:sp>
+        <p:nvSpPr>
+          <p:cNvPr id="4" name="Text 0"/>
+          <p:cNvSpPr/>
+          <p:nvPr/>
+        </p:nvSpPr>
+        <p:spPr>
+          <a:xfrm>
+            <a:off x="914400" y="6309360"/>
+            <a:ext cx="2743200" cy="219456"/>
+          </a:xfrm>
+          <a:prstGeom prst="rect">
+            <a:avLst/>
+          </a:prstGeom>
+          <a:noFill/>
+          <a:ln/>
+        </p:spPr>
+        <p:txBody>
+          <a:bodyPr wrap="square" lIns="0" tIns="0" rIns="0" bIns="0" rtlCol="0" anchor="ctr"/>
+          <a:lstStyle/>
+          <a:p>
+            <a:pPr indent="0" marL="0">
+              <a:buNone/>
+            </a:pPr>
+            <a:r>
+              <a:rPr lang="en-US" sz="900" b="1" spc="200" kern="0" dirty="0">
+                <a:solidFill>
+                  <a:srgbClr val="8A96A3"/>
+                </a:solidFill>
+                <a:latin typeface="Arial" pitchFamily="34" charset="0"/>
+                <a:ea typeface="Arial" pitchFamily="34" charset="-122"/>
+                <a:cs typeface="Arial" pitchFamily="34" charset="-120"/>
+              </a:rPr>
+              <a:t>RAPTOR</a:t>
+            </a:r>
+            <a:endParaRPr lang="en-US" sz="900" dirty="0"/>
+          </a:p>
+        </p:txBody>
+      </p:sp>
+      <p:sp>
+        <p:nvSpPr>
+          <p:cNvPr id="5" name="Text 1"/>
+          <p:cNvSpPr/>
+          <p:nvPr/>
+        </p:nvSpPr>
+        <p:spPr>
+          <a:xfrm>
+            <a:off x="11228832" y="6309360"/>
+            <a:ext cx="457200" cy="219456"/>
+          </a:xfrm>
+          <a:prstGeom prst="rect">
+            <a:avLst/>
+          </a:prstGeom>
+          <a:noFill/>
+          <a:ln/>
+        </p:spPr>
+        <p:txBody>
+          <a:bodyPr wrap="square" lIns="0" tIns="0" rIns="0" bIns="0" rtlCol="0" anchor="ctr"/>
+          <a:lstStyle/>
+          <a:p>
+            <a:pPr algn="r" indent="0" marL="0">
+              <a:buNone/>
+            </a:pPr>
+            <a:r>
+              <a:rPr lang="en-US" sz="900" dirty="0">
+                <a:solidFill>
+                  <a:srgbClr val="8A96A3"/>
+                </a:solidFill>
+                <a:latin typeface="Arial" pitchFamily="34" charset="0"/>
+                <a:ea typeface="Arial" pitchFamily="34" charset="-122"/>
+                <a:cs typeface="Arial" pitchFamily="34" charset="-120"/>
+              </a:rPr>
+              <a:t>10</a:t>
+            </a:r>
+            <a:endParaRPr lang="en-US" sz="900" dirty="0"/>
+          </a:p>
+        </p:txBody>
+      </p:sp>
+      <p:sp>
+        <p:nvSpPr>
+          <p:cNvPr id="6" name="Text 2"/>
+          <p:cNvSpPr/>
+          <p:nvPr/>
+        </p:nvSpPr>
+        <p:spPr>
+          <a:xfrm>
+            <a:off x="640080" y="512064"/>
+            <a:ext cx="9144000" cy="274320"/>
+          </a:xfrm>
+          <a:prstGeom prst="rect">
+            <a:avLst/>
+          </a:prstGeom>
+          <a:noFill/>
+          <a:ln/>
+        </p:spPr>
+        <p:txBody>
+          <a:bodyPr wrap="square" lIns="0" tIns="0" rIns="0" bIns="0" rtlCol="0" anchor="ctr"/>
+          <a:lstStyle/>
+          <a:p>
+            <a:pPr indent="0" marL="0">
+              <a:buNone/>
+            </a:pPr>
+            <a:r>
+              <a:rPr lang="en-US" sz="1200" b="1" spc="300" kern="0" dirty="0">
+                <a:solidFill>
+                  <a:srgbClr val="3BC6E8"/>
+                </a:solidFill>
+                <a:latin typeface="Arial" pitchFamily="34" charset="0"/>
+                <a:ea typeface="Arial" pitchFamily="34" charset="-122"/>
+                <a:cs typeface="Arial" pitchFamily="34" charset="-120"/>
+              </a:rPr>
+              <a:t>WHERE IT'S GOING</a:t>
+            </a:r>
+            <a:endParaRPr lang="en-US" sz="1200" dirty="0"/>
+          </a:p>
+        </p:txBody>
+      </p:sp>
+      <p:sp>
+        <p:nvSpPr>
+          <p:cNvPr id="7" name="Text 3"/>
+          <p:cNvSpPr/>
+          <p:nvPr/>
+        </p:nvSpPr>
+        <p:spPr>
+          <a:xfrm>
+            <a:off x="640080" y="786384"/>
+            <a:ext cx="11338560" cy="822960"/>
+          </a:xfrm>
+          <a:prstGeom prst="rect">
+            <a:avLst/>
+          </a:prstGeom>
+          <a:noFill/>
+          <a:ln/>
+        </p:spPr>
+        <p:txBody>
+          <a:bodyPr wrap="square" lIns="0" tIns="0" rIns="0" bIns="0" rtlCol="0" anchor="ctr"/>
+          <a:lstStyle/>
+          <a:p>
+            <a:pPr indent="0" marL="0">
+              <a:buNone/>
+            </a:pPr>
+            <a:r>
+              <a:rPr lang="en-US" sz="2800" b="1" dirty="0">
+                <a:solidFill>
+                  <a:srgbClr val="F1F4F7"/>
+                </a:solidFill>
+                <a:latin typeface="Arial" pitchFamily="34" charset="0"/>
+                <a:ea typeface="Arial" pitchFamily="34" charset="-122"/>
+                <a:cs typeface="Arial" pitchFamily="34" charset="-120"/>
+              </a:rPr>
+              <a:t>From prototype to the squadron's live system</a:t>
+            </a:r>
+            <a:endParaRPr lang="en-US" sz="2800" dirty="0"/>
+          </a:p>
+        </p:txBody>
+      </p:sp>
+      <p:sp>
+        <p:nvSpPr>
+          <p:cNvPr id="8" name="Shape 4"/>
+          <p:cNvSpPr/>
+          <p:nvPr/>
+        </p:nvSpPr>
+        <p:spPr>
+          <a:xfrm>
+            <a:off x="640080" y="1783080"/>
+            <a:ext cx="3520440" cy="2651760"/>
+          </a:xfrm>
+          <a:prstGeom prst="roundRect">
+            <a:avLst>
+              <a:gd name="adj" fmla="val 3793"/>
+            </a:avLst>
+          </a:prstGeom>
+          <a:solidFill>
+            <a:srgbClr val="14181D"/>
+          </a:solidFill>
+          <a:ln w="19050">
+            <a:solidFill>
+              <a:srgbClr val="3BC6E8"/>
+            </a:solidFill>
+            <a:prstDash val="solid"/>
+          </a:ln>
+        </p:spPr>
+      </p:sp>
+      <p:sp>
+        <p:nvSpPr>
+          <p:cNvPr id="9" name="Shape 5"/>
+          <p:cNvSpPr/>
+          <p:nvPr/>
+        </p:nvSpPr>
+        <p:spPr>
+          <a:xfrm>
+            <a:off x="896112" y="2020824"/>
+            <a:ext cx="457200" cy="457200"/>
+          </a:xfrm>
+          <a:prstGeom prst="ellipse">
+            <a:avLst/>
+          </a:prstGeom>
+          <a:solidFill>
+            <a:srgbClr val="1A1F26"/>
+          </a:solidFill>
+          <a:ln w="19050">
+            <a:solidFill>
+              <a:srgbClr val="3BC6E8"/>
+            </a:solidFill>
+            <a:prstDash val="solid"/>
+          </a:ln>
+        </p:spPr>
+      </p:sp>
+      <p:sp>
+        <p:nvSpPr>
+          <p:cNvPr id="10" name="Text 6"/>
+          <p:cNvSpPr/>
+          <p:nvPr/>
+        </p:nvSpPr>
+        <p:spPr>
+          <a:xfrm>
+            <a:off x="896112" y="2020824"/>
+            <a:ext cx="457200" cy="457200"/>
+          </a:xfrm>
+          <a:prstGeom prst="rect">
+            <a:avLst/>
+          </a:prstGeom>
+          <a:noFill/>
+          <a:ln/>
+        </p:spPr>
+        <p:txBody>
+          <a:bodyPr wrap="square" lIns="0" tIns="0" rIns="0" bIns="0" rtlCol="0" anchor="ctr"/>
+          <a:lstStyle/>
+          <a:p>
+            <a:pPr algn="ctr" indent="0" marL="0">
+              <a:buNone/>
+            </a:pPr>
+            <a:r>
+              <a:rPr lang="en-US" sz="1600" b="1" dirty="0">
+                <a:solidFill>
+                  <a:srgbClr val="3BC6E8"/>
+                </a:solidFill>
+                <a:latin typeface="Arial" pitchFamily="34" charset="0"/>
+                <a:ea typeface="Arial" pitchFamily="34" charset="-122"/>
+                <a:cs typeface="Arial" pitchFamily="34" charset="-120"/>
+              </a:rPr>
+              <a:t>1</a:t>
+            </a:r>
+            <a:endParaRPr lang="en-US" sz="1600" dirty="0"/>
+          </a:p>
+        </p:txBody>
+      </p:sp>
+      <p:sp>
+        <p:nvSpPr>
+          <p:cNvPr id="11" name="Text 7"/>
+          <p:cNvSpPr/>
+          <p:nvPr/>
+        </p:nvSpPr>
+        <p:spPr>
+          <a:xfrm>
+            <a:off x="896112" y="2606040"/>
+            <a:ext cx="3008376" cy="731520"/>
+          </a:xfrm>
+          <a:prstGeom prst="rect">
+            <a:avLst/>
+          </a:prstGeom>
+          <a:noFill/>
+          <a:ln/>
+        </p:spPr>
+        <p:txBody>
+          <a:bodyPr wrap="square" lIns="0" tIns="0" rIns="0" bIns="0" rtlCol="0" anchor="t"/>
+          <a:lstStyle/>
+          <a:p>
+            <a:pPr indent="0" marL="0">
+              <a:buNone/>
+            </a:pPr>
+            <a:r>
+              <a:rPr lang="en-US" sz="1500" b="1" dirty="0">
+                <a:solidFill>
+                  <a:srgbClr val="F1F4F7"/>
+                </a:solidFill>
+                <a:latin typeface="Arial" pitchFamily="34" charset="0"/>
+                <a:ea typeface="Arial" pitchFamily="34" charset="-122"/>
+                <a:cs typeface="Arial" pitchFamily="34" charset="-120"/>
+              </a:rPr>
+              <a:t>Microsoft 365 · Power Apps on Teams</a:t>
+            </a:r>
+            <a:endParaRPr lang="en-US" sz="1500" dirty="0"/>
+          </a:p>
+        </p:txBody>
+      </p:sp>
+      <p:sp>
+        <p:nvSpPr>
+          <p:cNvPr id="12" name="Text 8"/>
+          <p:cNvSpPr/>
+          <p:nvPr/>
+        </p:nvSpPr>
+        <p:spPr>
+          <a:xfrm>
+            <a:off x="896112" y="3355848"/>
+            <a:ext cx="3008376" cy="1005840"/>
+          </a:xfrm>
+          <a:prstGeom prst="rect">
+            <a:avLst/>
+          </a:prstGeom>
+          <a:noFill/>
+          <a:ln/>
+        </p:spPr>
+        <p:txBody>
+          <a:bodyPr wrap="square" lIns="0" tIns="0" rIns="0" bIns="0" rtlCol="0" anchor="t"/>
+          <a:lstStyle/>
+          <a:p>
+            <a:pPr indent="0" marL="0">
+              <a:buNone/>
+            </a:pPr>
+            <a:r>
+              <a:rPr lang="en-US" sz="1150" dirty="0">
+                <a:solidFill>
+                  <a:srgbClr val="B6C0CB"/>
+                </a:solidFill>
+                <a:latin typeface="Calibri" pitchFamily="34" charset="0"/>
+                <a:ea typeface="Calibri" pitchFamily="34" charset="-122"/>
+                <a:cs typeface="Calibri" pitchFamily="34" charset="-120"/>
+              </a:rPr>
+              <a:t>From the demo to Power Apps inside Teams, on a live shared database — multi-user, real-time, inside tools the squadron already runs.</a:t>
+            </a:r>
+            <a:endParaRPr lang="en-US" sz="1150" dirty="0"/>
+          </a:p>
+        </p:txBody>
+      </p:sp>
+      <p:sp>
+        <p:nvSpPr>
+          <p:cNvPr id="13" name="Shape 9"/>
+          <p:cNvSpPr/>
+          <p:nvPr/>
+        </p:nvSpPr>
+        <p:spPr>
+          <a:xfrm>
+            <a:off x="4416552" y="1783080"/>
+            <a:ext cx="3520440" cy="2651760"/>
+          </a:xfrm>
+          <a:prstGeom prst="roundRect">
+            <a:avLst>
+              <a:gd name="adj" fmla="val 3793"/>
+            </a:avLst>
+          </a:prstGeom>
+          <a:solidFill>
+            <a:srgbClr val="14181D"/>
+          </a:solidFill>
+          <a:ln w="12700">
+            <a:solidFill>
+              <a:srgbClr val="2A313A"/>
+            </a:solidFill>
+            <a:prstDash val="solid"/>
+          </a:ln>
+        </p:spPr>
+      </p:sp>
+      <p:sp>
+        <p:nvSpPr>
+          <p:cNvPr id="14" name="Shape 10"/>
+          <p:cNvSpPr/>
+          <p:nvPr/>
+        </p:nvSpPr>
+        <p:spPr>
+          <a:xfrm>
+            <a:off x="4672584" y="2020824"/>
+            <a:ext cx="457200" cy="457200"/>
+          </a:xfrm>
+          <a:prstGeom prst="ellipse">
+            <a:avLst/>
+          </a:prstGeom>
+          <a:solidFill>
+            <a:srgbClr val="1A1F26"/>
+          </a:solidFill>
+          <a:ln w="19050">
+            <a:solidFill>
+              <a:srgbClr val="3BD07A"/>
+            </a:solidFill>
+            <a:prstDash val="solid"/>
+          </a:ln>
+        </p:spPr>
+      </p:sp>
+      <p:sp>
+        <p:nvSpPr>
+          <p:cNvPr id="15" name="Text 11"/>
+          <p:cNvSpPr/>
+          <p:nvPr/>
+        </p:nvSpPr>
+        <p:spPr>
+          <a:xfrm>
+            <a:off x="4672584" y="2020824"/>
+            <a:ext cx="457200" cy="457200"/>
+          </a:xfrm>
+          <a:prstGeom prst="rect">
+            <a:avLst/>
+          </a:prstGeom>
+          <a:noFill/>
+          <a:ln/>
+        </p:spPr>
+        <p:txBody>
+          <a:bodyPr wrap="square" lIns="0" tIns="0" rIns="0" bIns="0" rtlCol="0" anchor="ctr"/>
+          <a:lstStyle/>
+          <a:p>
+            <a:pPr algn="ctr" indent="0" marL="0">
+              <a:buNone/>
+            </a:pPr>
+            <a:r>
+              <a:rPr lang="en-US" sz="1600" b="1" dirty="0">
+                <a:solidFill>
+                  <a:srgbClr val="3BD07A"/>
+                </a:solidFill>
+                <a:latin typeface="Arial" pitchFamily="34" charset="0"/>
+                <a:ea typeface="Arial" pitchFamily="34" charset="-122"/>
+                <a:cs typeface="Arial" pitchFamily="34" charset="-120"/>
+              </a:rPr>
+              <a:t>2</a:t>
+            </a:r>
+            <a:endParaRPr lang="en-US" sz="1600" dirty="0"/>
+          </a:p>
+        </p:txBody>
+      </p:sp>
+      <p:sp>
+        <p:nvSpPr>
+          <p:cNvPr id="16" name="Text 12"/>
+          <p:cNvSpPr/>
+          <p:nvPr/>
+        </p:nvSpPr>
+        <p:spPr>
+          <a:xfrm>
+            <a:off x="4672584" y="2606040"/>
+            <a:ext cx="3008376" cy="731520"/>
+          </a:xfrm>
+          <a:prstGeom prst="rect">
+            <a:avLst/>
+          </a:prstGeom>
+          <a:noFill/>
+          <a:ln/>
+        </p:spPr>
+        <p:txBody>
+          <a:bodyPr wrap="square" lIns="0" tIns="0" rIns="0" bIns="0" rtlCol="0" anchor="t"/>
+          <a:lstStyle/>
+          <a:p>
+            <a:pPr indent="0" marL="0">
+              <a:buNone/>
+            </a:pPr>
+            <a:r>
+              <a:rPr lang="en-US" sz="1500" b="1" dirty="0">
+                <a:solidFill>
+                  <a:srgbClr val="F1F4F7"/>
+                </a:solidFill>
+                <a:latin typeface="Arial" pitchFamily="34" charset="0"/>
+                <a:ea typeface="Arial" pitchFamily="34" charset="-122"/>
+                <a:cs typeface="Arial" pitchFamily="34" charset="-120"/>
+              </a:rPr>
+              <a:t>Robust &amp; operational</a:t>
+            </a:r>
+            <a:endParaRPr lang="en-US" sz="1500" dirty="0"/>
+          </a:p>
+        </p:txBody>
+      </p:sp>
+      <p:sp>
+        <p:nvSpPr>
+          <p:cNvPr id="17" name="Text 13"/>
+          <p:cNvSpPr/>
+          <p:nvPr/>
+        </p:nvSpPr>
+        <p:spPr>
+          <a:xfrm>
+            <a:off x="4672584" y="3355848"/>
+            <a:ext cx="3008376" cy="1005840"/>
+          </a:xfrm>
+          <a:prstGeom prst="rect">
+            <a:avLst/>
+          </a:prstGeom>
+          <a:noFill/>
+          <a:ln/>
+        </p:spPr>
+        <p:txBody>
+          <a:bodyPr wrap="square" lIns="0" tIns="0" rIns="0" bIns="0" rtlCol="0" anchor="t"/>
+          <a:lstStyle/>
+          <a:p>
+            <a:pPr indent="0" marL="0">
+              <a:buNone/>
+            </a:pPr>
+            <a:r>
+              <a:rPr lang="en-US" sz="1150" dirty="0">
+                <a:solidFill>
+                  <a:srgbClr val="B6C0CB"/>
+                </a:solidFill>
+                <a:latin typeface="Calibri" pitchFamily="34" charset="0"/>
+                <a:ea typeface="Calibri" pitchFamily="34" charset="-122"/>
+                <a:cs typeface="Calibri" pitchFamily="34" charset="-120"/>
+              </a:rPr>
+              <a:t>Extensive testing with the RAID office to prove it stands up to daily use — the priority for the next three months.</a:t>
+            </a:r>
+            <a:endParaRPr lang="en-US" sz="1150" dirty="0"/>
+          </a:p>
+        </p:txBody>
+      </p:sp>
+      <p:sp>
+        <p:nvSpPr>
+          <p:cNvPr id="18" name="Shape 14"/>
+          <p:cNvSpPr/>
+          <p:nvPr/>
+        </p:nvSpPr>
+        <p:spPr>
+          <a:xfrm>
+            <a:off x="8193024" y="1783080"/>
+            <a:ext cx="3520440" cy="2651760"/>
+          </a:xfrm>
+          <a:prstGeom prst="roundRect">
+            <a:avLst>
+              <a:gd name="adj" fmla="val 3793"/>
+            </a:avLst>
+          </a:prstGeom>
+          <a:solidFill>
+            <a:srgbClr val="14181D"/>
+          </a:solidFill>
+          <a:ln w="12700">
+            <a:solidFill>
+              <a:srgbClr val="2A313A"/>
+            </a:solidFill>
+            <a:prstDash val="solid"/>
+          </a:ln>
+        </p:spPr>
+      </p:sp>
+      <p:sp>
+        <p:nvSpPr>
+          <p:cNvPr id="19" name="Shape 15"/>
+          <p:cNvSpPr/>
+          <p:nvPr/>
+        </p:nvSpPr>
+        <p:spPr>
+          <a:xfrm>
+            <a:off x="8449056" y="2020824"/>
+            <a:ext cx="457200" cy="457200"/>
+          </a:xfrm>
+          <a:prstGeom prst="ellipse">
+            <a:avLst/>
+          </a:prstGeom>
+          <a:solidFill>
+            <a:srgbClr val="1A1F26"/>
+          </a:solidFill>
+          <a:ln w="19050">
+            <a:solidFill>
+              <a:srgbClr val="8A8F3C"/>
+            </a:solidFill>
+            <a:prstDash val="solid"/>
+          </a:ln>
+        </p:spPr>
+      </p:sp>
+      <p:sp>
+        <p:nvSpPr>
+          <p:cNvPr id="20" name="Text 16"/>
+          <p:cNvSpPr/>
+          <p:nvPr/>
+        </p:nvSpPr>
+        <p:spPr>
+          <a:xfrm>
+            <a:off x="8449056" y="2020824"/>
+            <a:ext cx="457200" cy="457200"/>
+          </a:xfrm>
+          <a:prstGeom prst="rect">
+            <a:avLst/>
+          </a:prstGeom>
+          <a:noFill/>
+          <a:ln/>
+        </p:spPr>
+        <p:txBody>
+          <a:bodyPr wrap="square" lIns="0" tIns="0" rIns="0" bIns="0" rtlCol="0" anchor="ctr"/>
+          <a:lstStyle/>
+          <a:p>
+            <a:pPr algn="ctr" indent="0" marL="0">
+              <a:buNone/>
+            </a:pPr>
+            <a:r>
+              <a:rPr lang="en-US" sz="1600" b="1" dirty="0">
+                <a:solidFill>
+                  <a:srgbClr val="8A8F3C"/>
+                </a:solidFill>
+                <a:latin typeface="Arial" pitchFamily="34" charset="0"/>
+                <a:ea typeface="Arial" pitchFamily="34" charset="-122"/>
+                <a:cs typeface="Arial" pitchFamily="34" charset="-120"/>
+              </a:rPr>
+              <a:t>3</a:t>
+            </a:r>
+            <a:endParaRPr lang="en-US" sz="1600" dirty="0"/>
+          </a:p>
+        </p:txBody>
+      </p:sp>
+      <p:sp>
+        <p:nvSpPr>
+          <p:cNvPr id="21" name="Text 17"/>
+          <p:cNvSpPr/>
+          <p:nvPr/>
+        </p:nvSpPr>
+        <p:spPr>
+          <a:xfrm>
+            <a:off x="8449056" y="2606040"/>
+            <a:ext cx="3008376" cy="731520"/>
+          </a:xfrm>
+          <a:prstGeom prst="rect">
+            <a:avLst/>
+          </a:prstGeom>
+          <a:noFill/>
+          <a:ln/>
+        </p:spPr>
+        <p:txBody>
+          <a:bodyPr wrap="square" lIns="0" tIns="0" rIns="0" bIns="0" rtlCol="0" anchor="t"/>
+          <a:lstStyle/>
+          <a:p>
+            <a:pPr indent="0" marL="0">
+              <a:buNone/>
+            </a:pPr>
+            <a:r>
+              <a:rPr lang="en-US" sz="1500" b="1" dirty="0">
+                <a:solidFill>
+                  <a:srgbClr val="F1F4F7"/>
+                </a:solidFill>
+                <a:latin typeface="Arial" pitchFamily="34" charset="0"/>
+                <a:ea typeface="Arial" pitchFamily="34" charset="-122"/>
+                <a:cs typeface="Arial" pitchFamily="34" charset="-120"/>
+              </a:rPr>
+              <a:t>OCU tracker folds in</a:t>
+            </a:r>
+            <a:endParaRPr lang="en-US" sz="1500" dirty="0"/>
+          </a:p>
+        </p:txBody>
+      </p:sp>
+      <p:sp>
+        <p:nvSpPr>
+          <p:cNvPr id="22" name="Text 18"/>
+          <p:cNvSpPr/>
+          <p:nvPr/>
+        </p:nvSpPr>
+        <p:spPr>
+          <a:xfrm>
+            <a:off x="8449056" y="3355848"/>
+            <a:ext cx="3008376" cy="1005840"/>
+          </a:xfrm>
+          <a:prstGeom prst="rect">
+            <a:avLst/>
+          </a:prstGeom>
+          <a:noFill/>
+          <a:ln/>
+        </p:spPr>
+        <p:txBody>
+          <a:bodyPr wrap="square" lIns="0" tIns="0" rIns="0" bIns="0" rtlCol="0" anchor="t"/>
+          <a:lstStyle/>
+          <a:p>
+            <a:pPr indent="0" marL="0">
+              <a:buNone/>
+            </a:pPr>
+            <a:r>
+              <a:rPr lang="en-US" sz="1150" dirty="0">
+                <a:solidFill>
+                  <a:srgbClr val="B6C0CB"/>
+                </a:solidFill>
+                <a:latin typeface="Calibri" pitchFamily="34" charset="0"/>
+                <a:ea typeface="Calibri" pitchFamily="34" charset="-122"/>
+                <a:cs typeface="Calibri" pitchFamily="34" charset="-120"/>
+              </a:rPr>
+              <a:t>The upgrade tracker joins RAPTOR, putting student progress beside the programme — the one stop shop complete.</a:t>
+            </a:r>
+            <a:endParaRPr lang="en-US" sz="1150" dirty="0"/>
+          </a:p>
+        </p:txBody>
+      </p:sp>
+      <p:sp>
+        <p:nvSpPr>
+          <p:cNvPr id="23" name="Shape 19"/>
+          <p:cNvSpPr/>
+          <p:nvPr/>
+        </p:nvSpPr>
+        <p:spPr>
+          <a:xfrm>
+            <a:off x="640080" y="4800600"/>
+            <a:ext cx="3291840" cy="868680"/>
+          </a:xfrm>
+          <a:prstGeom prst="roundRect">
+            <a:avLst>
+              <a:gd name="adj" fmla="val 10526"/>
+            </a:avLst>
+          </a:prstGeom>
+          <a:solidFill>
+            <a:srgbClr val="14181D"/>
+          </a:solidFill>
+          <a:ln w="19050">
+            <a:solidFill>
+              <a:srgbClr val="3BC6E8"/>
+            </a:solidFill>
+            <a:prstDash val="solid"/>
+          </a:ln>
+        </p:spPr>
+      </p:sp>
+      <p:sp>
+        <p:nvSpPr>
+          <p:cNvPr id="24" name="Text 20"/>
+          <p:cNvSpPr/>
+          <p:nvPr/>
+        </p:nvSpPr>
+        <p:spPr>
+          <a:xfrm>
+            <a:off x="868680" y="4919472"/>
+            <a:ext cx="2834640" cy="320040"/>
+          </a:xfrm>
+          <a:prstGeom prst="rect">
+            <a:avLst/>
+          </a:prstGeom>
+          <a:noFill/>
+          <a:ln/>
+        </p:spPr>
+        <p:txBody>
+          <a:bodyPr wrap="square" lIns="0" tIns="0" rIns="0" bIns="0" rtlCol="0" anchor="ctr"/>
+          <a:lstStyle/>
+          <a:p>
+            <a:pPr indent="0" marL="0">
+              <a:buNone/>
+            </a:pPr>
+            <a:r>
+              <a:rPr lang="en-US" sz="1600" b="1" dirty="0">
+                <a:solidFill>
+                  <a:srgbClr val="F1F4F7"/>
+                </a:solidFill>
+                <a:latin typeface="Arial" pitchFamily="34" charset="0"/>
+                <a:ea typeface="Arial" pitchFamily="34" charset="-122"/>
+                <a:cs typeface="Arial" pitchFamily="34" charset="-120"/>
+              </a:rPr>
+              <a:t>142 SQN</a:t>
+            </a:r>
+            <a:endParaRPr lang="en-US" sz="1600" dirty="0"/>
+          </a:p>
+        </p:txBody>
+      </p:sp>
+      <p:sp>
+        <p:nvSpPr>
+          <p:cNvPr id="25" name="Text 21"/>
+          <p:cNvSpPr/>
+          <p:nvPr/>
+        </p:nvSpPr>
+        <p:spPr>
+          <a:xfrm>
+            <a:off x="868680" y="5248656"/>
+            <a:ext cx="2926080" cy="320040"/>
+          </a:xfrm>
+          <a:prstGeom prst="rect">
+            <a:avLst/>
+          </a:prstGeom>
+          <a:noFill/>
+          <a:ln/>
+        </p:spPr>
+        <p:txBody>
+          <a:bodyPr wrap="square" lIns="0" tIns="0" rIns="0" bIns="0" rtlCol="0" anchor="ctr"/>
+          <a:lstStyle/>
+          <a:p>
+            <a:pPr indent="0" marL="0">
+              <a:buNone/>
+            </a:pPr>
+            <a:r>
+              <a:rPr lang="en-US" sz="1100" dirty="0">
+                <a:solidFill>
+                  <a:srgbClr val="8A96A3"/>
+                </a:solidFill>
+                <a:latin typeface="Calibri" pitchFamily="34" charset="0"/>
+                <a:ea typeface="Calibri" pitchFamily="34" charset="-122"/>
+                <a:cs typeface="Calibri" pitchFamily="34" charset="-120"/>
+              </a:rPr>
+              <a:t>now → 3 months, with RAID office</a:t>
+            </a:r>
+            <a:endParaRPr lang="en-US" sz="1100" dirty="0"/>
+          </a:p>
+        </p:txBody>
+      </p:sp>
+      <p:sp>
+        <p:nvSpPr>
+          <p:cNvPr id="26" name="Text 22"/>
+          <p:cNvSpPr/>
+          <p:nvPr/>
+        </p:nvSpPr>
+        <p:spPr>
+          <a:xfrm>
+            <a:off x="3931920" y="4800600"/>
+            <a:ext cx="548640" cy="868680"/>
+          </a:xfrm>
+          <a:prstGeom prst="rect">
+            <a:avLst/>
+          </a:prstGeom>
+          <a:noFill/>
+          <a:ln/>
+        </p:spPr>
+        <p:txBody>
+          <a:bodyPr wrap="square" lIns="0" tIns="0" rIns="0" bIns="0" rtlCol="0" anchor="ctr"/>
+          <a:lstStyle/>
+          <a:p>
+            <a:pPr algn="ctr" indent="0" marL="0">
+              <a:buNone/>
+            </a:pPr>
+            <a:r>
+              <a:rPr lang="en-US" sz="2000" b="1" dirty="0">
+                <a:solidFill>
+                  <a:srgbClr val="8A96A3"/>
+                </a:solidFill>
+                <a:latin typeface="Arial" pitchFamily="34" charset="0"/>
+                <a:ea typeface="Arial" pitchFamily="34" charset="-122"/>
+                <a:cs typeface="Arial" pitchFamily="34" charset="-120"/>
+              </a:rPr>
+              <a:t>→</a:t>
+            </a:r>
+            <a:endParaRPr lang="en-US" sz="2000" dirty="0"/>
+          </a:p>
+        </p:txBody>
+      </p:sp>
+      <p:sp>
+        <p:nvSpPr>
+          <p:cNvPr id="27" name="Shape 23"/>
+          <p:cNvSpPr/>
+          <p:nvPr/>
+        </p:nvSpPr>
+        <p:spPr>
+          <a:xfrm>
+            <a:off x="4480560" y="4800600"/>
+            <a:ext cx="3291840" cy="868680"/>
+          </a:xfrm>
+          <a:prstGeom prst="roundRect">
+            <a:avLst>
+              <a:gd name="adj" fmla="val 10526"/>
+            </a:avLst>
+          </a:prstGeom>
+          <a:solidFill>
+            <a:srgbClr val="14181D"/>
+          </a:solidFill>
+          <a:ln w="12700">
+            <a:solidFill>
+              <a:srgbClr val="2A313A"/>
+            </a:solidFill>
+            <a:prstDash val="solid"/>
+          </a:ln>
+        </p:spPr>
+      </p:sp>
+      <p:sp>
+        <p:nvSpPr>
+          <p:cNvPr id="28" name="Text 24"/>
+          <p:cNvSpPr/>
+          <p:nvPr/>
+        </p:nvSpPr>
+        <p:spPr>
+          <a:xfrm>
+            <a:off x="4709160" y="4919472"/>
+            <a:ext cx="2834640" cy="320040"/>
+          </a:xfrm>
+          <a:prstGeom prst="rect">
+            <a:avLst/>
+          </a:prstGeom>
+          <a:noFill/>
+          <a:ln/>
+        </p:spPr>
+        <p:txBody>
+          <a:bodyPr wrap="square" lIns="0" tIns="0" rIns="0" bIns="0" rtlCol="0" anchor="ctr"/>
+          <a:lstStyle/>
+          <a:p>
+            <a:pPr indent="0" marL="0">
+              <a:buNone/>
+            </a:pPr>
+            <a:r>
+              <a:rPr lang="en-US" sz="1600" b="1" dirty="0">
+                <a:solidFill>
+                  <a:srgbClr val="B6C0CB"/>
+                </a:solidFill>
+                <a:latin typeface="Arial" pitchFamily="34" charset="0"/>
+                <a:ea typeface="Arial" pitchFamily="34" charset="-122"/>
+                <a:cs typeface="Arial" pitchFamily="34" charset="-120"/>
+              </a:rPr>
+              <a:t>149 SQN</a:t>
+            </a:r>
+            <a:endParaRPr lang="en-US" sz="1600" dirty="0"/>
+          </a:p>
+        </p:txBody>
+      </p:sp>
+      <p:sp>
+        <p:nvSpPr>
+          <p:cNvPr id="29" name="Text 25"/>
+          <p:cNvSpPr/>
+          <p:nvPr/>
+        </p:nvSpPr>
+        <p:spPr>
+          <a:xfrm>
+            <a:off x="4709160" y="5248656"/>
+            <a:ext cx="2926080" cy="320040"/>
+          </a:xfrm>
+          <a:prstGeom prst="rect">
+            <a:avLst/>
+          </a:prstGeom>
+          <a:noFill/>
+          <a:ln/>
+        </p:spPr>
+        <p:txBody>
+          <a:bodyPr wrap="square" lIns="0" tIns="0" rIns="0" bIns="0" rtlCol="0" anchor="ctr"/>
+          <a:lstStyle/>
+          <a:p>
+            <a:pPr indent="0" marL="0">
+              <a:buNone/>
+            </a:pPr>
+            <a:r>
+              <a:rPr lang="en-US" sz="1100" dirty="0">
+                <a:solidFill>
+                  <a:srgbClr val="8A96A3"/>
+                </a:solidFill>
+                <a:latin typeface="Calibri" pitchFamily="34" charset="0"/>
+                <a:ea typeface="Calibri" pitchFamily="34" charset="-122"/>
+                <a:cs typeface="Calibri" pitchFamily="34" charset="-120"/>
+              </a:rPr>
+              <a:t>once proven</a:t>
+            </a:r>
+            <a:endParaRPr lang="en-US" sz="1100" dirty="0"/>
+          </a:p>
+        </p:txBody>
+      </p:sp>
+      <p:sp>
+        <p:nvSpPr>
+          <p:cNvPr id="30" name="Text 26"/>
+          <p:cNvSpPr/>
+          <p:nvPr/>
+        </p:nvSpPr>
+        <p:spPr>
+          <a:xfrm>
+            <a:off x="7772400" y="4800600"/>
+            <a:ext cx="548640" cy="868680"/>
+          </a:xfrm>
+          <a:prstGeom prst="rect">
+            <a:avLst/>
+          </a:prstGeom>
+          <a:noFill/>
+          <a:ln/>
+        </p:spPr>
+        <p:txBody>
+          <a:bodyPr wrap="square" lIns="0" tIns="0" rIns="0" bIns="0" rtlCol="0" anchor="ctr"/>
+          <a:lstStyle/>
+          <a:p>
+            <a:pPr algn="ctr" indent="0" marL="0">
+              <a:buNone/>
+            </a:pPr>
+            <a:r>
+              <a:rPr lang="en-US" sz="2000" b="1" dirty="0">
+                <a:solidFill>
+                  <a:srgbClr val="8A96A3"/>
+                </a:solidFill>
+                <a:latin typeface="Arial" pitchFamily="34" charset="0"/>
+                <a:ea typeface="Arial" pitchFamily="34" charset="-122"/>
+                <a:cs typeface="Arial" pitchFamily="34" charset="-120"/>
+              </a:rPr>
+              <a:t>→</a:t>
+            </a:r>
+            <a:endParaRPr lang="en-US" sz="2000" dirty="0"/>
+          </a:p>
+        </p:txBody>
+      </p:sp>
+      <p:sp>
+        <p:nvSpPr>
+          <p:cNvPr id="31" name="Shape 27"/>
+          <p:cNvSpPr/>
+          <p:nvPr/>
+        </p:nvSpPr>
+        <p:spPr>
+          <a:xfrm>
+            <a:off x="8321040" y="4800600"/>
+            <a:ext cx="3291840" cy="868680"/>
+          </a:xfrm>
+          <a:prstGeom prst="roundRect">
+            <a:avLst>
+              <a:gd name="adj" fmla="val 10526"/>
+            </a:avLst>
+          </a:prstGeom>
+          <a:solidFill>
+            <a:srgbClr val="14181D"/>
+          </a:solidFill>
+          <a:ln w="12700">
+            <a:solidFill>
+              <a:srgbClr val="2A313A"/>
+            </a:solidFill>
+            <a:prstDash val="solid"/>
+          </a:ln>
+        </p:spPr>
+      </p:sp>
+      <p:sp>
+        <p:nvSpPr>
+          <p:cNvPr id="32" name="Text 28"/>
+          <p:cNvSpPr/>
+          <p:nvPr/>
+        </p:nvSpPr>
+        <p:spPr>
+          <a:xfrm>
+            <a:off x="8549640" y="4919472"/>
+            <a:ext cx="2834640" cy="320040"/>
+          </a:xfrm>
+          <a:prstGeom prst="rect">
+            <a:avLst/>
+          </a:prstGeom>
+          <a:noFill/>
+          <a:ln/>
+        </p:spPr>
+        <p:txBody>
+          <a:bodyPr wrap="square" lIns="0" tIns="0" rIns="0" bIns="0" rtlCol="0" anchor="ctr"/>
+          <a:lstStyle/>
+          <a:p>
+            <a:pPr indent="0" marL="0">
+              <a:buNone/>
+            </a:pPr>
+            <a:r>
+              <a:rPr lang="en-US" sz="1600" b="1" dirty="0">
+                <a:solidFill>
+                  <a:srgbClr val="B6C0CB"/>
+                </a:solidFill>
+                <a:latin typeface="Arial" pitchFamily="34" charset="0"/>
+                <a:ea typeface="Arial" pitchFamily="34" charset="-122"/>
+                <a:cs typeface="Arial" pitchFamily="34" charset="-120"/>
+              </a:rPr>
+              <a:t>FG</a:t>
+            </a:r>
+            <a:endParaRPr lang="en-US" sz="1600" dirty="0"/>
+          </a:p>
+        </p:txBody>
+      </p:sp>
+      <p:sp>
+        <p:nvSpPr>
+          <p:cNvPr id="33" name="Text 29"/>
+          <p:cNvSpPr/>
+          <p:nvPr/>
+        </p:nvSpPr>
+        <p:spPr>
+          <a:xfrm>
+            <a:off x="8549640" y="5248656"/>
+            <a:ext cx="2926080" cy="320040"/>
+          </a:xfrm>
+          <a:prstGeom prst="rect">
+            <a:avLst/>
+          </a:prstGeom>
+          <a:noFill/>
+          <a:ln/>
+        </p:spPr>
+        <p:txBody>
+          <a:bodyPr wrap="square" lIns="0" tIns="0" rIns="0" bIns="0" rtlCol="0" anchor="ctr"/>
+          <a:lstStyle/>
+          <a:p>
+            <a:pPr indent="0" marL="0">
+              <a:buNone/>
+            </a:pPr>
+            <a:r>
+              <a:rPr lang="en-US" sz="1100" dirty="0">
+                <a:solidFill>
+                  <a:srgbClr val="8A96A3"/>
+                </a:solidFill>
+                <a:latin typeface="Calibri" pitchFamily="34" charset="0"/>
+                <a:ea typeface="Calibri" pitchFamily="34" charset="-122"/>
+                <a:cs typeface="Calibri" pitchFamily="34" charset="-120"/>
+              </a:rPr>
+              <a:t>potential wider roll-out</a:t>
+            </a:r>
+            <a:endParaRPr lang="en-US" sz="1100" dirty="0"/>
+          </a:p>
+        </p:txBody>
+      </p:sp>
+      <p:sp>
+        <p:nvSpPr>
+          <p:cNvPr id="34" name="Text 30"/>
+          <p:cNvSpPr/>
+          <p:nvPr/>
+        </p:nvSpPr>
+        <p:spPr>
+          <a:xfrm>
+            <a:off x="640080" y="5943600"/>
+            <a:ext cx="10972800" cy="457200"/>
+          </a:xfrm>
+          <a:prstGeom prst="rect">
+            <a:avLst/>
+          </a:prstGeom>
+          <a:noFill/>
+          <a:ln/>
+        </p:spPr>
+        <p:txBody>
+          <a:bodyPr wrap="square" lIns="0" tIns="0" rIns="0" bIns="0" rtlCol="0" anchor="ctr"/>
+          <a:lstStyle/>
+          <a:p>
+            <a:pPr indent="0" marL="0">
+              <a:buNone/>
+            </a:pPr>
+            <a:r>
+              <a:rPr lang="en-US" sz="1700" b="1" dirty="0">
+                <a:solidFill>
+                  <a:srgbClr val="F1F4F7"/>
+                </a:solidFill>
+                <a:latin typeface="Calibri" pitchFamily="34" charset="0"/>
+                <a:ea typeface="Calibri" pitchFamily="34" charset="-122"/>
+                <a:cs typeface="Calibri" pitchFamily="34" charset="-120"/>
+              </a:rPr>
+              <a:t>One squadron. One source of truth.  </a:t>
+            </a:r>
+            <a:pPr indent="0" marL="0">
+              <a:buNone/>
+            </a:pPr>
+            <a:r>
+              <a:rPr lang="en-US" sz="1250" i="1" dirty="0">
+                <a:solidFill>
+                  <a:srgbClr val="8A96A3"/>
+                </a:solidFill>
+                <a:latin typeface="Calibri" pitchFamily="34" charset="0"/>
+                <a:ea typeface="Calibri" pitchFamily="34" charset="-122"/>
+                <a:cs typeface="Calibri" pitchFamily="34" charset="-120"/>
+              </a:rPr>
+              <a:t>Built with AI over 500+ rounds of testing, behind six automated quality gates.</a:t>
+            </a:r>
+            <a:endParaRPr lang="en-US" sz="1700" dirty="0"/>
+          </a:p>
+        </p:txBody>
+      </p:sp>
     </p:spTree>
   </p:cSld>
   <p:clrMapOvr>
@@ -4181,6 +5532,680 @@
         </p:nvSpPr>
         <p:spPr>
           <a:xfrm>
+            <a:off x="640080" y="2468880"/>
+            <a:ext cx="6903720" cy="749808"/>
+          </a:xfrm>
+          <a:prstGeom prst="roundRect">
+            <a:avLst>
+              <a:gd name="adj" fmla="val 8537"/>
+            </a:avLst>
+          </a:prstGeom>
+          <a:solidFill>
+            <a:srgbClr val="14181D"/>
+          </a:solidFill>
+          <a:ln w="12700">
+            <a:solidFill>
+              <a:srgbClr val="2A313A"/>
+            </a:solidFill>
+            <a:prstDash val="solid"/>
+          </a:ln>
+        </p:spPr>
+      </p:sp>
+      <p:sp>
+        <p:nvSpPr>
+          <p:cNvPr id="9" name="Shape 6"/>
+          <p:cNvSpPr/>
+          <p:nvPr/>
+        </p:nvSpPr>
+        <p:spPr>
+          <a:xfrm>
+            <a:off x="640080" y="2468880"/>
+            <a:ext cx="100584" cy="749808"/>
+          </a:xfrm>
+          <a:prstGeom prst="roundRect">
+            <a:avLst>
+              <a:gd name="adj" fmla="val 18182"/>
+            </a:avLst>
+          </a:prstGeom>
+          <a:solidFill>
+            <a:srgbClr val="F0555F"/>
+          </a:solidFill>
+          <a:ln/>
+        </p:spPr>
+      </p:sp>
+      <p:sp>
+        <p:nvSpPr>
+          <p:cNvPr id="10" name="Text 7"/>
+          <p:cNvSpPr/>
+          <p:nvPr/>
+        </p:nvSpPr>
+        <p:spPr>
+          <a:xfrm>
+            <a:off x="868680" y="2560320"/>
+            <a:ext cx="6309360" cy="274320"/>
+          </a:xfrm>
+          <a:prstGeom prst="rect">
+            <a:avLst/>
+          </a:prstGeom>
+          <a:noFill/>
+          <a:ln/>
+        </p:spPr>
+        <p:txBody>
+          <a:bodyPr wrap="square" lIns="0" tIns="0" rIns="0" bIns="0" rtlCol="0" anchor="ctr"/>
+          <a:lstStyle/>
+          <a:p>
+            <a:pPr indent="0" marL="0">
+              <a:buNone/>
+            </a:pPr>
+            <a:r>
+              <a:rPr lang="en-US" sz="1350" b="1" dirty="0">
+                <a:solidFill>
+                  <a:srgbClr val="F1F4F7"/>
+                </a:solidFill>
+                <a:latin typeface="Arial" pitchFamily="34" charset="0"/>
+                <a:ea typeface="Arial" pitchFamily="34" charset="-122"/>
+                <a:cs typeface="Arial" pitchFamily="34" charset="-120"/>
+              </a:rPr>
+              <a:t>Crew-rest breach</a:t>
+            </a:r>
+            <a:endParaRPr lang="en-US" sz="1350" dirty="0"/>
+          </a:p>
+        </p:txBody>
+      </p:sp>
+      <p:sp>
+        <p:nvSpPr>
+          <p:cNvPr id="11" name="Text 8"/>
+          <p:cNvSpPr/>
+          <p:nvPr/>
+        </p:nvSpPr>
+        <p:spPr>
+          <a:xfrm>
+            <a:off x="868680" y="2852928"/>
+            <a:ext cx="6492240" cy="310896"/>
+          </a:xfrm>
+          <a:prstGeom prst="rect">
+            <a:avLst/>
+          </a:prstGeom>
+          <a:noFill/>
+          <a:ln/>
+        </p:spPr>
+        <p:txBody>
+          <a:bodyPr wrap="square" lIns="0" tIns="0" rIns="0" bIns="0" rtlCol="0" anchor="ctr"/>
+          <a:lstStyle/>
+          <a:p>
+            <a:pPr indent="0" marL="0">
+              <a:buNone/>
+            </a:pPr>
+            <a:r>
+              <a:rPr lang="en-US" sz="1100" dirty="0">
+                <a:solidFill>
+                  <a:srgbClr val="B6C0CB"/>
+                </a:solidFill>
+                <a:latin typeface="Calibri" pitchFamily="34" charset="0"/>
+                <a:ea typeface="Calibri" pitchFamily="34" charset="-122"/>
+                <a:cs typeface="Calibri" pitchFamily="34" charset="-120"/>
+              </a:rPr>
+              <a:t>Late land last night vs. an early report — RAPTOR does the maths and names who's short.</a:t>
+            </a:r>
+            <a:endParaRPr lang="en-US" sz="1100" dirty="0"/>
+          </a:p>
+        </p:txBody>
+      </p:sp>
+      <p:sp>
+        <p:nvSpPr>
+          <p:cNvPr id="12" name="Shape 9"/>
+          <p:cNvSpPr/>
+          <p:nvPr/>
+        </p:nvSpPr>
+        <p:spPr>
+          <a:xfrm>
+            <a:off x="640080" y="3291840"/>
+            <a:ext cx="6903720" cy="749808"/>
+          </a:xfrm>
+          <a:prstGeom prst="roundRect">
+            <a:avLst>
+              <a:gd name="adj" fmla="val 8537"/>
+            </a:avLst>
+          </a:prstGeom>
+          <a:solidFill>
+            <a:srgbClr val="14181D"/>
+          </a:solidFill>
+          <a:ln w="12700">
+            <a:solidFill>
+              <a:srgbClr val="2A313A"/>
+            </a:solidFill>
+            <a:prstDash val="solid"/>
+          </a:ln>
+        </p:spPr>
+      </p:sp>
+      <p:sp>
+        <p:nvSpPr>
+          <p:cNvPr id="13" name="Shape 10"/>
+          <p:cNvSpPr/>
+          <p:nvPr/>
+        </p:nvSpPr>
+        <p:spPr>
+          <a:xfrm>
+            <a:off x="640080" y="3291840"/>
+            <a:ext cx="100584" cy="749808"/>
+          </a:xfrm>
+          <a:prstGeom prst="roundRect">
+            <a:avLst>
+              <a:gd name="adj" fmla="val 18182"/>
+            </a:avLst>
+          </a:prstGeom>
+          <a:solidFill>
+            <a:srgbClr val="F0555F"/>
+          </a:solidFill>
+          <a:ln/>
+        </p:spPr>
+      </p:sp>
+      <p:sp>
+        <p:nvSpPr>
+          <p:cNvPr id="14" name="Text 11"/>
+          <p:cNvSpPr/>
+          <p:nvPr/>
+        </p:nvSpPr>
+        <p:spPr>
+          <a:xfrm>
+            <a:off x="868680" y="3383280"/>
+            <a:ext cx="6309360" cy="274320"/>
+          </a:xfrm>
+          <a:prstGeom prst="rect">
+            <a:avLst/>
+          </a:prstGeom>
+          <a:noFill/>
+          <a:ln/>
+        </p:spPr>
+        <p:txBody>
+          <a:bodyPr wrap="square" lIns="0" tIns="0" rIns="0" bIns="0" rtlCol="0" anchor="ctr"/>
+          <a:lstStyle/>
+          <a:p>
+            <a:pPr indent="0" marL="0">
+              <a:buNone/>
+            </a:pPr>
+            <a:r>
+              <a:rPr lang="en-US" sz="1350" b="1" dirty="0">
+                <a:solidFill>
+                  <a:srgbClr val="F1F4F7"/>
+                </a:solidFill>
+                <a:latin typeface="Arial" pitchFamily="34" charset="0"/>
+                <a:ea typeface="Arial" pitchFamily="34" charset="-122"/>
+                <a:cs typeface="Arial" pitchFamily="34" charset="-120"/>
+              </a:rPr>
+              <a:t>Double-booking / clash</a:t>
+            </a:r>
+            <a:endParaRPr lang="en-US" sz="1350" dirty="0"/>
+          </a:p>
+        </p:txBody>
+      </p:sp>
+      <p:sp>
+        <p:nvSpPr>
+          <p:cNvPr id="15" name="Text 12"/>
+          <p:cNvSpPr/>
+          <p:nvPr/>
+        </p:nvSpPr>
+        <p:spPr>
+          <a:xfrm>
+            <a:off x="868680" y="3675888"/>
+            <a:ext cx="6492240" cy="310896"/>
+          </a:xfrm>
+          <a:prstGeom prst="rect">
+            <a:avLst/>
+          </a:prstGeom>
+          <a:noFill/>
+          <a:ln/>
+        </p:spPr>
+        <p:txBody>
+          <a:bodyPr wrap="square" lIns="0" tIns="0" rIns="0" bIns="0" rtlCol="0" anchor="ctr"/>
+          <a:lstStyle/>
+          <a:p>
+            <a:pPr indent="0" marL="0">
+              <a:buNone/>
+            </a:pPr>
+            <a:r>
+              <a:rPr lang="en-US" sz="1100" dirty="0">
+                <a:solidFill>
+                  <a:srgbClr val="B6C0CB"/>
+                </a:solidFill>
+                <a:latin typeface="Calibri" pitchFamily="34" charset="0"/>
+                <a:ea typeface="Calibri" pitchFamily="34" charset="-122"/>
+                <a:cs typeface="Calibri" pitchFamily="34" charset="-120"/>
+              </a:rPr>
+              <a:t>One person, two places at once — across sorties, sims, duties and meetings.</a:t>
+            </a:r>
+            <a:endParaRPr lang="en-US" sz="1100" dirty="0"/>
+          </a:p>
+        </p:txBody>
+      </p:sp>
+      <p:sp>
+        <p:nvSpPr>
+          <p:cNvPr id="16" name="Shape 13"/>
+          <p:cNvSpPr/>
+          <p:nvPr/>
+        </p:nvSpPr>
+        <p:spPr>
+          <a:xfrm>
+            <a:off x="640080" y="4114800"/>
+            <a:ext cx="6903720" cy="749808"/>
+          </a:xfrm>
+          <a:prstGeom prst="roundRect">
+            <a:avLst>
+              <a:gd name="adj" fmla="val 8537"/>
+            </a:avLst>
+          </a:prstGeom>
+          <a:solidFill>
+            <a:srgbClr val="14181D"/>
+          </a:solidFill>
+          <a:ln w="12700">
+            <a:solidFill>
+              <a:srgbClr val="2A313A"/>
+            </a:solidFill>
+            <a:prstDash val="solid"/>
+          </a:ln>
+        </p:spPr>
+      </p:sp>
+      <p:sp>
+        <p:nvSpPr>
+          <p:cNvPr id="17" name="Shape 14"/>
+          <p:cNvSpPr/>
+          <p:nvPr/>
+        </p:nvSpPr>
+        <p:spPr>
+          <a:xfrm>
+            <a:off x="640080" y="4114800"/>
+            <a:ext cx="100584" cy="749808"/>
+          </a:xfrm>
+          <a:prstGeom prst="roundRect">
+            <a:avLst>
+              <a:gd name="adj" fmla="val 18182"/>
+            </a:avLst>
+          </a:prstGeom>
+          <a:solidFill>
+            <a:srgbClr val="F0555F"/>
+          </a:solidFill>
+          <a:ln/>
+        </p:spPr>
+      </p:sp>
+      <p:sp>
+        <p:nvSpPr>
+          <p:cNvPr id="18" name="Text 15"/>
+          <p:cNvSpPr/>
+          <p:nvPr/>
+        </p:nvSpPr>
+        <p:spPr>
+          <a:xfrm>
+            <a:off x="868680" y="4206240"/>
+            <a:ext cx="6309360" cy="274320"/>
+          </a:xfrm>
+          <a:prstGeom prst="rect">
+            <a:avLst/>
+          </a:prstGeom>
+          <a:noFill/>
+          <a:ln/>
+        </p:spPr>
+        <p:txBody>
+          <a:bodyPr wrap="square" lIns="0" tIns="0" rIns="0" bIns="0" rtlCol="0" anchor="ctr"/>
+          <a:lstStyle/>
+          <a:p>
+            <a:pPr indent="0" marL="0">
+              <a:buNone/>
+            </a:pPr>
+            <a:r>
+              <a:rPr lang="en-US" sz="1350" b="1" dirty="0">
+                <a:solidFill>
+                  <a:srgbClr val="F1F4F7"/>
+                </a:solidFill>
+                <a:latin typeface="Arial" pitchFamily="34" charset="0"/>
+                <a:ea typeface="Arial" pitchFamily="34" charset="-122"/>
+                <a:cs typeface="Arial" pitchFamily="34" charset="-120"/>
+              </a:rPr>
+              <a:t>Downchit but tasked</a:t>
+            </a:r>
+            <a:endParaRPr lang="en-US" sz="1350" dirty="0"/>
+          </a:p>
+        </p:txBody>
+      </p:sp>
+      <p:sp>
+        <p:nvSpPr>
+          <p:cNvPr id="19" name="Text 16"/>
+          <p:cNvSpPr/>
+          <p:nvPr/>
+        </p:nvSpPr>
+        <p:spPr>
+          <a:xfrm>
+            <a:off x="868680" y="4498848"/>
+            <a:ext cx="6492240" cy="310896"/>
+          </a:xfrm>
+          <a:prstGeom prst="rect">
+            <a:avLst/>
+          </a:prstGeom>
+          <a:noFill/>
+          <a:ln/>
+        </p:spPr>
+        <p:txBody>
+          <a:bodyPr wrap="square" lIns="0" tIns="0" rIns="0" bIns="0" rtlCol="0" anchor="ctr"/>
+          <a:lstStyle/>
+          <a:p>
+            <a:pPr indent="0" marL="0">
+              <a:buNone/>
+            </a:pPr>
+            <a:r>
+              <a:rPr lang="en-US" sz="1100" dirty="0">
+                <a:solidFill>
+                  <a:srgbClr val="B6C0CB"/>
+                </a:solidFill>
+                <a:latin typeface="Calibri" pitchFamily="34" charset="0"/>
+                <a:ea typeface="Calibri" pitchFamily="34" charset="-122"/>
+                <a:cs typeface="Calibri" pitchFamily="34" charset="-120"/>
+              </a:rPr>
+              <a:t>Someone medically down still on a flying line — flagged with the reason and dates.</a:t>
+            </a:r>
+            <a:endParaRPr lang="en-US" sz="1100" dirty="0"/>
+          </a:p>
+        </p:txBody>
+      </p:sp>
+      <p:sp>
+        <p:nvSpPr>
+          <p:cNvPr id="20" name="Shape 17"/>
+          <p:cNvSpPr/>
+          <p:nvPr/>
+        </p:nvSpPr>
+        <p:spPr>
+          <a:xfrm>
+            <a:off x="640080" y="4937760"/>
+            <a:ext cx="6903720" cy="749808"/>
+          </a:xfrm>
+          <a:prstGeom prst="roundRect">
+            <a:avLst>
+              <a:gd name="adj" fmla="val 8537"/>
+            </a:avLst>
+          </a:prstGeom>
+          <a:solidFill>
+            <a:srgbClr val="14181D"/>
+          </a:solidFill>
+          <a:ln w="12700">
+            <a:solidFill>
+              <a:srgbClr val="2A313A"/>
+            </a:solidFill>
+            <a:prstDash val="solid"/>
+          </a:ln>
+        </p:spPr>
+      </p:sp>
+      <p:sp>
+        <p:nvSpPr>
+          <p:cNvPr id="21" name="Shape 18"/>
+          <p:cNvSpPr/>
+          <p:nvPr/>
+        </p:nvSpPr>
+        <p:spPr>
+          <a:xfrm>
+            <a:off x="640080" y="4937760"/>
+            <a:ext cx="100584" cy="749808"/>
+          </a:xfrm>
+          <a:prstGeom prst="roundRect">
+            <a:avLst>
+              <a:gd name="adj" fmla="val 18182"/>
+            </a:avLst>
+          </a:prstGeom>
+          <a:solidFill>
+            <a:srgbClr val="E5A83B"/>
+          </a:solidFill>
+          <a:ln/>
+        </p:spPr>
+      </p:sp>
+      <p:sp>
+        <p:nvSpPr>
+          <p:cNvPr id="22" name="Text 19"/>
+          <p:cNvSpPr/>
+          <p:nvPr/>
+        </p:nvSpPr>
+        <p:spPr>
+          <a:xfrm>
+            <a:off x="868680" y="5029200"/>
+            <a:ext cx="6309360" cy="274320"/>
+          </a:xfrm>
+          <a:prstGeom prst="rect">
+            <a:avLst/>
+          </a:prstGeom>
+          <a:noFill/>
+          <a:ln/>
+        </p:spPr>
+        <p:txBody>
+          <a:bodyPr wrap="square" lIns="0" tIns="0" rIns="0" bIns="0" rtlCol="0" anchor="ctr"/>
+          <a:lstStyle/>
+          <a:p>
+            <a:pPr indent="0" marL="0">
+              <a:buNone/>
+            </a:pPr>
+            <a:r>
+              <a:rPr lang="en-US" sz="1350" b="1" dirty="0">
+                <a:solidFill>
+                  <a:srgbClr val="F1F4F7"/>
+                </a:solidFill>
+                <a:latin typeface="Arial" pitchFamily="34" charset="0"/>
+                <a:ea typeface="Arial" pitchFamily="34" charset="-122"/>
+                <a:cs typeface="Arial" pitchFamily="34" charset="-120"/>
+              </a:rPr>
+              <a:t>No time for the brief</a:t>
+            </a:r>
+            <a:endParaRPr lang="en-US" sz="1350" dirty="0"/>
+          </a:p>
+        </p:txBody>
+      </p:sp>
+      <p:sp>
+        <p:nvSpPr>
+          <p:cNvPr id="23" name="Text 20"/>
+          <p:cNvSpPr/>
+          <p:nvPr/>
+        </p:nvSpPr>
+        <p:spPr>
+          <a:xfrm>
+            <a:off x="868680" y="5321808"/>
+            <a:ext cx="6492240" cy="310896"/>
+          </a:xfrm>
+          <a:prstGeom prst="rect">
+            <a:avLst/>
+          </a:prstGeom>
+          <a:noFill/>
+          <a:ln/>
+        </p:spPr>
+        <p:txBody>
+          <a:bodyPr wrap="square" lIns="0" tIns="0" rIns="0" bIns="0" rtlCol="0" anchor="ctr"/>
+          <a:lstStyle/>
+          <a:p>
+            <a:pPr indent="0" marL="0">
+              <a:buNone/>
+            </a:pPr>
+            <a:r>
+              <a:rPr lang="en-US" sz="1100" dirty="0">
+                <a:solidFill>
+                  <a:srgbClr val="B6C0CB"/>
+                </a:solidFill>
+                <a:latin typeface="Calibri" pitchFamily="34" charset="0"/>
+                <a:ea typeface="Calibri" pitchFamily="34" charset="-122"/>
+                <a:cs typeface="Calibri" pitchFamily="34" charset="-120"/>
+              </a:rPr>
+              <a:t>A meeting or sim sits inside the flight's brief window — the brief can't happen.</a:t>
+            </a:r>
+            <a:endParaRPr lang="en-US" sz="1100" dirty="0"/>
+          </a:p>
+        </p:txBody>
+      </p:sp>
+      <p:sp>
+        <p:nvSpPr>
+          <p:cNvPr id="24" name="Shape 21"/>
+          <p:cNvSpPr/>
+          <p:nvPr/>
+        </p:nvSpPr>
+        <p:spPr>
+          <a:xfrm>
+            <a:off x="640080" y="5760720"/>
+            <a:ext cx="6903720" cy="749808"/>
+          </a:xfrm>
+          <a:prstGeom prst="roundRect">
+            <a:avLst>
+              <a:gd name="adj" fmla="val 8537"/>
+            </a:avLst>
+          </a:prstGeom>
+          <a:solidFill>
+            <a:srgbClr val="14181D"/>
+          </a:solidFill>
+          <a:ln w="12700">
+            <a:solidFill>
+              <a:srgbClr val="2A313A"/>
+            </a:solidFill>
+            <a:prstDash val="solid"/>
+          </a:ln>
+        </p:spPr>
+      </p:sp>
+      <p:sp>
+        <p:nvSpPr>
+          <p:cNvPr id="25" name="Shape 22"/>
+          <p:cNvSpPr/>
+          <p:nvPr/>
+        </p:nvSpPr>
+        <p:spPr>
+          <a:xfrm>
+            <a:off x="640080" y="5760720"/>
+            <a:ext cx="100584" cy="749808"/>
+          </a:xfrm>
+          <a:prstGeom prst="roundRect">
+            <a:avLst>
+              <a:gd name="adj" fmla="val 18182"/>
+            </a:avLst>
+          </a:prstGeom>
+          <a:solidFill>
+            <a:srgbClr val="F0555F"/>
+          </a:solidFill>
+          <a:ln/>
+        </p:spPr>
+      </p:sp>
+      <p:sp>
+        <p:nvSpPr>
+          <p:cNvPr id="26" name="Text 23"/>
+          <p:cNvSpPr/>
+          <p:nvPr/>
+        </p:nvSpPr>
+        <p:spPr>
+          <a:xfrm>
+            <a:off x="868680" y="5852160"/>
+            <a:ext cx="6309360" cy="274320"/>
+          </a:xfrm>
+          <a:prstGeom prst="rect">
+            <a:avLst/>
+          </a:prstGeom>
+          <a:noFill/>
+          <a:ln/>
+        </p:spPr>
+        <p:txBody>
+          <a:bodyPr wrap="square" lIns="0" tIns="0" rIns="0" bIns="0" rtlCol="0" anchor="ctr"/>
+          <a:lstStyle/>
+          <a:p>
+            <a:pPr indent="0" marL="0">
+              <a:buNone/>
+            </a:pPr>
+            <a:r>
+              <a:rPr lang="en-US" sz="1350" b="1" dirty="0">
+                <a:solidFill>
+                  <a:srgbClr val="F1F4F7"/>
+                </a:solidFill>
+                <a:latin typeface="Arial" pitchFamily="34" charset="0"/>
+                <a:ea typeface="Arial" pitchFamily="34" charset="-122"/>
+                <a:cs typeface="Arial" pitchFamily="34" charset="-120"/>
+              </a:rPr>
+              <a:t>Illegal crew combination</a:t>
+            </a:r>
+            <a:endParaRPr lang="en-US" sz="1350" dirty="0"/>
+          </a:p>
+        </p:txBody>
+      </p:sp>
+      <p:sp>
+        <p:nvSpPr>
+          <p:cNvPr id="27" name="Text 24"/>
+          <p:cNvSpPr/>
+          <p:nvPr/>
+        </p:nvSpPr>
+        <p:spPr>
+          <a:xfrm>
+            <a:off x="868680" y="6144768"/>
+            <a:ext cx="6492240" cy="310896"/>
+          </a:xfrm>
+          <a:prstGeom prst="rect">
+            <a:avLst/>
+          </a:prstGeom>
+          <a:noFill/>
+          <a:ln/>
+        </p:spPr>
+        <p:txBody>
+          <a:bodyPr wrap="square" lIns="0" tIns="0" rIns="0" bIns="0" rtlCol="0" anchor="ctr"/>
+          <a:lstStyle/>
+          <a:p>
+            <a:pPr indent="0" marL="0">
+              <a:buNone/>
+            </a:pPr>
+            <a:r>
+              <a:rPr lang="en-US" sz="1100" dirty="0">
+                <a:solidFill>
+                  <a:srgbClr val="B6C0CB"/>
+                </a:solidFill>
+                <a:latin typeface="Calibri" pitchFamily="34" charset="0"/>
+                <a:ea typeface="Calibri" pitchFamily="34" charset="-122"/>
+                <a:cs typeface="Calibri" pitchFamily="34" charset="-120"/>
+              </a:rPr>
+              <a:t>“OCU pilot with CAT C WSO — not an authorised combination” — quals checked on every pairing.</a:t>
+            </a:r>
+            <a:endParaRPr lang="en-US" sz="1100" dirty="0"/>
+          </a:p>
+        </p:txBody>
+      </p:sp>
+      <p:sp>
+        <p:nvSpPr>
+          <p:cNvPr id="28" name="Text 25"/>
+          <p:cNvSpPr/>
+          <p:nvPr/>
+        </p:nvSpPr>
+        <p:spPr>
+          <a:xfrm>
+            <a:off x="640080" y="6601968"/>
+            <a:ext cx="6858000" cy="320040"/>
+          </a:xfrm>
+          <a:prstGeom prst="rect">
+            <a:avLst/>
+          </a:prstGeom>
+          <a:noFill/>
+          <a:ln/>
+        </p:spPr>
+        <p:txBody>
+          <a:bodyPr wrap="square" lIns="0" tIns="0" rIns="0" bIns="0" rtlCol="0" anchor="ctr"/>
+          <a:lstStyle/>
+          <a:p>
+            <a:pPr indent="0" marL="0">
+              <a:buNone/>
+            </a:pPr>
+            <a:r>
+              <a:rPr lang="en-US" sz="1150" i="1" dirty="0">
+                <a:solidFill>
+                  <a:srgbClr val="3BC6E8"/>
+                </a:solidFill>
+                <a:latin typeface="Calibri" pitchFamily="34" charset="0"/>
+                <a:ea typeface="Calibri" pitchFamily="34" charset="-122"/>
+                <a:cs typeface="Calibri" pitchFamily="34" charset="-120"/>
+              </a:rPr>
+              <a:t>A soft bar: it warns clearly and grades severity, but the planner stays in command.</a:t>
+            </a:r>
+            <a:endParaRPr lang="en-US" sz="1150" dirty="0"/>
+          </a:p>
+        </p:txBody>
+      </p:sp>
+      <p:sp>
+        <p:nvSpPr>
+          <p:cNvPr id="29" name="Shape 26"/>
+          <p:cNvSpPr/>
+          <p:nvPr/>
+        </p:nvSpPr>
+        <p:spPr>
+          <a:xfrm>
             <a:off x="7790688" y="1024128"/>
             <a:ext cx="3758184" cy="5449824"/>
           </a:xfrm>
@@ -4204,7 +6229,7 @@
       </p:sp>
       <p:sp>
         <p:nvSpPr>
-          <p:cNvPr id="9" name="Shape 6"/>
+          <p:cNvPr id="30" name="Shape 27"/>
           <p:cNvSpPr/>
           <p:nvPr/>
         </p:nvSpPr>
@@ -4231,7 +6256,7 @@
       </p:sp>
       <p:pic>
         <p:nvPicPr>
-          <p:cNvPr id="10" name="Image 1" descr="preencoded.png">    </p:cNvPr>
+          <p:cNvPr id="31" name="Image 1" descr="preencoded.png">    </p:cNvPr>
           <p:cNvPicPr>
             <a:picLocks noChangeAspect="1"/>
           </p:cNvPicPr>
@@ -4253,680 +6278,6 @@
           </a:prstGeom>
         </p:spPr>
       </p:pic>
-      <p:sp>
-        <p:nvSpPr>
-          <p:cNvPr id="11" name="Shape 7"/>
-          <p:cNvSpPr/>
-          <p:nvPr/>
-        </p:nvSpPr>
-        <p:spPr>
-          <a:xfrm>
-            <a:off x="640080" y="2468880"/>
-            <a:ext cx="6903720" cy="749808"/>
-          </a:xfrm>
-          <a:prstGeom prst="roundRect">
-            <a:avLst>
-              <a:gd name="adj" fmla="val 8537"/>
-            </a:avLst>
-          </a:prstGeom>
-          <a:solidFill>
-            <a:srgbClr val="14181D"/>
-          </a:solidFill>
-          <a:ln w="12700">
-            <a:solidFill>
-              <a:srgbClr val="2A313A"/>
-            </a:solidFill>
-            <a:prstDash val="solid"/>
-          </a:ln>
-        </p:spPr>
-      </p:sp>
-      <p:sp>
-        <p:nvSpPr>
-          <p:cNvPr id="12" name="Shape 8"/>
-          <p:cNvSpPr/>
-          <p:nvPr/>
-        </p:nvSpPr>
-        <p:spPr>
-          <a:xfrm>
-            <a:off x="640080" y="2468880"/>
-            <a:ext cx="100584" cy="749808"/>
-          </a:xfrm>
-          <a:prstGeom prst="roundRect">
-            <a:avLst>
-              <a:gd name="adj" fmla="val 18182"/>
-            </a:avLst>
-          </a:prstGeom>
-          <a:solidFill>
-            <a:srgbClr val="F0555F"/>
-          </a:solidFill>
-          <a:ln/>
-        </p:spPr>
-      </p:sp>
-      <p:sp>
-        <p:nvSpPr>
-          <p:cNvPr id="13" name="Text 9"/>
-          <p:cNvSpPr/>
-          <p:nvPr/>
-        </p:nvSpPr>
-        <p:spPr>
-          <a:xfrm>
-            <a:off x="868680" y="2560320"/>
-            <a:ext cx="6309360" cy="274320"/>
-          </a:xfrm>
-          <a:prstGeom prst="rect">
-            <a:avLst/>
-          </a:prstGeom>
-          <a:noFill/>
-          <a:ln/>
-        </p:spPr>
-        <p:txBody>
-          <a:bodyPr wrap="square" lIns="0" tIns="0" rIns="0" bIns="0" rtlCol="0" anchor="ctr"/>
-          <a:lstStyle/>
-          <a:p>
-            <a:pPr indent="0" marL="0">
-              <a:buNone/>
-            </a:pPr>
-            <a:r>
-              <a:rPr lang="en-US" sz="1350" b="1" dirty="0">
-                <a:solidFill>
-                  <a:srgbClr val="F1F4F7"/>
-                </a:solidFill>
-                <a:latin typeface="Arial" pitchFamily="34" charset="0"/>
-                <a:ea typeface="Arial" pitchFamily="34" charset="-122"/>
-                <a:cs typeface="Arial" pitchFamily="34" charset="-120"/>
-              </a:rPr>
-              <a:t>Crew-rest breach</a:t>
-            </a:r>
-            <a:endParaRPr lang="en-US" sz="1350" dirty="0"/>
-          </a:p>
-        </p:txBody>
-      </p:sp>
-      <p:sp>
-        <p:nvSpPr>
-          <p:cNvPr id="14" name="Text 10"/>
-          <p:cNvSpPr/>
-          <p:nvPr/>
-        </p:nvSpPr>
-        <p:spPr>
-          <a:xfrm>
-            <a:off x="868680" y="2852928"/>
-            <a:ext cx="6492240" cy="310896"/>
-          </a:xfrm>
-          <a:prstGeom prst="rect">
-            <a:avLst/>
-          </a:prstGeom>
-          <a:noFill/>
-          <a:ln/>
-        </p:spPr>
-        <p:txBody>
-          <a:bodyPr wrap="square" lIns="0" tIns="0" rIns="0" bIns="0" rtlCol="0" anchor="ctr"/>
-          <a:lstStyle/>
-          <a:p>
-            <a:pPr indent="0" marL="0">
-              <a:buNone/>
-            </a:pPr>
-            <a:r>
-              <a:rPr lang="en-US" sz="1100" dirty="0">
-                <a:solidFill>
-                  <a:srgbClr val="B6C0CB"/>
-                </a:solidFill>
-                <a:latin typeface="Calibri" pitchFamily="34" charset="0"/>
-                <a:ea typeface="Calibri" pitchFamily="34" charset="-122"/>
-                <a:cs typeface="Calibri" pitchFamily="34" charset="-120"/>
-              </a:rPr>
-              <a:t>Late land last night vs. an early report — RAPTOR does the maths and names who's short.</a:t>
-            </a:r>
-            <a:endParaRPr lang="en-US" sz="1100" dirty="0"/>
-          </a:p>
-        </p:txBody>
-      </p:sp>
-      <p:sp>
-        <p:nvSpPr>
-          <p:cNvPr id="15" name="Shape 11"/>
-          <p:cNvSpPr/>
-          <p:nvPr/>
-        </p:nvSpPr>
-        <p:spPr>
-          <a:xfrm>
-            <a:off x="640080" y="3291840"/>
-            <a:ext cx="6903720" cy="749808"/>
-          </a:xfrm>
-          <a:prstGeom prst="roundRect">
-            <a:avLst>
-              <a:gd name="adj" fmla="val 8537"/>
-            </a:avLst>
-          </a:prstGeom>
-          <a:solidFill>
-            <a:srgbClr val="14181D"/>
-          </a:solidFill>
-          <a:ln w="12700">
-            <a:solidFill>
-              <a:srgbClr val="2A313A"/>
-            </a:solidFill>
-            <a:prstDash val="solid"/>
-          </a:ln>
-        </p:spPr>
-      </p:sp>
-      <p:sp>
-        <p:nvSpPr>
-          <p:cNvPr id="16" name="Shape 12"/>
-          <p:cNvSpPr/>
-          <p:nvPr/>
-        </p:nvSpPr>
-        <p:spPr>
-          <a:xfrm>
-            <a:off x="640080" y="3291840"/>
-            <a:ext cx="100584" cy="749808"/>
-          </a:xfrm>
-          <a:prstGeom prst="roundRect">
-            <a:avLst>
-              <a:gd name="adj" fmla="val 18182"/>
-            </a:avLst>
-          </a:prstGeom>
-          <a:solidFill>
-            <a:srgbClr val="F0555F"/>
-          </a:solidFill>
-          <a:ln/>
-        </p:spPr>
-      </p:sp>
-      <p:sp>
-        <p:nvSpPr>
-          <p:cNvPr id="17" name="Text 13"/>
-          <p:cNvSpPr/>
-          <p:nvPr/>
-        </p:nvSpPr>
-        <p:spPr>
-          <a:xfrm>
-            <a:off x="868680" y="3383280"/>
-            <a:ext cx="6309360" cy="274320"/>
-          </a:xfrm>
-          <a:prstGeom prst="rect">
-            <a:avLst/>
-          </a:prstGeom>
-          <a:noFill/>
-          <a:ln/>
-        </p:spPr>
-        <p:txBody>
-          <a:bodyPr wrap="square" lIns="0" tIns="0" rIns="0" bIns="0" rtlCol="0" anchor="ctr"/>
-          <a:lstStyle/>
-          <a:p>
-            <a:pPr indent="0" marL="0">
-              <a:buNone/>
-            </a:pPr>
-            <a:r>
-              <a:rPr lang="en-US" sz="1350" b="1" dirty="0">
-                <a:solidFill>
-                  <a:srgbClr val="F1F4F7"/>
-                </a:solidFill>
-                <a:latin typeface="Arial" pitchFamily="34" charset="0"/>
-                <a:ea typeface="Arial" pitchFamily="34" charset="-122"/>
-                <a:cs typeface="Arial" pitchFamily="34" charset="-120"/>
-              </a:rPr>
-              <a:t>Double-booking / clash</a:t>
-            </a:r>
-            <a:endParaRPr lang="en-US" sz="1350" dirty="0"/>
-          </a:p>
-        </p:txBody>
-      </p:sp>
-      <p:sp>
-        <p:nvSpPr>
-          <p:cNvPr id="18" name="Text 14"/>
-          <p:cNvSpPr/>
-          <p:nvPr/>
-        </p:nvSpPr>
-        <p:spPr>
-          <a:xfrm>
-            <a:off x="868680" y="3675888"/>
-            <a:ext cx="6492240" cy="310896"/>
-          </a:xfrm>
-          <a:prstGeom prst="rect">
-            <a:avLst/>
-          </a:prstGeom>
-          <a:noFill/>
-          <a:ln/>
-        </p:spPr>
-        <p:txBody>
-          <a:bodyPr wrap="square" lIns="0" tIns="0" rIns="0" bIns="0" rtlCol="0" anchor="ctr"/>
-          <a:lstStyle/>
-          <a:p>
-            <a:pPr indent="0" marL="0">
-              <a:buNone/>
-            </a:pPr>
-            <a:r>
-              <a:rPr lang="en-US" sz="1100" dirty="0">
-                <a:solidFill>
-                  <a:srgbClr val="B6C0CB"/>
-                </a:solidFill>
-                <a:latin typeface="Calibri" pitchFamily="34" charset="0"/>
-                <a:ea typeface="Calibri" pitchFamily="34" charset="-122"/>
-                <a:cs typeface="Calibri" pitchFamily="34" charset="-120"/>
-              </a:rPr>
-              <a:t>One person, two places at once — across sorties, sims, duties and meetings.</a:t>
-            </a:r>
-            <a:endParaRPr lang="en-US" sz="1100" dirty="0"/>
-          </a:p>
-        </p:txBody>
-      </p:sp>
-      <p:sp>
-        <p:nvSpPr>
-          <p:cNvPr id="19" name="Shape 15"/>
-          <p:cNvSpPr/>
-          <p:nvPr/>
-        </p:nvSpPr>
-        <p:spPr>
-          <a:xfrm>
-            <a:off x="640080" y="4114800"/>
-            <a:ext cx="6903720" cy="749808"/>
-          </a:xfrm>
-          <a:prstGeom prst="roundRect">
-            <a:avLst>
-              <a:gd name="adj" fmla="val 8537"/>
-            </a:avLst>
-          </a:prstGeom>
-          <a:solidFill>
-            <a:srgbClr val="14181D"/>
-          </a:solidFill>
-          <a:ln w="12700">
-            <a:solidFill>
-              <a:srgbClr val="2A313A"/>
-            </a:solidFill>
-            <a:prstDash val="solid"/>
-          </a:ln>
-        </p:spPr>
-      </p:sp>
-      <p:sp>
-        <p:nvSpPr>
-          <p:cNvPr id="20" name="Shape 16"/>
-          <p:cNvSpPr/>
-          <p:nvPr/>
-        </p:nvSpPr>
-        <p:spPr>
-          <a:xfrm>
-            <a:off x="640080" y="4114800"/>
-            <a:ext cx="100584" cy="749808"/>
-          </a:xfrm>
-          <a:prstGeom prst="roundRect">
-            <a:avLst>
-              <a:gd name="adj" fmla="val 18182"/>
-            </a:avLst>
-          </a:prstGeom>
-          <a:solidFill>
-            <a:srgbClr val="F0555F"/>
-          </a:solidFill>
-          <a:ln/>
-        </p:spPr>
-      </p:sp>
-      <p:sp>
-        <p:nvSpPr>
-          <p:cNvPr id="21" name="Text 17"/>
-          <p:cNvSpPr/>
-          <p:nvPr/>
-        </p:nvSpPr>
-        <p:spPr>
-          <a:xfrm>
-            <a:off x="868680" y="4206240"/>
-            <a:ext cx="6309360" cy="274320"/>
-          </a:xfrm>
-          <a:prstGeom prst="rect">
-            <a:avLst/>
-          </a:prstGeom>
-          <a:noFill/>
-          <a:ln/>
-        </p:spPr>
-        <p:txBody>
-          <a:bodyPr wrap="square" lIns="0" tIns="0" rIns="0" bIns="0" rtlCol="0" anchor="ctr"/>
-          <a:lstStyle/>
-          <a:p>
-            <a:pPr indent="0" marL="0">
-              <a:buNone/>
-            </a:pPr>
-            <a:r>
-              <a:rPr lang="en-US" sz="1350" b="1" dirty="0">
-                <a:solidFill>
-                  <a:srgbClr val="F1F4F7"/>
-                </a:solidFill>
-                <a:latin typeface="Arial" pitchFamily="34" charset="0"/>
-                <a:ea typeface="Arial" pitchFamily="34" charset="-122"/>
-                <a:cs typeface="Arial" pitchFamily="34" charset="-120"/>
-              </a:rPr>
-              <a:t>Downchit but tasked</a:t>
-            </a:r>
-            <a:endParaRPr lang="en-US" sz="1350" dirty="0"/>
-          </a:p>
-        </p:txBody>
-      </p:sp>
-      <p:sp>
-        <p:nvSpPr>
-          <p:cNvPr id="22" name="Text 18"/>
-          <p:cNvSpPr/>
-          <p:nvPr/>
-        </p:nvSpPr>
-        <p:spPr>
-          <a:xfrm>
-            <a:off x="868680" y="4498848"/>
-            <a:ext cx="6492240" cy="310896"/>
-          </a:xfrm>
-          <a:prstGeom prst="rect">
-            <a:avLst/>
-          </a:prstGeom>
-          <a:noFill/>
-          <a:ln/>
-        </p:spPr>
-        <p:txBody>
-          <a:bodyPr wrap="square" lIns="0" tIns="0" rIns="0" bIns="0" rtlCol="0" anchor="ctr"/>
-          <a:lstStyle/>
-          <a:p>
-            <a:pPr indent="0" marL="0">
-              <a:buNone/>
-            </a:pPr>
-            <a:r>
-              <a:rPr lang="en-US" sz="1100" dirty="0">
-                <a:solidFill>
-                  <a:srgbClr val="B6C0CB"/>
-                </a:solidFill>
-                <a:latin typeface="Calibri" pitchFamily="34" charset="0"/>
-                <a:ea typeface="Calibri" pitchFamily="34" charset="-122"/>
-                <a:cs typeface="Calibri" pitchFamily="34" charset="-120"/>
-              </a:rPr>
-              <a:t>Someone medically down still on a flying line — flagged with the reason and dates.</a:t>
-            </a:r>
-            <a:endParaRPr lang="en-US" sz="1100" dirty="0"/>
-          </a:p>
-        </p:txBody>
-      </p:sp>
-      <p:sp>
-        <p:nvSpPr>
-          <p:cNvPr id="23" name="Shape 19"/>
-          <p:cNvSpPr/>
-          <p:nvPr/>
-        </p:nvSpPr>
-        <p:spPr>
-          <a:xfrm>
-            <a:off x="640080" y="4937760"/>
-            <a:ext cx="6903720" cy="749808"/>
-          </a:xfrm>
-          <a:prstGeom prst="roundRect">
-            <a:avLst>
-              <a:gd name="adj" fmla="val 8537"/>
-            </a:avLst>
-          </a:prstGeom>
-          <a:solidFill>
-            <a:srgbClr val="14181D"/>
-          </a:solidFill>
-          <a:ln w="12700">
-            <a:solidFill>
-              <a:srgbClr val="2A313A"/>
-            </a:solidFill>
-            <a:prstDash val="solid"/>
-          </a:ln>
-        </p:spPr>
-      </p:sp>
-      <p:sp>
-        <p:nvSpPr>
-          <p:cNvPr id="24" name="Shape 20"/>
-          <p:cNvSpPr/>
-          <p:nvPr/>
-        </p:nvSpPr>
-        <p:spPr>
-          <a:xfrm>
-            <a:off x="640080" y="4937760"/>
-            <a:ext cx="100584" cy="749808"/>
-          </a:xfrm>
-          <a:prstGeom prst="roundRect">
-            <a:avLst>
-              <a:gd name="adj" fmla="val 18182"/>
-            </a:avLst>
-          </a:prstGeom>
-          <a:solidFill>
-            <a:srgbClr val="E5A83B"/>
-          </a:solidFill>
-          <a:ln/>
-        </p:spPr>
-      </p:sp>
-      <p:sp>
-        <p:nvSpPr>
-          <p:cNvPr id="25" name="Text 21"/>
-          <p:cNvSpPr/>
-          <p:nvPr/>
-        </p:nvSpPr>
-        <p:spPr>
-          <a:xfrm>
-            <a:off x="868680" y="5029200"/>
-            <a:ext cx="6309360" cy="274320"/>
-          </a:xfrm>
-          <a:prstGeom prst="rect">
-            <a:avLst/>
-          </a:prstGeom>
-          <a:noFill/>
-          <a:ln/>
-        </p:spPr>
-        <p:txBody>
-          <a:bodyPr wrap="square" lIns="0" tIns="0" rIns="0" bIns="0" rtlCol="0" anchor="ctr"/>
-          <a:lstStyle/>
-          <a:p>
-            <a:pPr indent="0" marL="0">
-              <a:buNone/>
-            </a:pPr>
-            <a:r>
-              <a:rPr lang="en-US" sz="1350" b="1" dirty="0">
-                <a:solidFill>
-                  <a:srgbClr val="F1F4F7"/>
-                </a:solidFill>
-                <a:latin typeface="Arial" pitchFamily="34" charset="0"/>
-                <a:ea typeface="Arial" pitchFamily="34" charset="-122"/>
-                <a:cs typeface="Arial" pitchFamily="34" charset="-120"/>
-              </a:rPr>
-              <a:t>No time for the brief</a:t>
-            </a:r>
-            <a:endParaRPr lang="en-US" sz="1350" dirty="0"/>
-          </a:p>
-        </p:txBody>
-      </p:sp>
-      <p:sp>
-        <p:nvSpPr>
-          <p:cNvPr id="26" name="Text 22"/>
-          <p:cNvSpPr/>
-          <p:nvPr/>
-        </p:nvSpPr>
-        <p:spPr>
-          <a:xfrm>
-            <a:off x="868680" y="5321808"/>
-            <a:ext cx="6492240" cy="310896"/>
-          </a:xfrm>
-          <a:prstGeom prst="rect">
-            <a:avLst/>
-          </a:prstGeom>
-          <a:noFill/>
-          <a:ln/>
-        </p:spPr>
-        <p:txBody>
-          <a:bodyPr wrap="square" lIns="0" tIns="0" rIns="0" bIns="0" rtlCol="0" anchor="ctr"/>
-          <a:lstStyle/>
-          <a:p>
-            <a:pPr indent="0" marL="0">
-              <a:buNone/>
-            </a:pPr>
-            <a:r>
-              <a:rPr lang="en-US" sz="1100" dirty="0">
-                <a:solidFill>
-                  <a:srgbClr val="B6C0CB"/>
-                </a:solidFill>
-                <a:latin typeface="Calibri" pitchFamily="34" charset="0"/>
-                <a:ea typeface="Calibri" pitchFamily="34" charset="-122"/>
-                <a:cs typeface="Calibri" pitchFamily="34" charset="-120"/>
-              </a:rPr>
-              <a:t>A meeting or sim sits inside the flight's brief window — the brief can't happen.</a:t>
-            </a:r>
-            <a:endParaRPr lang="en-US" sz="1100" dirty="0"/>
-          </a:p>
-        </p:txBody>
-      </p:sp>
-      <p:sp>
-        <p:nvSpPr>
-          <p:cNvPr id="27" name="Shape 23"/>
-          <p:cNvSpPr/>
-          <p:nvPr/>
-        </p:nvSpPr>
-        <p:spPr>
-          <a:xfrm>
-            <a:off x="640080" y="5760720"/>
-            <a:ext cx="6903720" cy="749808"/>
-          </a:xfrm>
-          <a:prstGeom prst="roundRect">
-            <a:avLst>
-              <a:gd name="adj" fmla="val 8537"/>
-            </a:avLst>
-          </a:prstGeom>
-          <a:solidFill>
-            <a:srgbClr val="14181D"/>
-          </a:solidFill>
-          <a:ln w="12700">
-            <a:solidFill>
-              <a:srgbClr val="2A313A"/>
-            </a:solidFill>
-            <a:prstDash val="solid"/>
-          </a:ln>
-        </p:spPr>
-      </p:sp>
-      <p:sp>
-        <p:nvSpPr>
-          <p:cNvPr id="28" name="Shape 24"/>
-          <p:cNvSpPr/>
-          <p:nvPr/>
-        </p:nvSpPr>
-        <p:spPr>
-          <a:xfrm>
-            <a:off x="640080" y="5760720"/>
-            <a:ext cx="100584" cy="749808"/>
-          </a:xfrm>
-          <a:prstGeom prst="roundRect">
-            <a:avLst>
-              <a:gd name="adj" fmla="val 18182"/>
-            </a:avLst>
-          </a:prstGeom>
-          <a:solidFill>
-            <a:srgbClr val="E5A83B"/>
-          </a:solidFill>
-          <a:ln/>
-        </p:spPr>
-      </p:sp>
-      <p:sp>
-        <p:nvSpPr>
-          <p:cNvPr id="29" name="Text 25"/>
-          <p:cNvSpPr/>
-          <p:nvPr/>
-        </p:nvSpPr>
-        <p:spPr>
-          <a:xfrm>
-            <a:off x="868680" y="5852160"/>
-            <a:ext cx="6309360" cy="274320"/>
-          </a:xfrm>
-          <a:prstGeom prst="rect">
-            <a:avLst/>
-          </a:prstGeom>
-          <a:noFill/>
-          <a:ln/>
-        </p:spPr>
-        <p:txBody>
-          <a:bodyPr wrap="square" lIns="0" tIns="0" rIns="0" bIns="0" rtlCol="0" anchor="ctr"/>
-          <a:lstStyle/>
-          <a:p>
-            <a:pPr indent="0" marL="0">
-              <a:buNone/>
-            </a:pPr>
-            <a:r>
-              <a:rPr lang="en-US" sz="1350" b="1" dirty="0">
-                <a:solidFill>
-                  <a:srgbClr val="F1F4F7"/>
-                </a:solidFill>
-                <a:latin typeface="Arial" pitchFamily="34" charset="0"/>
-                <a:ea typeface="Arial" pitchFamily="34" charset="-122"/>
-                <a:cs typeface="Arial" pitchFamily="34" charset="-120"/>
-              </a:rPr>
-              <a:t>Qualification / currency</a:t>
-            </a:r>
-            <a:endParaRPr lang="en-US" sz="1350" dirty="0"/>
-          </a:p>
-        </p:txBody>
-      </p:sp>
-      <p:sp>
-        <p:nvSpPr>
-          <p:cNvPr id="30" name="Text 26"/>
-          <p:cNvSpPr/>
-          <p:nvPr/>
-        </p:nvSpPr>
-        <p:spPr>
-          <a:xfrm>
-            <a:off x="868680" y="6144768"/>
-            <a:ext cx="6492240" cy="310896"/>
-          </a:xfrm>
-          <a:prstGeom prst="rect">
-            <a:avLst/>
-          </a:prstGeom>
-          <a:noFill/>
-          <a:ln/>
-        </p:spPr>
-        <p:txBody>
-          <a:bodyPr wrap="square" lIns="0" tIns="0" rIns="0" bIns="0" rtlCol="0" anchor="ctr"/>
-          <a:lstStyle/>
-          <a:p>
-            <a:pPr indent="0" marL="0">
-              <a:buNone/>
-            </a:pPr>
-            <a:r>
-              <a:rPr lang="en-US" sz="1100" dirty="0">
-                <a:solidFill>
-                  <a:srgbClr val="B6C0CB"/>
-                </a:solidFill>
-                <a:latin typeface="Calibri" pitchFamily="34" charset="0"/>
-                <a:ea typeface="Calibri" pitchFamily="34" charset="-122"/>
-                <a:cs typeface="Calibri" pitchFamily="34" charset="-120"/>
-              </a:rPr>
-              <a:t>Not qualified or out of currency for the line they've been put on.</a:t>
-            </a:r>
-            <a:endParaRPr lang="en-US" sz="1100" dirty="0"/>
-          </a:p>
-        </p:txBody>
-      </p:sp>
-      <p:sp>
-        <p:nvSpPr>
-          <p:cNvPr id="31" name="Text 27"/>
-          <p:cNvSpPr/>
-          <p:nvPr/>
-        </p:nvSpPr>
-        <p:spPr>
-          <a:xfrm>
-            <a:off x="640080" y="6601968"/>
-            <a:ext cx="6858000" cy="320040"/>
-          </a:xfrm>
-          <a:prstGeom prst="rect">
-            <a:avLst/>
-          </a:prstGeom>
-          <a:noFill/>
-          <a:ln/>
-        </p:spPr>
-        <p:txBody>
-          <a:bodyPr wrap="square" lIns="0" tIns="0" rIns="0" bIns="0" rtlCol="0" anchor="ctr"/>
-          <a:lstStyle/>
-          <a:p>
-            <a:pPr indent="0" marL="0">
-              <a:buNone/>
-            </a:pPr>
-            <a:r>
-              <a:rPr lang="en-US" sz="1150" i="1" dirty="0">
-                <a:solidFill>
-                  <a:srgbClr val="3BC6E8"/>
-                </a:solidFill>
-                <a:latin typeface="Calibri" pitchFamily="34" charset="0"/>
-                <a:ea typeface="Calibri" pitchFamily="34" charset="-122"/>
-                <a:cs typeface="Calibri" pitchFamily="34" charset="-120"/>
-              </a:rPr>
-              <a:t>A soft bar: it warns clearly and grades severity, but the planner stays in command.</a:t>
-            </a:r>
-            <a:endParaRPr lang="en-US" sz="1150" dirty="0"/>
-          </a:p>
-        </p:txBody>
-      </p:sp>
     </p:spTree>
   </p:cSld>
   <p:clrMapOvr>
@@ -5772,7 +7123,7 @@
                 <a:ea typeface="Arial" pitchFamily="34" charset="-122"/>
                 <a:cs typeface="Arial" pitchFamily="34" charset="-120"/>
               </a:rPr>
-              <a:t>ONE PLACE FOR LEAVE, MEDICAL &amp; MANPOWER</a:t>
+              <a:t>YOUR WINGMAN · 3</a:t>
             </a:r>
             <a:endParaRPr lang="en-US" sz="1200" dirty="0"/>
           </a:p>
@@ -5803,7 +7154,7 @@
               <a:buNone/>
             </a:pPr>
             <a:r>
-              <a:rPr lang="en-US" sz="2900" b="1" dirty="0">
+              <a:rPr lang="en-US" sz="2800" b="1" dirty="0">
                 <a:solidFill>
                   <a:srgbClr val="F1F4F7"/>
                 </a:solidFill>
@@ -5811,65 +7162,26 @@
                 <a:ea typeface="Arial" pitchFamily="34" charset="-122"/>
                 <a:cs typeface="Arial" pitchFamily="34" charset="-120"/>
               </a:rPr>
-              <a:t>Leave, medical &amp; up-chits — filed once, synced everywhere</a:t>
-            </a:r>
-            <a:endParaRPr lang="en-US" sz="2900" dirty="0"/>
-          </a:p>
-        </p:txBody>
-      </p:sp>
-      <p:sp>
-        <p:nvSpPr>
-          <p:cNvPr id="7" name="Text 4"/>
-          <p:cNvSpPr/>
-          <p:nvPr/>
-        </p:nvSpPr>
-        <p:spPr>
-          <a:xfrm>
-            <a:off x="640080" y="1847088"/>
-            <a:ext cx="10972800" cy="365760"/>
-          </a:xfrm>
-          <a:prstGeom prst="rect">
-            <a:avLst/>
-          </a:prstGeom>
-          <a:noFill/>
-          <a:ln/>
-        </p:spPr>
-        <p:txBody>
-          <a:bodyPr wrap="square" lIns="0" tIns="0" rIns="0" bIns="0" rtlCol="0" anchor="ctr"/>
-          <a:lstStyle/>
-          <a:p>
-            <a:pPr indent="0" marL="0">
-              <a:buNone/>
-            </a:pPr>
-            <a:r>
-              <a:rPr lang="en-US" sz="1350" dirty="0">
-                <a:solidFill>
-                  <a:srgbClr val="B6C0CB"/>
-                </a:solidFill>
-                <a:latin typeface="Calibri" pitchFamily="34" charset="0"/>
-                <a:ea typeface="Calibri" pitchFamily="34" charset="-122"/>
-                <a:cs typeface="Calibri" pitchFamily="34" charset="-120"/>
-              </a:rPr>
-              <a:t>Approve a bid once and it flows onto the programme; file leave on the schedule and the balances draw down. Nobody re-types anything.</a:t>
-            </a:r>
-            <a:endParaRPr lang="en-US" sz="1350" dirty="0"/>
-          </a:p>
-        </p:txBody>
-      </p:sp>
-      <p:sp>
-        <p:nvSpPr>
-          <p:cNvPr id="8" name="Shape 5"/>
-          <p:cNvSpPr/>
-          <p:nvPr/>
-        </p:nvSpPr>
-        <p:spPr>
-          <a:xfrm>
-            <a:off x="612648" y="2304288"/>
-            <a:ext cx="7095744" cy="4169664"/>
+              <a:t>Flagged on the crew — and every rule is yours to tune</a:t>
+            </a:r>
+            <a:endParaRPr lang="en-US" sz="2800" dirty="0"/>
+          </a:p>
+        </p:txBody>
+      </p:sp>
+      <p:sp>
+        <p:nvSpPr>
+          <p:cNvPr id="7" name="Shape 4"/>
+          <p:cNvSpPr/>
+          <p:nvPr/>
+        </p:nvSpPr>
+        <p:spPr>
+          <a:xfrm>
+            <a:off x="612648" y="1755648"/>
+            <a:ext cx="6044184" cy="3054096"/>
           </a:xfrm>
           <a:prstGeom prst="roundRect">
             <a:avLst>
-              <a:gd name="adj" fmla="val 2193"/>
+              <a:gd name="adj" fmla="val 2994"/>
             </a:avLst>
           </a:prstGeom>
           <a:solidFill>
@@ -5887,18 +7199,217 @@
       </p:sp>
       <p:sp>
         <p:nvSpPr>
-          <p:cNvPr id="9" name="Shape 6"/>
-          <p:cNvSpPr/>
-          <p:nvPr/>
-        </p:nvSpPr>
-        <p:spPr>
-          <a:xfrm>
-            <a:off x="640080" y="2331720"/>
-            <a:ext cx="7040880" cy="4114800"/>
+          <p:cNvPr id="8" name="Shape 5"/>
+          <p:cNvSpPr/>
+          <p:nvPr/>
+        </p:nvSpPr>
+        <p:spPr>
+          <a:xfrm>
+            <a:off x="640080" y="1783080"/>
+            <a:ext cx="5989320" cy="2999232"/>
           </a:xfrm>
           <a:prstGeom prst="roundRect">
             <a:avLst>
-              <a:gd name="adj" fmla="val 2000"/>
+              <a:gd name="adj" fmla="val 2744"/>
+            </a:avLst>
+          </a:prstGeom>
+          <a:solidFill>
+            <a:srgbClr val="0E1116"/>
+          </a:solidFill>
+          <a:ln w="12700">
+            <a:solidFill>
+              <a:srgbClr val="F0555F"/>
+            </a:solidFill>
+            <a:prstDash val="solid"/>
+          </a:ln>
+        </p:spPr>
+      </p:sp>
+      <p:pic>
+        <p:nvPicPr>
+          <p:cNvPr id="9" name="Image 1" descr="preencoded.png">    </p:cNvPr>
+          <p:cNvPicPr>
+            <a:picLocks noChangeAspect="1"/>
+          </p:cNvPicPr>
+          <p:nvPr/>
+        </p:nvPicPr>
+        <p:blipFill>
+          <a:blip r:embed="rId2"/>
+          <a:stretch>
+            <a:fillRect/>
+          </a:stretch>
+        </p:blipFill>
+        <p:spPr>
+          <a:xfrm>
+            <a:off x="1138049" y="1837944"/>
+            <a:ext cx="4993382" cy="2889504"/>
+          </a:xfrm>
+          <a:prstGeom prst="rect">
+            <a:avLst/>
+          </a:prstGeom>
+        </p:spPr>
+      </p:pic>
+      <p:sp>
+        <p:nvSpPr>
+          <p:cNvPr id="10" name="Text 6"/>
+          <p:cNvSpPr/>
+          <p:nvPr/>
+        </p:nvSpPr>
+        <p:spPr>
+          <a:xfrm>
+            <a:off x="640080" y="4864608"/>
+            <a:ext cx="5989320" cy="274320"/>
+          </a:xfrm>
+          <a:prstGeom prst="rect">
+            <a:avLst/>
+          </a:prstGeom>
+          <a:noFill/>
+          <a:ln/>
+        </p:spPr>
+        <p:txBody>
+          <a:bodyPr wrap="square" lIns="0" tIns="0" rIns="0" bIns="0" rtlCol="0" anchor="ctr"/>
+          <a:lstStyle/>
+          <a:p>
+            <a:pPr indent="0" marL="0">
+              <a:buNone/>
+            </a:pPr>
+            <a:r>
+              <a:rPr lang="en-US" sz="1100" i="1" dirty="0">
+                <a:solidFill>
+                  <a:srgbClr val="8A96A3"/>
+                </a:solidFill>
+                <a:latin typeface="Calibri" pitchFamily="34" charset="0"/>
+                <a:ea typeface="Calibri" pitchFamily="34" charset="-122"/>
+                <a:cs typeface="Calibri" pitchFamily="34" charset="-120"/>
+              </a:rPr>
+              <a:t>An OCU student crewed without authorisation — red rings on the pair, and the reason in plain English:</a:t>
+            </a:r>
+            <a:endParaRPr lang="en-US" sz="1100" dirty="0"/>
+          </a:p>
+        </p:txBody>
+      </p:sp>
+      <p:sp>
+        <p:nvSpPr>
+          <p:cNvPr id="11" name="Shape 7"/>
+          <p:cNvSpPr/>
+          <p:nvPr/>
+        </p:nvSpPr>
+        <p:spPr>
+          <a:xfrm>
+            <a:off x="612648" y="5202936"/>
+            <a:ext cx="6044184" cy="1042416"/>
+          </a:xfrm>
+          <a:prstGeom prst="roundRect">
+            <a:avLst>
+              <a:gd name="adj" fmla="val 8772"/>
+            </a:avLst>
+          </a:prstGeom>
+          <a:solidFill>
+            <a:srgbClr val="000000"/>
+          </a:solidFill>
+          <a:ln/>
+          <a:effectLst>
+            <a:outerShdw sx="100000" sy="100000" kx="0" ky="0" algn="bl" rotWithShape="0" blurRad="177800" dist="63500" dir="5400000">
+              <a:srgbClr val="000000">
+                <a:alpha val="55000"/>
+              </a:srgbClr>
+            </a:outerShdw>
+          </a:effectLst>
+        </p:spPr>
+      </p:sp>
+      <p:sp>
+        <p:nvSpPr>
+          <p:cNvPr id="12" name="Shape 8"/>
+          <p:cNvSpPr/>
+          <p:nvPr/>
+        </p:nvSpPr>
+        <p:spPr>
+          <a:xfrm>
+            <a:off x="640080" y="5230368"/>
+            <a:ext cx="5989320" cy="987552"/>
+          </a:xfrm>
+          <a:prstGeom prst="roundRect">
+            <a:avLst>
+              <a:gd name="adj" fmla="val 8333"/>
+            </a:avLst>
+          </a:prstGeom>
+          <a:solidFill>
+            <a:srgbClr val="0E1116"/>
+          </a:solidFill>
+          <a:ln w="12700">
+            <a:solidFill>
+              <a:srgbClr val="F0555F"/>
+            </a:solidFill>
+            <a:prstDash val="solid"/>
+          </a:ln>
+        </p:spPr>
+      </p:sp>
+      <p:pic>
+        <p:nvPicPr>
+          <p:cNvPr id="13" name="Image 2" descr="preencoded.png">    </p:cNvPr>
+          <p:cNvPicPr>
+            <a:picLocks noChangeAspect="1"/>
+          </p:cNvPicPr>
+          <p:nvPr/>
+        </p:nvPicPr>
+        <p:blipFill>
+          <a:blip r:embed="rId3"/>
+          <a:stretch>
+            <a:fillRect/>
+          </a:stretch>
+        </p:blipFill>
+        <p:spPr>
+          <a:xfrm>
+            <a:off x="791566" y="5321808"/>
+            <a:ext cx="5686349" cy="804672"/>
+          </a:xfrm>
+          <a:prstGeom prst="rect">
+            <a:avLst/>
+          </a:prstGeom>
+        </p:spPr>
+      </p:pic>
+      <p:sp>
+        <p:nvSpPr>
+          <p:cNvPr id="14" name="Shape 9"/>
+          <p:cNvSpPr/>
+          <p:nvPr/>
+        </p:nvSpPr>
+        <p:spPr>
+          <a:xfrm>
+            <a:off x="6876288" y="1755648"/>
+            <a:ext cx="4718304" cy="2980944"/>
+          </a:xfrm>
+          <a:prstGeom prst="roundRect">
+            <a:avLst>
+              <a:gd name="adj" fmla="val 3067"/>
+            </a:avLst>
+          </a:prstGeom>
+          <a:solidFill>
+            <a:srgbClr val="000000"/>
+          </a:solidFill>
+          <a:ln/>
+          <a:effectLst>
+            <a:outerShdw sx="100000" sy="100000" kx="0" ky="0" algn="bl" rotWithShape="0" blurRad="177800" dist="63500" dir="5400000">
+              <a:srgbClr val="000000">
+                <a:alpha val="55000"/>
+              </a:srgbClr>
+            </a:outerShdw>
+          </a:effectLst>
+        </p:spPr>
+      </p:sp>
+      <p:sp>
+        <p:nvSpPr>
+          <p:cNvPr id="15" name="Shape 10"/>
+          <p:cNvSpPr/>
+          <p:nvPr/>
+        </p:nvSpPr>
+        <p:spPr>
+          <a:xfrm>
+            <a:off x="6903720" y="1783080"/>
+            <a:ext cx="4663440" cy="2926080"/>
+          </a:xfrm>
+          <a:prstGeom prst="roundRect">
+            <a:avLst>
+              <a:gd name="adj" fmla="val 2813"/>
             </a:avLst>
           </a:prstGeom>
           <a:solidFill>
@@ -5914,22 +7425,22 @@
       </p:sp>
       <p:pic>
         <p:nvPicPr>
-          <p:cNvPr id="10" name="Image 1" descr="preencoded.png">    </p:cNvPr>
+          <p:cNvPr id="16" name="Image 3" descr="preencoded.png">    </p:cNvPr>
           <p:cNvPicPr>
             <a:picLocks noChangeAspect="1"/>
           </p:cNvPicPr>
           <p:nvPr/>
         </p:nvPicPr>
         <p:blipFill>
-          <a:blip r:embed="rId2"/>
+          <a:blip r:embed="rId4"/>
           <a:stretch>
             <a:fillRect/>
           </a:stretch>
         </p:blipFill>
         <p:spPr>
           <a:xfrm>
-            <a:off x="997745" y="2386584"/>
-            <a:ext cx="6325550" cy="4005072"/>
+            <a:off x="7011388" y="1837944"/>
+            <a:ext cx="4448104" cy="2816352"/>
           </a:xfrm>
           <a:prstGeom prst="rect">
             <a:avLst/>
@@ -5938,13 +7449,13 @@
       </p:pic>
       <p:sp>
         <p:nvSpPr>
-          <p:cNvPr id="11" name="Shape 7"/>
-          <p:cNvSpPr/>
-          <p:nvPr/>
-        </p:nvSpPr>
-        <p:spPr>
-          <a:xfrm>
-            <a:off x="7909560" y="2267712"/>
+          <p:cNvPr id="17" name="Shape 11"/>
+          <p:cNvSpPr/>
+          <p:nvPr/>
+        </p:nvSpPr>
+        <p:spPr>
+          <a:xfrm>
+            <a:off x="6903720" y="4946904"/>
             <a:ext cx="146304" cy="146304"/>
           </a:xfrm>
           <a:prstGeom prst="ellipse">
@@ -5958,14 +7469,14 @@
       </p:sp>
       <p:sp>
         <p:nvSpPr>
-          <p:cNvPr id="12" name="Text 8"/>
-          <p:cNvSpPr/>
-          <p:nvPr/>
-        </p:nvSpPr>
-        <p:spPr>
-          <a:xfrm>
-            <a:off x="8183880" y="2167128"/>
-            <a:ext cx="3337560" cy="457200"/>
+          <p:cNvPr id="18" name="Text 12"/>
+          <p:cNvSpPr/>
+          <p:nvPr/>
+        </p:nvSpPr>
+        <p:spPr>
+          <a:xfrm>
+            <a:off x="7178040" y="4846320"/>
+            <a:ext cx="4389120" cy="457200"/>
           </a:xfrm>
           <a:prstGeom prst="rect">
             <a:avLst/>
@@ -5992,7 +7503,7 @@
                 <a:ea typeface="Calibri" pitchFamily="34" charset="-122"/>
                 <a:cs typeface="Calibri" pitchFamily="34" charset="-120"/>
               </a:rPr>
-              <a:t>Snap a photo, upload, done  </a:t>
+              <a:t>58 rules, in plain English  </a:t>
             </a:r>
             <a:pPr indent="0" marL="0">
               <a:lnSpc>
@@ -6009,7 +7520,7 @@
                 <a:ea typeface="Calibri" pitchFamily="34" charset="-122"/>
                 <a:cs typeface="Calibri" pitchFamily="34" charset="-120"/>
               </a:rPr>
-              <a:t>Screenshot a leave application or a medical cert and upload it straight into the app — no forms to re-fill.</a:t>
+              <a:t>The Logic tab spells out every rule the engine applies — and shows which fired on this week's schedule.</a:t>
             </a:r>
             <a:endParaRPr lang="en-US" sz="1250" dirty="0"/>
           </a:p>
@@ -6017,13 +7528,13 @@
       </p:sp>
       <p:sp>
         <p:nvSpPr>
-          <p:cNvPr id="13" name="Shape 9"/>
-          <p:cNvSpPr/>
-          <p:nvPr/>
-        </p:nvSpPr>
-        <p:spPr>
-          <a:xfrm>
-            <a:off x="7909560" y="3364992"/>
+          <p:cNvPr id="19" name="Shape 13"/>
+          <p:cNvSpPr/>
+          <p:nvPr/>
+        </p:nvSpPr>
+        <p:spPr>
+          <a:xfrm>
+            <a:off x="6903720" y="5678424"/>
             <a:ext cx="146304" cy="146304"/>
           </a:xfrm>
           <a:prstGeom prst="ellipse">
@@ -6037,14 +7548,14 @@
       </p:sp>
       <p:sp>
         <p:nvSpPr>
-          <p:cNvPr id="14" name="Text 10"/>
-          <p:cNvSpPr/>
-          <p:nvPr/>
-        </p:nvSpPr>
-        <p:spPr>
-          <a:xfrm>
-            <a:off x="8183880" y="3264408"/>
-            <a:ext cx="3337560" cy="457200"/>
+          <p:cNvPr id="20" name="Text 14"/>
+          <p:cNvSpPr/>
+          <p:nvPr/>
+        </p:nvSpPr>
+        <p:spPr>
+          <a:xfrm>
+            <a:off x="7178040" y="5577840"/>
+            <a:ext cx="4389120" cy="457200"/>
           </a:xfrm>
           <a:prstGeom prst="rect">
             <a:avLst/>
@@ -6071,7 +7582,7 @@
                 <a:ea typeface="Calibri" pitchFamily="34" charset="-122"/>
                 <a:cs typeface="Calibri" pitchFamily="34" charset="-120"/>
               </a:rPr>
-              <a:t>Up-chit reminders  </a:t>
+              <a:t>Squadron-editable numbers  </a:t>
             </a:r>
             <a:pPr indent="0" marL="0">
               <a:lnSpc>
@@ -6088,168 +7599,9 @@
                 <a:ea typeface="Calibri" pitchFamily="34" charset="-122"/>
                 <a:cs typeface="Calibri" pitchFamily="34" charset="-120"/>
               </a:rPr>
-              <a:t>If someone is due to be up-chitted and hasn't been, RAPTOR reminds them — nothing tracked on a personal note.</a:t>
+              <a:t>Crew-rest hours, brief lead, report time, debrief — management tunes the thresholds on the page, no coding.</a:t>
             </a:r>
             <a:endParaRPr lang="en-US" sz="1250" dirty="0"/>
-          </a:p>
-        </p:txBody>
-      </p:sp>
-      <p:sp>
-        <p:nvSpPr>
-          <p:cNvPr id="15" name="Shape 11"/>
-          <p:cNvSpPr/>
-          <p:nvPr/>
-        </p:nvSpPr>
-        <p:spPr>
-          <a:xfrm>
-            <a:off x="7909560" y="4462272"/>
-            <a:ext cx="146304" cy="146304"/>
-          </a:xfrm>
-          <a:prstGeom prst="ellipse">
-            <a:avLst/>
-          </a:prstGeom>
-          <a:solidFill>
-            <a:srgbClr val="F0555F"/>
-          </a:solidFill>
-          <a:ln/>
-        </p:spPr>
-      </p:sp>
-      <p:sp>
-        <p:nvSpPr>
-          <p:cNvPr id="16" name="Text 12"/>
-          <p:cNvSpPr/>
-          <p:nvPr/>
-        </p:nvSpPr>
-        <p:spPr>
-          <a:xfrm>
-            <a:off x="8183880" y="4361688"/>
-            <a:ext cx="3337560" cy="457200"/>
-          </a:xfrm>
-          <a:prstGeom prst="rect">
-            <a:avLst/>
-          </a:prstGeom>
-          <a:noFill/>
-          <a:ln/>
-        </p:spPr>
-        <p:txBody>
-          <a:bodyPr wrap="square" lIns="0" tIns="0" rIns="0" bIns="0" rtlCol="0" anchor="t"/>
-          <a:lstStyle/>
-          <a:p>
-            <a:pPr indent="0" marL="0">
-              <a:lnSpc>
-                <a:spcPct val="102000"/>
-              </a:lnSpc>
-              <a:buNone/>
-            </a:pPr>
-            <a:r>
-              <a:rPr lang="en-US" sz="1250" b="1" dirty="0">
-                <a:solidFill>
-                  <a:srgbClr val="F1F4F7"/>
-                </a:solidFill>
-                <a:latin typeface="Calibri" pitchFamily="34" charset="0"/>
-                <a:ea typeface="Calibri" pitchFamily="34" charset="-122"/>
-                <a:cs typeface="Calibri" pitchFamily="34" charset="-120"/>
-              </a:rPr>
-              <a:t>The manpower red line  </a:t>
-            </a:r>
-            <a:pPr indent="0" marL="0">
-              <a:lnSpc>
-                <a:spcPct val="102000"/>
-              </a:lnSpc>
-              <a:buNone/>
-            </a:pPr>
-            <a:r>
-              <a:rPr lang="en-US" sz="1250" dirty="0">
-                <a:solidFill>
-                  <a:srgbClr val="B6C0CB"/>
-                </a:solidFill>
-                <a:latin typeface="Calibri" pitchFamily="34" charset="0"/>
-                <a:ea typeface="Calibri" pitchFamily="34" charset="-122"/>
-                <a:cs typeface="Calibri" pitchFamily="34" charset="-120"/>
-              </a:rPr>
-              <a:t>Management sets the day-to-day floor; the grid turns amber then red the moment manning drops below it.</a:t>
-            </a:r>
-            <a:endParaRPr lang="en-US" sz="1250" dirty="0"/>
-          </a:p>
-        </p:txBody>
-      </p:sp>
-      <p:sp>
-        <p:nvSpPr>
-          <p:cNvPr id="17" name="Shape 13"/>
-          <p:cNvSpPr/>
-          <p:nvPr/>
-        </p:nvSpPr>
-        <p:spPr>
-          <a:xfrm>
-            <a:off x="7909560" y="5486400"/>
-            <a:ext cx="3611880" cy="914400"/>
-          </a:xfrm>
-          <a:prstGeom prst="roundRect">
-            <a:avLst>
-              <a:gd name="adj" fmla="val 10000"/>
-            </a:avLst>
-          </a:prstGeom>
-          <a:solidFill>
-            <a:srgbClr val="1A1F26"/>
-          </a:solidFill>
-          <a:ln w="12700">
-            <a:solidFill>
-              <a:srgbClr val="39424D"/>
-            </a:solidFill>
-            <a:prstDash val="solid"/>
-          </a:ln>
-        </p:spPr>
-      </p:sp>
-      <p:sp>
-        <p:nvSpPr>
-          <p:cNvPr id="18" name="Text 14"/>
-          <p:cNvSpPr/>
-          <p:nvPr/>
-        </p:nvSpPr>
-        <p:spPr>
-          <a:xfrm>
-            <a:off x="8110728" y="5559552"/>
-            <a:ext cx="3209544" cy="768096"/>
-          </a:xfrm>
-          <a:prstGeom prst="rect">
-            <a:avLst/>
-          </a:prstGeom>
-          <a:noFill/>
-          <a:ln/>
-        </p:spPr>
-        <p:txBody>
-          <a:bodyPr wrap="square" lIns="0" tIns="0" rIns="0" bIns="0" rtlCol="0" anchor="ctr"/>
-          <a:lstStyle/>
-          <a:p>
-            <a:pPr indent="0" marL="0">
-              <a:buNone/>
-            </a:pPr>
-            <a:r>
-              <a:rPr lang="en-US" sz="1150" b="1" dirty="0">
-                <a:solidFill>
-                  <a:srgbClr val="F1F4F7"/>
-                </a:solidFill>
-                <a:latin typeface="Calibri" pitchFamily="34" charset="0"/>
-                <a:ea typeface="Calibri" pitchFamily="34" charset="-122"/>
-                <a:cs typeface="Calibri" pitchFamily="34" charset="-120"/>
-              </a:rPr>
-              <a:t>A whole year of leave and duties in one grid — </a:t>
-            </a:r>
-            <a:pPr indent="0" marL="0">
-              <a:buNone/>
-            </a:pPr>
-            <a:r>
-              <a:rPr lang="en-US" sz="1150" dirty="0">
-                <a:solidFill>
-                  <a:srgbClr val="B6C0CB"/>
-                </a:solidFill>
-                <a:latin typeface="Calibri" pitchFamily="34" charset="0"/>
-                <a:ea typeface="Calibri" pitchFamily="34" charset="-122"/>
-                <a:cs typeface="Calibri" pitchFamily="34" charset="-120"/>
-              </a:rPr>
-              <a:t>and it stays in step with the flying programme.</a:t>
-            </a:r>
-            <a:endParaRPr lang="en-US" sz="1150" dirty="0"/>
           </a:p>
         </p:txBody>
       </p:sp>
@@ -6448,7 +7800,7 @@
                 <a:ea typeface="Arial" pitchFamily="34" charset="-122"/>
                 <a:cs typeface="Arial" pitchFamily="34" charset="-120"/>
               </a:rPr>
-              <a:t>BUILT FOR THE WAY THE SQUADRON WORKS</a:t>
+              <a:t>ONE PLACE TO FILE EVERYTHING</a:t>
             </a:r>
             <a:endParaRPr lang="en-US" sz="1200" dirty="0"/>
           </a:p>
@@ -6462,8 +7814,8 @@
         </p:nvSpPr>
         <p:spPr>
           <a:xfrm>
-            <a:off x="640080" y="822960"/>
-            <a:ext cx="10607040" cy="822960"/>
+            <a:off x="640080" y="786384"/>
+            <a:ext cx="11338560" cy="822960"/>
           </a:xfrm>
           <a:prstGeom prst="rect">
             <a:avLst/>
@@ -6479,7 +7831,7 @@
               <a:buNone/>
             </a:pPr>
             <a:r>
-              <a:rPr lang="en-US" sz="3300" b="1" dirty="0">
+              <a:rPr lang="en-US" sz="2800" b="1" dirty="0">
                 <a:solidFill>
                   <a:srgbClr val="F1F4F7"/>
                 </a:solidFill>
@@ -6487,65 +7839,26 @@
                 <a:ea typeface="Arial" pitchFamily="34" charset="-122"/>
                 <a:cs typeface="Arial" pitchFamily="34" charset="-120"/>
               </a:rPr>
-              <a:t>Full-power at the desk, thumb-friendly on a phone</a:t>
-            </a:r>
-            <a:endParaRPr lang="en-US" sz="3300" dirty="0"/>
-          </a:p>
-        </p:txBody>
-      </p:sp>
-      <p:sp>
-        <p:nvSpPr>
-          <p:cNvPr id="8" name="Text 4"/>
-          <p:cNvSpPr/>
-          <p:nvPr/>
-        </p:nvSpPr>
-        <p:spPr>
-          <a:xfrm>
-            <a:off x="640080" y="1572768"/>
-            <a:ext cx="10881360" cy="365760"/>
-          </a:xfrm>
-          <a:prstGeom prst="rect">
-            <a:avLst/>
-          </a:prstGeom>
-          <a:noFill/>
-          <a:ln/>
-        </p:spPr>
-        <p:txBody>
-          <a:bodyPr wrap="square" lIns="0" tIns="0" rIns="0" bIns="0" rtlCol="0" anchor="ctr"/>
-          <a:lstStyle/>
-          <a:p>
-            <a:pPr indent="0" marL="0">
-              <a:buNone/>
-            </a:pPr>
-            <a:r>
-              <a:rPr lang="en-US" sz="1400" dirty="0">
-                <a:solidFill>
-                  <a:srgbClr val="B6C0CB"/>
-                </a:solidFill>
-                <a:latin typeface="Calibri" pitchFamily="34" charset="0"/>
-                <a:ea typeface="Calibri" pitchFamily="34" charset="-122"/>
-                <a:cs typeface="Calibri" pitchFamily="34" charset="-120"/>
-              </a:rPr>
-              <a:t>The same tool, designed for both screens — spacious and readable on a phone, and using the whole width on a desktop.</a:t>
-            </a:r>
-            <a:endParaRPr lang="en-US" sz="1400" dirty="0"/>
-          </a:p>
-        </p:txBody>
-      </p:sp>
-      <p:sp>
-        <p:nvSpPr>
-          <p:cNvPr id="9" name="Shape 5"/>
-          <p:cNvSpPr/>
-          <p:nvPr/>
-        </p:nvSpPr>
-        <p:spPr>
-          <a:xfrm>
-            <a:off x="932688" y="2121408"/>
-            <a:ext cx="2340864" cy="4261104"/>
+              <a:t>Leave, medical &amp; up-chits — filed once on the Inputs page</a:t>
+            </a:r>
+            <a:endParaRPr lang="en-US" sz="2800" dirty="0"/>
+          </a:p>
+        </p:txBody>
+      </p:sp>
+      <p:sp>
+        <p:nvSpPr>
+          <p:cNvPr id="8" name="Shape 4"/>
+          <p:cNvSpPr/>
+          <p:nvPr/>
+        </p:nvSpPr>
+        <p:spPr>
+          <a:xfrm>
+            <a:off x="612648" y="1755648"/>
+            <a:ext cx="6912864" cy="4489704"/>
           </a:xfrm>
           <a:prstGeom prst="roundRect">
             <a:avLst>
-              <a:gd name="adj" fmla="val 3906"/>
+              <a:gd name="adj" fmla="val 2037"/>
             </a:avLst>
           </a:prstGeom>
           <a:solidFill>
@@ -6563,18 +7876,18 @@
       </p:sp>
       <p:sp>
         <p:nvSpPr>
-          <p:cNvPr id="10" name="Shape 6"/>
-          <p:cNvSpPr/>
-          <p:nvPr/>
-        </p:nvSpPr>
-        <p:spPr>
-          <a:xfrm>
-            <a:off x="960120" y="2148840"/>
-            <a:ext cx="2286000" cy="4206240"/>
+          <p:cNvPr id="9" name="Shape 5"/>
+          <p:cNvSpPr/>
+          <p:nvPr/>
+        </p:nvSpPr>
+        <p:spPr>
+          <a:xfrm>
+            <a:off x="640080" y="1783080"/>
+            <a:ext cx="6858000" cy="4434840"/>
           </a:xfrm>
           <a:prstGeom prst="roundRect">
             <a:avLst>
-              <a:gd name="adj" fmla="val 3600"/>
+              <a:gd name="adj" fmla="val 1856"/>
             </a:avLst>
           </a:prstGeom>
           <a:solidFill>
@@ -6590,7 +7903,7 @@
       </p:sp>
       <p:pic>
         <p:nvPicPr>
-          <p:cNvPr id="11" name="Image 2" descr="preencoded.png">    </p:cNvPr>
+          <p:cNvPr id="10" name="Image 2" descr="preencoded.png">    </p:cNvPr>
           <p:cNvPicPr>
             <a:picLocks noChangeAspect="1"/>
           </p:cNvPicPr>
@@ -6604,8 +7917,8 @@
         </p:blipFill>
         <p:spPr>
           <a:xfrm>
-            <a:off x="1148635" y="2185416"/>
-            <a:ext cx="1908970" cy="4133088"/>
+            <a:off x="694944" y="1864139"/>
+            <a:ext cx="6748272" cy="4272722"/>
           </a:xfrm>
           <a:prstGeom prst="rect">
             <a:avLst/>
@@ -6614,57 +7927,18 @@
       </p:pic>
       <p:sp>
         <p:nvSpPr>
-          <p:cNvPr id="12" name="Text 7"/>
-          <p:cNvSpPr/>
-          <p:nvPr/>
-        </p:nvSpPr>
-        <p:spPr>
-          <a:xfrm>
-            <a:off x="960120" y="6382512"/>
-            <a:ext cx="2286000" cy="237744"/>
-          </a:xfrm>
-          <a:prstGeom prst="rect">
-            <a:avLst/>
-          </a:prstGeom>
-          <a:noFill/>
-          <a:ln/>
-        </p:spPr>
-        <p:txBody>
-          <a:bodyPr wrap="square" lIns="0" tIns="0" rIns="0" bIns="0" rtlCol="0" anchor="ctr"/>
-          <a:lstStyle/>
-          <a:p>
-            <a:pPr algn="ctr" indent="0" marL="0">
-              <a:buNone/>
-            </a:pPr>
-            <a:r>
-              <a:rPr lang="en-US" sz="1000" b="1" spc="300" kern="0" dirty="0">
-                <a:solidFill>
-                  <a:srgbClr val="8A96A3"/>
-                </a:solidFill>
-                <a:latin typeface="Arial" pitchFamily="34" charset="0"/>
-                <a:ea typeface="Arial" pitchFamily="34" charset="-122"/>
-                <a:cs typeface="Arial" pitchFamily="34" charset="-120"/>
-              </a:rPr>
-              <a:t>PHONE</a:t>
-            </a:r>
-            <a:endParaRPr lang="en-US" sz="1000" dirty="0"/>
-          </a:p>
-        </p:txBody>
-      </p:sp>
-      <p:sp>
-        <p:nvSpPr>
-          <p:cNvPr id="13" name="Shape 8"/>
-          <p:cNvSpPr/>
-          <p:nvPr/>
-        </p:nvSpPr>
-        <p:spPr>
-          <a:xfrm>
-            <a:off x="3813048" y="2304288"/>
-            <a:ext cx="7735824" cy="3968496"/>
+          <p:cNvPr id="11" name="Shape 6"/>
+          <p:cNvSpPr/>
+          <p:nvPr/>
+        </p:nvSpPr>
+        <p:spPr>
+          <a:xfrm>
+            <a:off x="7744968" y="1755648"/>
+            <a:ext cx="3849624" cy="2203704"/>
           </a:xfrm>
           <a:prstGeom prst="roundRect">
             <a:avLst>
-              <a:gd name="adj" fmla="val 2304"/>
+              <a:gd name="adj" fmla="val 4149"/>
             </a:avLst>
           </a:prstGeom>
           <a:solidFill>
@@ -6682,18 +7956,18 @@
       </p:sp>
       <p:sp>
         <p:nvSpPr>
-          <p:cNvPr id="14" name="Shape 9"/>
-          <p:cNvSpPr/>
-          <p:nvPr/>
-        </p:nvSpPr>
-        <p:spPr>
-          <a:xfrm>
-            <a:off x="3840480" y="2331720"/>
-            <a:ext cx="7680960" cy="3913632"/>
+          <p:cNvPr id="12" name="Shape 7"/>
+          <p:cNvSpPr/>
+          <p:nvPr/>
+        </p:nvSpPr>
+        <p:spPr>
+          <a:xfrm>
+            <a:off x="7772400" y="1783080"/>
+            <a:ext cx="3794760" cy="2148840"/>
           </a:xfrm>
           <a:prstGeom prst="roundRect">
             <a:avLst>
-              <a:gd name="adj" fmla="val 2103"/>
+              <a:gd name="adj" fmla="val 3830"/>
             </a:avLst>
           </a:prstGeom>
           <a:solidFill>
@@ -6701,7 +7975,7 @@
           </a:solidFill>
           <a:ln w="12700">
             <a:solidFill>
-              <a:srgbClr val="3BC6E8"/>
+              <a:srgbClr val="3BD07A"/>
             </a:solidFill>
             <a:prstDash val="solid"/>
           </a:ln>
@@ -6709,7 +7983,7 @@
       </p:sp>
       <p:pic>
         <p:nvPicPr>
-          <p:cNvPr id="15" name="Image 3" descr="preencoded.png">    </p:cNvPr>
+          <p:cNvPr id="13" name="Image 3" descr="preencoded.png">    </p:cNvPr>
           <p:cNvPicPr>
             <a:picLocks noChangeAspect="1"/>
           </p:cNvPicPr>
@@ -6723,8 +7997,8 @@
         </p:blipFill>
         <p:spPr>
           <a:xfrm>
-            <a:off x="4677046" y="2386584"/>
-            <a:ext cx="6007828" cy="3803904"/>
+            <a:off x="8059509" y="1837944"/>
+            <a:ext cx="3220543" cy="2039112"/>
           </a:xfrm>
           <a:prstGeom prst="rect">
             <a:avLst/>
@@ -6733,40 +8007,277 @@
       </p:pic>
       <p:sp>
         <p:nvSpPr>
+          <p:cNvPr id="14" name="Text 8"/>
+          <p:cNvSpPr/>
+          <p:nvPr/>
+        </p:nvSpPr>
+        <p:spPr>
+          <a:xfrm>
+            <a:off x="7772400" y="3968496"/>
+            <a:ext cx="3794760" cy="274320"/>
+          </a:xfrm>
+          <a:prstGeom prst="rect">
+            <a:avLst/>
+          </a:prstGeom>
+          <a:noFill/>
+          <a:ln/>
+        </p:spPr>
+        <p:txBody>
+          <a:bodyPr wrap="square" lIns="0" tIns="0" rIns="0" bIns="0" rtlCol="0" anchor="ctr"/>
+          <a:lstStyle/>
+          <a:p>
+            <a:pPr indent="0" marL="0">
+              <a:buNone/>
+            </a:pPr>
+            <a:r>
+              <a:rPr lang="en-US" sz="1050" i="1" dirty="0">
+                <a:solidFill>
+                  <a:srgbClr val="8A96A3"/>
+                </a:solidFill>
+                <a:latin typeface="Calibri" pitchFamily="34" charset="0"/>
+                <a:ea typeface="Calibri" pitchFamily="34" charset="-122"/>
+                <a:cs typeface="Calibri" pitchFamily="34" charset="-120"/>
+              </a:rPr>
+              <a:t>…and the month calendar shows every input at a glance.</a:t>
+            </a:r>
+            <a:endParaRPr lang="en-US" sz="1050" dirty="0"/>
+          </a:p>
+        </p:txBody>
+      </p:sp>
+      <p:sp>
+        <p:nvSpPr>
+          <p:cNvPr id="15" name="Shape 9"/>
+          <p:cNvSpPr/>
+          <p:nvPr/>
+        </p:nvSpPr>
+        <p:spPr>
+          <a:xfrm>
+            <a:off x="7772400" y="4443984"/>
+            <a:ext cx="146304" cy="146304"/>
+          </a:xfrm>
+          <a:prstGeom prst="ellipse">
+            <a:avLst/>
+          </a:prstGeom>
+          <a:solidFill>
+            <a:srgbClr val="3BC6E8"/>
+          </a:solidFill>
+          <a:ln/>
+        </p:spPr>
+      </p:sp>
+      <p:sp>
+        <p:nvSpPr>
           <p:cNvPr id="16" name="Text 10"/>
           <p:cNvSpPr/>
           <p:nvPr/>
         </p:nvSpPr>
         <p:spPr>
           <a:xfrm>
-            <a:off x="3840480" y="6309360"/>
-            <a:ext cx="7680960" cy="237744"/>
-          </a:xfrm>
-          <a:prstGeom prst="rect">
-            <a:avLst/>
-          </a:prstGeom>
-          <a:noFill/>
-          <a:ln/>
-        </p:spPr>
-        <p:txBody>
-          <a:bodyPr wrap="square" lIns="0" tIns="0" rIns="0" bIns="0" rtlCol="0" anchor="ctr"/>
-          <a:lstStyle/>
-          <a:p>
-            <a:pPr algn="ctr" indent="0" marL="0">
-              <a:buNone/>
-            </a:pPr>
-            <a:r>
-              <a:rPr lang="en-US" sz="1000" b="1" spc="300" kern="0" dirty="0">
-                <a:solidFill>
-                  <a:srgbClr val="8A96A3"/>
-                </a:solidFill>
-                <a:latin typeface="Arial" pitchFamily="34" charset="0"/>
-                <a:ea typeface="Arial" pitchFamily="34" charset="-122"/>
-                <a:cs typeface="Arial" pitchFamily="34" charset="-120"/>
-              </a:rPr>
-              <a:t>DESKTOP</a:t>
-            </a:r>
-            <a:endParaRPr lang="en-US" sz="1000" dirty="0"/>
+            <a:off x="8046720" y="4343400"/>
+            <a:ext cx="3520440" cy="457200"/>
+          </a:xfrm>
+          <a:prstGeom prst="rect">
+            <a:avLst/>
+          </a:prstGeom>
+          <a:noFill/>
+          <a:ln/>
+        </p:spPr>
+        <p:txBody>
+          <a:bodyPr wrap="square" lIns="0" tIns="0" rIns="0" bIns="0" rtlCol="0" anchor="t"/>
+          <a:lstStyle/>
+          <a:p>
+            <a:pPr indent="0" marL="0">
+              <a:lnSpc>
+                <a:spcPct val="102000"/>
+              </a:lnSpc>
+              <a:buNone/>
+            </a:pPr>
+            <a:r>
+              <a:rPr lang="en-US" sz="1250" b="1" dirty="0">
+                <a:solidFill>
+                  <a:srgbClr val="F1F4F7"/>
+                </a:solidFill>
+                <a:latin typeface="Calibri" pitchFamily="34" charset="0"/>
+                <a:ea typeface="Calibri" pitchFamily="34" charset="-122"/>
+                <a:cs typeface="Calibri" pitchFamily="34" charset="-120"/>
+              </a:rPr>
+              <a:t>Snap, upload, done  </a:t>
+            </a:r>
+            <a:pPr indent="0" marL="0">
+              <a:lnSpc>
+                <a:spcPct val="102000"/>
+              </a:lnSpc>
+              <a:buNone/>
+            </a:pPr>
+            <a:r>
+              <a:rPr lang="en-US" sz="1250" dirty="0">
+                <a:solidFill>
+                  <a:srgbClr val="B6C0CB"/>
+                </a:solidFill>
+                <a:latin typeface="Calibri" pitchFamily="34" charset="0"/>
+                <a:ea typeface="Calibri" pitchFamily="34" charset="-122"/>
+                <a:cs typeface="Calibri" pitchFamily="34" charset="-120"/>
+              </a:rPr>
+              <a:t>Screenshot your approved leave application or medical cert and upload it here — no forms re-filled.</a:t>
+            </a:r>
+            <a:endParaRPr lang="en-US" sz="1250" dirty="0"/>
+          </a:p>
+        </p:txBody>
+      </p:sp>
+      <p:sp>
+        <p:nvSpPr>
+          <p:cNvPr id="17" name="Shape 11"/>
+          <p:cNvSpPr/>
+          <p:nvPr/>
+        </p:nvSpPr>
+        <p:spPr>
+          <a:xfrm>
+            <a:off x="7772400" y="5193792"/>
+            <a:ext cx="146304" cy="146304"/>
+          </a:xfrm>
+          <a:prstGeom prst="ellipse">
+            <a:avLst/>
+          </a:prstGeom>
+          <a:solidFill>
+            <a:srgbClr val="E5A83B"/>
+          </a:solidFill>
+          <a:ln/>
+        </p:spPr>
+      </p:sp>
+      <p:sp>
+        <p:nvSpPr>
+          <p:cNvPr id="18" name="Text 12"/>
+          <p:cNvSpPr/>
+          <p:nvPr/>
+        </p:nvSpPr>
+        <p:spPr>
+          <a:xfrm>
+            <a:off x="8046720" y="5093208"/>
+            <a:ext cx="3520440" cy="457200"/>
+          </a:xfrm>
+          <a:prstGeom prst="rect">
+            <a:avLst/>
+          </a:prstGeom>
+          <a:noFill/>
+          <a:ln/>
+        </p:spPr>
+        <p:txBody>
+          <a:bodyPr wrap="square" lIns="0" tIns="0" rIns="0" bIns="0" rtlCol="0" anchor="t"/>
+          <a:lstStyle/>
+          <a:p>
+            <a:pPr indent="0" marL="0">
+              <a:lnSpc>
+                <a:spcPct val="102000"/>
+              </a:lnSpc>
+              <a:buNone/>
+            </a:pPr>
+            <a:r>
+              <a:rPr lang="en-US" sz="1250" b="1" dirty="0">
+                <a:solidFill>
+                  <a:srgbClr val="F1F4F7"/>
+                </a:solidFill>
+                <a:latin typeface="Calibri" pitchFamily="34" charset="0"/>
+                <a:ea typeface="Calibri" pitchFamily="34" charset="-122"/>
+                <a:cs typeface="Calibri" pitchFamily="34" charset="-120"/>
+              </a:rPr>
+              <a:t>Up-chit reminders  </a:t>
+            </a:r>
+            <a:pPr indent="0" marL="0">
+              <a:lnSpc>
+                <a:spcPct val="102000"/>
+              </a:lnSpc>
+              <a:buNone/>
+            </a:pPr>
+            <a:r>
+              <a:rPr lang="en-US" sz="1250" dirty="0">
+                <a:solidFill>
+                  <a:srgbClr val="B6C0CB"/>
+                </a:solidFill>
+                <a:latin typeface="Calibri" pitchFamily="34" charset="0"/>
+                <a:ea typeface="Calibri" pitchFamily="34" charset="-122"/>
+                <a:cs typeface="Calibri" pitchFamily="34" charset="-120"/>
+              </a:rPr>
+              <a:t>Due to be up-chitted and haven't been? RAPTOR reminds you — nothing lives on a personal note.</a:t>
+            </a:r>
+            <a:endParaRPr lang="en-US" sz="1250" dirty="0"/>
+          </a:p>
+        </p:txBody>
+      </p:sp>
+      <p:sp>
+        <p:nvSpPr>
+          <p:cNvPr id="19" name="Shape 13"/>
+          <p:cNvSpPr/>
+          <p:nvPr/>
+        </p:nvSpPr>
+        <p:spPr>
+          <a:xfrm>
+            <a:off x="7772400" y="5943600"/>
+            <a:ext cx="146304" cy="146304"/>
+          </a:xfrm>
+          <a:prstGeom prst="ellipse">
+            <a:avLst/>
+          </a:prstGeom>
+          <a:solidFill>
+            <a:srgbClr val="3BD07A"/>
+          </a:solidFill>
+          <a:ln/>
+        </p:spPr>
+      </p:sp>
+      <p:sp>
+        <p:nvSpPr>
+          <p:cNvPr id="20" name="Text 14"/>
+          <p:cNvSpPr/>
+          <p:nvPr/>
+        </p:nvSpPr>
+        <p:spPr>
+          <a:xfrm>
+            <a:off x="8046720" y="5843016"/>
+            <a:ext cx="3520440" cy="457200"/>
+          </a:xfrm>
+          <a:prstGeom prst="rect">
+            <a:avLst/>
+          </a:prstGeom>
+          <a:noFill/>
+          <a:ln/>
+        </p:spPr>
+        <p:txBody>
+          <a:bodyPr wrap="square" lIns="0" tIns="0" rIns="0" bIns="0" rtlCol="0" anchor="t"/>
+          <a:lstStyle/>
+          <a:p>
+            <a:pPr indent="0" marL="0">
+              <a:lnSpc>
+                <a:spcPct val="102000"/>
+              </a:lnSpc>
+              <a:buNone/>
+            </a:pPr>
+            <a:r>
+              <a:rPr lang="en-US" sz="1250" b="1" dirty="0">
+                <a:solidFill>
+                  <a:srgbClr val="F1F4F7"/>
+                </a:solidFill>
+                <a:latin typeface="Calibri" pitchFamily="34" charset="0"/>
+                <a:ea typeface="Calibri" pitchFamily="34" charset="-122"/>
+                <a:cs typeface="Calibri" pitchFamily="34" charset="-120"/>
+              </a:rPr>
+              <a:t>Synced everywhere  </a:t>
+            </a:r>
+            <a:pPr indent="0" marL="0">
+              <a:lnSpc>
+                <a:spcPct val="102000"/>
+              </a:lnSpc>
+              <a:buNone/>
+            </a:pPr>
+            <a:r>
+              <a:rPr lang="en-US" sz="1250" dirty="0">
+                <a:solidFill>
+                  <a:srgbClr val="B6C0CB"/>
+                </a:solidFill>
+                <a:latin typeface="Calibri" pitchFamily="34" charset="0"/>
+                <a:ea typeface="Calibri" pitchFamily="34" charset="-122"/>
+                <a:cs typeface="Calibri" pitchFamily="34" charset="-120"/>
+              </a:rPr>
+              <a:t>Filed once, it flows to the schedule, the crew palette, the warnings and Leave War.</a:t>
+            </a:r>
+            <a:endParaRPr lang="en-US" sz="1250" dirty="0"/>
           </a:p>
         </p:txBody>
       </p:sp>
@@ -6812,32 +8323,6 @@
         </p:nvPicPr>
         <p:blipFill>
           <a:blip r:embed="rId1">
-            <a:alphaModFix amt="65000"/>
-          </a:blip>
-          <a:stretch>
-            <a:fillRect/>
-          </a:stretch>
-        </p:blipFill>
-        <p:spPr>
-          <a:xfrm>
-            <a:off x="11137392" y="384048"/>
-            <a:ext cx="548640" cy="548640"/>
-          </a:xfrm>
-          <a:prstGeom prst="rect">
-            <a:avLst/>
-          </a:prstGeom>
-        </p:spPr>
-      </p:pic>
-      <p:pic>
-        <p:nvPicPr>
-          <p:cNvPr id="3" name="Image 1" descr="preencoded.png">    </p:cNvPr>
-          <p:cNvPicPr>
-            <a:picLocks noChangeAspect="1"/>
-          </p:cNvPicPr>
-          <p:nvPr/>
-        </p:nvPicPr>
-        <p:blipFill>
-          <a:blip r:embed="rId2">
             <a:alphaModFix amt="80000"/>
           </a:blip>
           <a:stretch>
@@ -6856,7 +8341,7 @@
       </p:pic>
       <p:sp>
         <p:nvSpPr>
-          <p:cNvPr id="4" name="Text 0"/>
+          <p:cNvPr id="3" name="Text 0"/>
           <p:cNvSpPr/>
           <p:nvPr/>
         </p:nvSpPr>
@@ -6895,7 +8380,7 @@
       </p:sp>
       <p:sp>
         <p:nvSpPr>
-          <p:cNvPr id="5" name="Text 1"/>
+          <p:cNvPr id="4" name="Text 1"/>
           <p:cNvSpPr/>
           <p:nvPr/>
         </p:nvSpPr>
@@ -6934,7 +8419,7 @@
       </p:sp>
       <p:sp>
         <p:nvSpPr>
-          <p:cNvPr id="6" name="Text 2"/>
+          <p:cNvPr id="5" name="Text 2"/>
           <p:cNvSpPr/>
           <p:nvPr/>
         </p:nvSpPr>
@@ -6965,7 +8450,7 @@
                 <a:ea typeface="Arial" pitchFamily="34" charset="-122"/>
                 <a:cs typeface="Arial" pitchFamily="34" charset="-120"/>
               </a:rPr>
-              <a:t>WHERE IT'S GOING</a:t>
+              <a:t>THE MANPOWER RED LINE</a:t>
             </a:r>
             <a:endParaRPr lang="en-US" sz="1200" dirty="0"/>
           </a:p>
@@ -6973,14 +8458,14 @@
       </p:sp>
       <p:sp>
         <p:nvSpPr>
-          <p:cNvPr id="7" name="Text 3"/>
-          <p:cNvSpPr/>
-          <p:nvPr/>
-        </p:nvSpPr>
-        <p:spPr>
-          <a:xfrm>
-            <a:off x="640080" y="822960"/>
-            <a:ext cx="10607040" cy="822960"/>
+          <p:cNvPr id="6" name="Text 3"/>
+          <p:cNvSpPr/>
+          <p:nvPr/>
+        </p:nvSpPr>
+        <p:spPr>
+          <a:xfrm>
+            <a:off x="640080" y="786384"/>
+            <a:ext cx="11338560" cy="822960"/>
           </a:xfrm>
           <a:prstGeom prst="rect">
             <a:avLst/>
@@ -6996,7 +8481,7 @@
               <a:buNone/>
             </a:pPr>
             <a:r>
-              <a:rPr lang="en-US" sz="3300" b="1" dirty="0">
+              <a:rPr lang="en-US" sz="2800" b="1" dirty="0">
                 <a:solidFill>
                   <a:srgbClr val="F1F4F7"/>
                 </a:solidFill>
@@ -7004,71 +8489,61 @@
                 <a:ea typeface="Arial" pitchFamily="34" charset="-122"/>
                 <a:cs typeface="Arial" pitchFamily="34" charset="-120"/>
               </a:rPr>
-              <a:t>From prototype to the squadron's live system</a:t>
-            </a:r>
-            <a:endParaRPr lang="en-US" sz="3300" dirty="0"/>
-          </a:p>
-        </p:txBody>
-      </p:sp>
-      <p:sp>
-        <p:nvSpPr>
-          <p:cNvPr id="8" name="Text 4"/>
-          <p:cNvSpPr/>
-          <p:nvPr/>
-        </p:nvSpPr>
-        <p:spPr>
-          <a:xfrm>
-            <a:off x="640080" y="1572768"/>
-            <a:ext cx="10881360" cy="365760"/>
-          </a:xfrm>
-          <a:prstGeom prst="rect">
-            <a:avLst/>
-          </a:prstGeom>
-          <a:noFill/>
-          <a:ln/>
-        </p:spPr>
-        <p:txBody>
-          <a:bodyPr wrap="square" lIns="0" tIns="0" rIns="0" bIns="0" rtlCol="0" anchor="ctr"/>
-          <a:lstStyle/>
-          <a:p>
-            <a:pPr indent="0" marL="0">
-              <a:buNone/>
-            </a:pPr>
-            <a:r>
-              <a:rPr lang="en-US" sz="1400" dirty="0">
-                <a:solidFill>
-                  <a:srgbClr val="B6C0CB"/>
-                </a:solidFill>
-                <a:latin typeface="Calibri" pitchFamily="34" charset="0"/>
-                <a:ea typeface="Calibri" pitchFamily="34" charset="-122"/>
-                <a:cs typeface="Calibri" pitchFamily="34" charset="-120"/>
-              </a:rPr>
-              <a:t>The core is built and tested. The near-term work makes it robust and moves it onto the squadron's own Microsoft platform.</a:t>
-            </a:r>
-            <a:endParaRPr lang="en-US" sz="1400" dirty="0"/>
-          </a:p>
-        </p:txBody>
-      </p:sp>
-      <p:sp>
-        <p:nvSpPr>
-          <p:cNvPr id="9" name="Shape 5"/>
-          <p:cNvSpPr/>
-          <p:nvPr/>
-        </p:nvSpPr>
-        <p:spPr>
-          <a:xfrm>
-            <a:off x="640080" y="2331720"/>
-            <a:ext cx="3520440" cy="3063240"/>
+              <a:t>A year of leave and manning — with the red line built in</a:t>
+            </a:r>
+            <a:endParaRPr lang="en-US" sz="2800" dirty="0"/>
+          </a:p>
+        </p:txBody>
+      </p:sp>
+      <p:sp>
+        <p:nvSpPr>
+          <p:cNvPr id="7" name="Shape 4"/>
+          <p:cNvSpPr/>
+          <p:nvPr/>
+        </p:nvSpPr>
+        <p:spPr>
+          <a:xfrm>
+            <a:off x="612648" y="1755648"/>
+            <a:ext cx="7095744" cy="4672584"/>
           </a:xfrm>
           <a:prstGeom prst="roundRect">
             <a:avLst>
-              <a:gd name="adj" fmla="val 3284"/>
+              <a:gd name="adj" fmla="val 1957"/>
             </a:avLst>
           </a:prstGeom>
           <a:solidFill>
-            <a:srgbClr val="14181D"/>
+            <a:srgbClr val="000000"/>
           </a:solidFill>
-          <a:ln w="19050">
+          <a:ln/>
+          <a:effectLst>
+            <a:outerShdw sx="100000" sy="100000" kx="0" ky="0" algn="bl" rotWithShape="0" blurRad="177800" dist="63500" dir="5400000">
+              <a:srgbClr val="000000">
+                <a:alpha val="55000"/>
+              </a:srgbClr>
+            </a:outerShdw>
+          </a:effectLst>
+        </p:spPr>
+      </p:sp>
+      <p:sp>
+        <p:nvSpPr>
+          <p:cNvPr id="8" name="Shape 5"/>
+          <p:cNvSpPr/>
+          <p:nvPr/>
+        </p:nvSpPr>
+        <p:spPr>
+          <a:xfrm>
+            <a:off x="640080" y="1783080"/>
+            <a:ext cx="7040880" cy="4617720"/>
+          </a:xfrm>
+          <a:prstGeom prst="roundRect">
+            <a:avLst>
+              <a:gd name="adj" fmla="val 1782"/>
+            </a:avLst>
+          </a:prstGeom>
+          <a:solidFill>
+            <a:srgbClr val="0E1116"/>
+          </a:solidFill>
+          <a:ln w="12700">
             <a:solidFill>
               <a:srgbClr val="3BC6E8"/>
             </a:solidFill>
@@ -7076,6 +8551,30 @@
           </a:ln>
         </p:spPr>
       </p:sp>
+      <p:pic>
+        <p:nvPicPr>
+          <p:cNvPr id="9" name="Image 1" descr="preencoded.png">    </p:cNvPr>
+          <p:cNvPicPr>
+            <a:picLocks noChangeAspect="1"/>
+          </p:cNvPicPr>
+          <p:nvPr/>
+        </p:nvPicPr>
+        <p:blipFill>
+          <a:blip r:embed="rId2"/>
+          <a:stretch>
+            <a:fillRect/>
+          </a:stretch>
+        </p:blipFill>
+        <p:spPr>
+          <a:xfrm>
+            <a:off x="694944" y="1897683"/>
+            <a:ext cx="6931152" cy="4388514"/>
+          </a:xfrm>
+          <a:prstGeom prst="rect">
+            <a:avLst/>
+          </a:prstGeom>
+        </p:spPr>
+      </p:pic>
       <p:sp>
         <p:nvSpPr>
           <p:cNvPr id="10" name="Shape 6"/>
@@ -7084,18 +8583,257 @@
         </p:nvSpPr>
         <p:spPr>
           <a:xfrm>
-            <a:off x="896112" y="2606040"/>
-            <a:ext cx="457200" cy="457200"/>
+            <a:off x="7909560" y="1975104"/>
+            <a:ext cx="146304" cy="146304"/>
           </a:xfrm>
           <a:prstGeom prst="ellipse">
             <a:avLst/>
+          </a:prstGeom>
+          <a:solidFill>
+            <a:srgbClr val="3BD07A"/>
+          </a:solidFill>
+          <a:ln/>
+        </p:spPr>
+      </p:sp>
+      <p:sp>
+        <p:nvSpPr>
+          <p:cNvPr id="11" name="Text 7"/>
+          <p:cNvSpPr/>
+          <p:nvPr/>
+        </p:nvSpPr>
+        <p:spPr>
+          <a:xfrm>
+            <a:off x="8183880" y="1874520"/>
+            <a:ext cx="3337560" cy="457200"/>
+          </a:xfrm>
+          <a:prstGeom prst="rect">
+            <a:avLst/>
+          </a:prstGeom>
+          <a:noFill/>
+          <a:ln/>
+        </p:spPr>
+        <p:txBody>
+          <a:bodyPr wrap="square" lIns="0" tIns="0" rIns="0" bIns="0" rtlCol="0" anchor="t"/>
+          <a:lstStyle/>
+          <a:p>
+            <a:pPr indent="0" marL="0">
+              <a:lnSpc>
+                <a:spcPct val="102000"/>
+              </a:lnSpc>
+              <a:buNone/>
+            </a:pPr>
+            <a:r>
+              <a:rPr lang="en-US" sz="1250" b="1" dirty="0">
+                <a:solidFill>
+                  <a:srgbClr val="F1F4F7"/>
+                </a:solidFill>
+                <a:latin typeface="Calibri" pitchFamily="34" charset="0"/>
+                <a:ea typeface="Calibri" pitchFamily="34" charset="-122"/>
+                <a:cs typeface="Calibri" pitchFamily="34" charset="-120"/>
+              </a:rPr>
+              <a:t>Approved vs pending  </a:t>
+            </a:r>
+            <a:pPr indent="0" marL="0">
+              <a:lnSpc>
+                <a:spcPct val="102000"/>
+              </a:lnSpc>
+              <a:buNone/>
+            </a:pPr>
+            <a:r>
+              <a:rPr lang="en-US" sz="1250" dirty="0">
+                <a:solidFill>
+                  <a:srgbClr val="B6C0CB"/>
+                </a:solidFill>
+                <a:latin typeface="Calibri" pitchFamily="34" charset="0"/>
+                <a:ea typeface="Calibri" pitchFamily="34" charset="-122"/>
+                <a:cs typeface="Calibri" pitchFamily="34" charset="-120"/>
+              </a:rPr>
+              <a:t>Green chips are approved leave, purple still pending — AL, OL, LL, HL, medical — every type, all year.</a:t>
+            </a:r>
+            <a:endParaRPr lang="en-US" sz="1250" dirty="0"/>
+          </a:p>
+        </p:txBody>
+      </p:sp>
+      <p:sp>
+        <p:nvSpPr>
+          <p:cNvPr id="12" name="Shape 8"/>
+          <p:cNvSpPr/>
+          <p:nvPr/>
+        </p:nvSpPr>
+        <p:spPr>
+          <a:xfrm>
+            <a:off x="7909560" y="2980944"/>
+            <a:ext cx="146304" cy="146304"/>
+          </a:xfrm>
+          <a:prstGeom prst="ellipse">
+            <a:avLst/>
+          </a:prstGeom>
+          <a:solidFill>
+            <a:srgbClr val="E5A83B"/>
+          </a:solidFill>
+          <a:ln/>
+        </p:spPr>
+      </p:sp>
+      <p:sp>
+        <p:nvSpPr>
+          <p:cNvPr id="13" name="Text 9"/>
+          <p:cNvSpPr/>
+          <p:nvPr/>
+        </p:nvSpPr>
+        <p:spPr>
+          <a:xfrm>
+            <a:off x="8183880" y="2880360"/>
+            <a:ext cx="3337560" cy="457200"/>
+          </a:xfrm>
+          <a:prstGeom prst="rect">
+            <a:avLst/>
+          </a:prstGeom>
+          <a:noFill/>
+          <a:ln/>
+        </p:spPr>
+        <p:txBody>
+          <a:bodyPr wrap="square" lIns="0" tIns="0" rIns="0" bIns="0" rtlCol="0" anchor="t"/>
+          <a:lstStyle/>
+          <a:p>
+            <a:pPr indent="0" marL="0">
+              <a:lnSpc>
+                <a:spcPct val="102000"/>
+              </a:lnSpc>
+              <a:buNone/>
+            </a:pPr>
+            <a:r>
+              <a:rPr lang="en-US" sz="1250" b="1" dirty="0">
+                <a:solidFill>
+                  <a:srgbClr val="F1F4F7"/>
+                </a:solidFill>
+                <a:latin typeface="Calibri" pitchFamily="34" charset="0"/>
+                <a:ea typeface="Calibri" pitchFamily="34" charset="-122"/>
+                <a:cs typeface="Calibri" pitchFamily="34" charset="-120"/>
+              </a:rPr>
+              <a:t>Amber, then red  </a:t>
+            </a:r>
+            <a:pPr indent="0" marL="0">
+              <a:lnSpc>
+                <a:spcPct val="102000"/>
+              </a:lnSpc>
+              <a:buNone/>
+            </a:pPr>
+            <a:r>
+              <a:rPr lang="en-US" sz="1250" dirty="0">
+                <a:solidFill>
+                  <a:srgbClr val="B6C0CB"/>
+                </a:solidFill>
+                <a:latin typeface="Calibri" pitchFamily="34" charset="0"/>
+                <a:ea typeface="Calibri" pitchFamily="34" charset="-122"/>
+                <a:cs typeface="Calibri" pitchFamily="34" charset="-120"/>
+              </a:rPr>
+              <a:t>Management sets the daily manning floor per category; the counts turn amber, then red, the moment a day drops below it.</a:t>
+            </a:r>
+            <a:endParaRPr lang="en-US" sz="1250" dirty="0"/>
+          </a:p>
+        </p:txBody>
+      </p:sp>
+      <p:sp>
+        <p:nvSpPr>
+          <p:cNvPr id="14" name="Shape 10"/>
+          <p:cNvSpPr/>
+          <p:nvPr/>
+        </p:nvSpPr>
+        <p:spPr>
+          <a:xfrm>
+            <a:off x="7909560" y="4032504"/>
+            <a:ext cx="146304" cy="146304"/>
+          </a:xfrm>
+          <a:prstGeom prst="ellipse">
+            <a:avLst/>
+          </a:prstGeom>
+          <a:solidFill>
+            <a:srgbClr val="F0555F"/>
+          </a:solidFill>
+          <a:ln/>
+        </p:spPr>
+      </p:sp>
+      <p:sp>
+        <p:nvSpPr>
+          <p:cNvPr id="15" name="Text 11"/>
+          <p:cNvSpPr/>
+          <p:nvPr/>
+        </p:nvSpPr>
+        <p:spPr>
+          <a:xfrm>
+            <a:off x="8183880" y="3931920"/>
+            <a:ext cx="3337560" cy="457200"/>
+          </a:xfrm>
+          <a:prstGeom prst="rect">
+            <a:avLst/>
+          </a:prstGeom>
+          <a:noFill/>
+          <a:ln/>
+        </p:spPr>
+        <p:txBody>
+          <a:bodyPr wrap="square" lIns="0" tIns="0" rIns="0" bIns="0" rtlCol="0" anchor="t"/>
+          <a:lstStyle/>
+          <a:p>
+            <a:pPr indent="0" marL="0">
+              <a:lnSpc>
+                <a:spcPct val="102000"/>
+              </a:lnSpc>
+              <a:buNone/>
+            </a:pPr>
+            <a:r>
+              <a:rPr lang="en-US" sz="1250" b="1" dirty="0">
+                <a:solidFill>
+                  <a:srgbClr val="F1F4F7"/>
+                </a:solidFill>
+                <a:latin typeface="Calibri" pitchFamily="34" charset="0"/>
+                <a:ea typeface="Calibri" pitchFamily="34" charset="-122"/>
+                <a:cs typeface="Calibri" pitchFamily="34" charset="-120"/>
+              </a:rPr>
+              <a:t>Under-manned days, counted  </a:t>
+            </a:r>
+            <a:pPr indent="0" marL="0">
+              <a:lnSpc>
+                <a:spcPct val="102000"/>
+              </a:lnSpc>
+              <a:buNone/>
+            </a:pPr>
+            <a:r>
+              <a:rPr lang="en-US" sz="1250" dirty="0">
+                <a:solidFill>
+                  <a:srgbClr val="B6C0CB"/>
+                </a:solidFill>
+                <a:latin typeface="Calibri" pitchFamily="34" charset="0"/>
+                <a:ea typeface="Calibri" pitchFamily="34" charset="-122"/>
+                <a:cs typeface="Calibri" pitchFamily="34" charset="-120"/>
+              </a:rPr>
+              <a:t>The header keeps score — the days below the red line are impossible to miss.</a:t>
+            </a:r>
+            <a:endParaRPr lang="en-US" sz="1250" dirty="0"/>
+          </a:p>
+        </p:txBody>
+      </p:sp>
+      <p:sp>
+        <p:nvSpPr>
+          <p:cNvPr id="16" name="Shape 12"/>
+          <p:cNvSpPr/>
+          <p:nvPr/>
+        </p:nvSpPr>
+        <p:spPr>
+          <a:xfrm>
+            <a:off x="7909560" y="5029200"/>
+            <a:ext cx="3611880" cy="1325880"/>
+          </a:xfrm>
+          <a:prstGeom prst="roundRect">
+            <a:avLst>
+              <a:gd name="adj" fmla="val 6897"/>
+            </a:avLst>
           </a:prstGeom>
           <a:solidFill>
             <a:srgbClr val="1A1F26"/>
           </a:solidFill>
-          <a:ln w="19050">
+          <a:ln w="12700">
             <a:solidFill>
-              <a:srgbClr val="3BC6E8"/>
+              <a:srgbClr val="39424D"/>
             </a:solidFill>
             <a:prstDash val="solid"/>
           </a:ln>
@@ -7103,14 +8841,14 @@
       </p:sp>
       <p:sp>
         <p:nvSpPr>
-          <p:cNvPr id="11" name="Text 7"/>
-          <p:cNvSpPr/>
-          <p:nvPr/>
-        </p:nvSpPr>
-        <p:spPr>
-          <a:xfrm>
-            <a:off x="896112" y="2606040"/>
-            <a:ext cx="457200" cy="457200"/>
+          <p:cNvPr id="17" name="Text 13"/>
+          <p:cNvSpPr/>
+          <p:nvPr/>
+        </p:nvSpPr>
+        <p:spPr>
+          <a:xfrm>
+            <a:off x="8110728" y="5120640"/>
+            <a:ext cx="3209544" cy="1143000"/>
           </a:xfrm>
           <a:prstGeom prst="rect">
             <a:avLst/>
@@ -7122,258 +8860,25 @@
           <a:bodyPr wrap="square" lIns="0" tIns="0" rIns="0" bIns="0" rtlCol="0" anchor="ctr"/>
           <a:lstStyle/>
           <a:p>
-            <a:pPr algn="ctr" indent="0" marL="0">
-              <a:buNone/>
-            </a:pPr>
-            <a:r>
-              <a:rPr lang="en-US" sz="1600" b="1" dirty="0">
-                <a:solidFill>
-                  <a:srgbClr val="3BC6E8"/>
-                </a:solidFill>
-                <a:latin typeface="Arial" pitchFamily="34" charset="0"/>
-                <a:ea typeface="Arial" pitchFamily="34" charset="-122"/>
-                <a:cs typeface="Arial" pitchFamily="34" charset="-120"/>
-              </a:rPr>
-              <a:t>1</a:t>
-            </a:r>
-            <a:endParaRPr lang="en-US" sz="1600" dirty="0"/>
-          </a:p>
-        </p:txBody>
-      </p:sp>
-      <p:sp>
-        <p:nvSpPr>
-          <p:cNvPr id="12" name="Text 8"/>
-          <p:cNvSpPr/>
-          <p:nvPr/>
-        </p:nvSpPr>
-        <p:spPr>
-          <a:xfrm>
-            <a:off x="896112" y="3246120"/>
-            <a:ext cx="3008376" cy="777240"/>
-          </a:xfrm>
-          <a:prstGeom prst="rect">
-            <a:avLst/>
-          </a:prstGeom>
-          <a:noFill/>
-          <a:ln/>
-        </p:spPr>
-        <p:txBody>
-          <a:bodyPr wrap="square" lIns="0" tIns="0" rIns="0" bIns="0" rtlCol="0" anchor="t"/>
-          <a:lstStyle/>
-          <a:p>
-            <a:pPr indent="0" marL="0">
-              <a:buNone/>
-            </a:pPr>
-            <a:r>
-              <a:rPr lang="en-US" sz="1550" b="1" dirty="0">
+            <a:pPr indent="0" marL="0">
+              <a:buNone/>
+            </a:pPr>
+            <a:r>
+              <a:rPr lang="en-US" sz="1200" b="1" dirty="0">
                 <a:solidFill>
                   <a:srgbClr val="F1F4F7"/>
-                </a:solidFill>
-                <a:latin typeface="Arial" pitchFamily="34" charset="0"/>
-                <a:ea typeface="Arial" pitchFamily="34" charset="-122"/>
-                <a:cs typeface="Arial" pitchFamily="34" charset="-120"/>
-              </a:rPr>
-              <a:t>Microsoft 365 · Power Apps on Teams</a:t>
-            </a:r>
-            <a:endParaRPr lang="en-US" sz="1550" dirty="0"/>
-          </a:p>
-        </p:txBody>
-      </p:sp>
-      <p:sp>
-        <p:nvSpPr>
-          <p:cNvPr id="13" name="Text 9"/>
-          <p:cNvSpPr/>
-          <p:nvPr/>
-        </p:nvSpPr>
-        <p:spPr>
-          <a:xfrm>
-            <a:off x="896112" y="4114800"/>
-            <a:ext cx="3008376" cy="1143000"/>
-          </a:xfrm>
-          <a:prstGeom prst="rect">
-            <a:avLst/>
-          </a:prstGeom>
-          <a:noFill/>
-          <a:ln/>
-        </p:spPr>
-        <p:txBody>
-          <a:bodyPr wrap="square" lIns="0" tIns="0" rIns="0" bIns="0" rtlCol="0" anchor="t"/>
-          <a:lstStyle/>
-          <a:p>
-            <a:pPr indent="0" marL="0">
-              <a:buNone/>
-            </a:pPr>
-            <a:r>
-              <a:rPr lang="en-US" sz="1150" dirty="0">
-                <a:solidFill>
-                  <a:srgbClr val="B6C0CB"/>
                 </a:solidFill>
                 <a:latin typeface="Calibri" pitchFamily="34" charset="0"/>
                 <a:ea typeface="Calibri" pitchFamily="34" charset="-122"/>
                 <a:cs typeface="Calibri" pitchFamily="34" charset="-120"/>
               </a:rPr>
-              <a:t>Move from the demo to Power Apps inside Teams, on a live shared database — so it's multi-user, real-time and inside the tools the squadron already runs.</a:t>
-            </a:r>
-            <a:endParaRPr lang="en-US" sz="1150" dirty="0"/>
-          </a:p>
-        </p:txBody>
-      </p:sp>
-      <p:sp>
-        <p:nvSpPr>
-          <p:cNvPr id="14" name="Shape 10"/>
-          <p:cNvSpPr/>
-          <p:nvPr/>
-        </p:nvSpPr>
-        <p:spPr>
-          <a:xfrm>
-            <a:off x="4416552" y="2331720"/>
-            <a:ext cx="3520440" cy="3063240"/>
-          </a:xfrm>
-          <a:prstGeom prst="roundRect">
-            <a:avLst>
-              <a:gd name="adj" fmla="val 3284"/>
-            </a:avLst>
-          </a:prstGeom>
-          <a:solidFill>
-            <a:srgbClr val="14181D"/>
-          </a:solidFill>
-          <a:ln w="12700">
-            <a:solidFill>
-              <a:srgbClr val="2A313A"/>
-            </a:solidFill>
-            <a:prstDash val="solid"/>
-          </a:ln>
-        </p:spPr>
-      </p:sp>
-      <p:sp>
-        <p:nvSpPr>
-          <p:cNvPr id="15" name="Shape 11"/>
-          <p:cNvSpPr/>
-          <p:nvPr/>
-        </p:nvSpPr>
-        <p:spPr>
-          <a:xfrm>
-            <a:off x="4672584" y="2606040"/>
-            <a:ext cx="457200" cy="457200"/>
-          </a:xfrm>
-          <a:prstGeom prst="ellipse">
-            <a:avLst/>
-          </a:prstGeom>
-          <a:solidFill>
-            <a:srgbClr val="1A1F26"/>
-          </a:solidFill>
-          <a:ln w="19050">
-            <a:solidFill>
-              <a:srgbClr val="3BD07A"/>
-            </a:solidFill>
-            <a:prstDash val="solid"/>
-          </a:ln>
-        </p:spPr>
-      </p:sp>
-      <p:sp>
-        <p:nvSpPr>
-          <p:cNvPr id="16" name="Text 12"/>
-          <p:cNvSpPr/>
-          <p:nvPr/>
-        </p:nvSpPr>
-        <p:spPr>
-          <a:xfrm>
-            <a:off x="4672584" y="2606040"/>
-            <a:ext cx="457200" cy="457200"/>
-          </a:xfrm>
-          <a:prstGeom prst="rect">
-            <a:avLst/>
-          </a:prstGeom>
-          <a:noFill/>
-          <a:ln/>
-        </p:spPr>
-        <p:txBody>
-          <a:bodyPr wrap="square" lIns="0" tIns="0" rIns="0" bIns="0" rtlCol="0" anchor="ctr"/>
-          <a:lstStyle/>
-          <a:p>
-            <a:pPr algn="ctr" indent="0" marL="0">
-              <a:buNone/>
-            </a:pPr>
-            <a:r>
-              <a:rPr lang="en-US" sz="1600" b="1" dirty="0">
-                <a:solidFill>
-                  <a:srgbClr val="3BD07A"/>
-                </a:solidFill>
-                <a:latin typeface="Arial" pitchFamily="34" charset="0"/>
-                <a:ea typeface="Arial" pitchFamily="34" charset="-122"/>
-                <a:cs typeface="Arial" pitchFamily="34" charset="-120"/>
-              </a:rPr>
-              <a:t>2</a:t>
-            </a:r>
-            <a:endParaRPr lang="en-US" sz="1600" dirty="0"/>
-          </a:p>
-        </p:txBody>
-      </p:sp>
-      <p:sp>
-        <p:nvSpPr>
-          <p:cNvPr id="17" name="Text 13"/>
-          <p:cNvSpPr/>
-          <p:nvPr/>
-        </p:nvSpPr>
-        <p:spPr>
-          <a:xfrm>
-            <a:off x="4672584" y="3246120"/>
-            <a:ext cx="3008376" cy="777240"/>
-          </a:xfrm>
-          <a:prstGeom prst="rect">
-            <a:avLst/>
-          </a:prstGeom>
-          <a:noFill/>
-          <a:ln/>
-        </p:spPr>
-        <p:txBody>
-          <a:bodyPr wrap="square" lIns="0" tIns="0" rIns="0" bIns="0" rtlCol="0" anchor="t"/>
-          <a:lstStyle/>
-          <a:p>
-            <a:pPr indent="0" marL="0">
-              <a:buNone/>
-            </a:pPr>
-            <a:r>
-              <a:rPr lang="en-US" sz="1550" b="1" dirty="0">
-                <a:solidFill>
-                  <a:srgbClr val="F1F4F7"/>
-                </a:solidFill>
-                <a:latin typeface="Arial" pitchFamily="34" charset="0"/>
-                <a:ea typeface="Arial" pitchFamily="34" charset="-122"/>
-                <a:cs typeface="Arial" pitchFamily="34" charset="-120"/>
-              </a:rPr>
-              <a:t>Robust &amp; operational</a:t>
-            </a:r>
-            <a:endParaRPr lang="en-US" sz="1550" dirty="0"/>
-          </a:p>
-        </p:txBody>
-      </p:sp>
-      <p:sp>
-        <p:nvSpPr>
-          <p:cNvPr id="18" name="Text 14"/>
-          <p:cNvSpPr/>
-          <p:nvPr/>
-        </p:nvSpPr>
-        <p:spPr>
-          <a:xfrm>
-            <a:off x="4672584" y="4114800"/>
-            <a:ext cx="3008376" cy="1143000"/>
-          </a:xfrm>
-          <a:prstGeom prst="rect">
-            <a:avLst/>
-          </a:prstGeom>
-          <a:noFill/>
-          <a:ln/>
-        </p:spPr>
-        <p:txBody>
-          <a:bodyPr wrap="square" lIns="0" tIns="0" rIns="0" bIns="0" rtlCol="0" anchor="t"/>
-          <a:lstStyle/>
-          <a:p>
-            <a:pPr indent="0" marL="0">
-              <a:buNone/>
-            </a:pPr>
-            <a:r>
-              <a:rPr lang="en-US" sz="1150" dirty="0">
+              <a:t>Synced both ways.  </a:t>
+            </a:r>
+            <a:pPr indent="0" marL="0">
+              <a:buNone/>
+            </a:pPr>
+            <a:r>
+              <a:rPr lang="en-US" sz="1200" dirty="0">
                 <a:solidFill>
                   <a:srgbClr val="B6C0CB"/>
                 </a:solidFill>
@@ -7381,217 +8886,9 @@
                 <a:ea typeface="Calibri" pitchFamily="34" charset="-122"/>
                 <a:cs typeface="Calibri" pitchFamily="34" charset="-120"/>
               </a:rPr>
-              <a:t>Extensive testing with the RAID office to prove it stands up to daily operational use — the priority for the next three months.</a:t>
-            </a:r>
-            <a:endParaRPr lang="en-US" sz="1150" dirty="0"/>
-          </a:p>
-        </p:txBody>
-      </p:sp>
-      <p:sp>
-        <p:nvSpPr>
-          <p:cNvPr id="19" name="Shape 15"/>
-          <p:cNvSpPr/>
-          <p:nvPr/>
-        </p:nvSpPr>
-        <p:spPr>
-          <a:xfrm>
-            <a:off x="8193024" y="2331720"/>
-            <a:ext cx="3520440" cy="3063240"/>
-          </a:xfrm>
-          <a:prstGeom prst="roundRect">
-            <a:avLst>
-              <a:gd name="adj" fmla="val 3284"/>
-            </a:avLst>
-          </a:prstGeom>
-          <a:solidFill>
-            <a:srgbClr val="14181D"/>
-          </a:solidFill>
-          <a:ln w="12700">
-            <a:solidFill>
-              <a:srgbClr val="2A313A"/>
-            </a:solidFill>
-            <a:prstDash val="solid"/>
-          </a:ln>
-        </p:spPr>
-      </p:sp>
-      <p:sp>
-        <p:nvSpPr>
-          <p:cNvPr id="20" name="Shape 16"/>
-          <p:cNvSpPr/>
-          <p:nvPr/>
-        </p:nvSpPr>
-        <p:spPr>
-          <a:xfrm>
-            <a:off x="8449056" y="2606040"/>
-            <a:ext cx="457200" cy="457200"/>
-          </a:xfrm>
-          <a:prstGeom prst="ellipse">
-            <a:avLst/>
-          </a:prstGeom>
-          <a:solidFill>
-            <a:srgbClr val="1A1F26"/>
-          </a:solidFill>
-          <a:ln w="19050">
-            <a:solidFill>
-              <a:srgbClr val="8A8F3C"/>
-            </a:solidFill>
-            <a:prstDash val="solid"/>
-          </a:ln>
-        </p:spPr>
-      </p:sp>
-      <p:sp>
-        <p:nvSpPr>
-          <p:cNvPr id="21" name="Text 17"/>
-          <p:cNvSpPr/>
-          <p:nvPr/>
-        </p:nvSpPr>
-        <p:spPr>
-          <a:xfrm>
-            <a:off x="8449056" y="2606040"/>
-            <a:ext cx="457200" cy="457200"/>
-          </a:xfrm>
-          <a:prstGeom prst="rect">
-            <a:avLst/>
-          </a:prstGeom>
-          <a:noFill/>
-          <a:ln/>
-        </p:spPr>
-        <p:txBody>
-          <a:bodyPr wrap="square" lIns="0" tIns="0" rIns="0" bIns="0" rtlCol="0" anchor="ctr"/>
-          <a:lstStyle/>
-          <a:p>
-            <a:pPr algn="ctr" indent="0" marL="0">
-              <a:buNone/>
-            </a:pPr>
-            <a:r>
-              <a:rPr lang="en-US" sz="1600" b="1" dirty="0">
-                <a:solidFill>
-                  <a:srgbClr val="8A8F3C"/>
-                </a:solidFill>
-                <a:latin typeface="Arial" pitchFamily="34" charset="0"/>
-                <a:ea typeface="Arial" pitchFamily="34" charset="-122"/>
-                <a:cs typeface="Arial" pitchFamily="34" charset="-120"/>
-              </a:rPr>
-              <a:t>3</a:t>
-            </a:r>
-            <a:endParaRPr lang="en-US" sz="1600" dirty="0"/>
-          </a:p>
-        </p:txBody>
-      </p:sp>
-      <p:sp>
-        <p:nvSpPr>
-          <p:cNvPr id="22" name="Text 18"/>
-          <p:cNvSpPr/>
-          <p:nvPr/>
-        </p:nvSpPr>
-        <p:spPr>
-          <a:xfrm>
-            <a:off x="8449056" y="3246120"/>
-            <a:ext cx="3008376" cy="777240"/>
-          </a:xfrm>
-          <a:prstGeom prst="rect">
-            <a:avLst/>
-          </a:prstGeom>
-          <a:noFill/>
-          <a:ln/>
-        </p:spPr>
-        <p:txBody>
-          <a:bodyPr wrap="square" lIns="0" tIns="0" rIns="0" bIns="0" rtlCol="0" anchor="t"/>
-          <a:lstStyle/>
-          <a:p>
-            <a:pPr indent="0" marL="0">
-              <a:buNone/>
-            </a:pPr>
-            <a:r>
-              <a:rPr lang="en-US" sz="1550" b="1" dirty="0">
-                <a:solidFill>
-                  <a:srgbClr val="F1F4F7"/>
-                </a:solidFill>
-                <a:latin typeface="Arial" pitchFamily="34" charset="0"/>
-                <a:ea typeface="Arial" pitchFamily="34" charset="-122"/>
-                <a:cs typeface="Arial" pitchFamily="34" charset="-120"/>
-              </a:rPr>
-              <a:t>OCU syllabus tracker folds in</a:t>
-            </a:r>
-            <a:endParaRPr lang="en-US" sz="1550" dirty="0"/>
-          </a:p>
-        </p:txBody>
-      </p:sp>
-      <p:sp>
-        <p:nvSpPr>
-          <p:cNvPr id="23" name="Text 19"/>
-          <p:cNvSpPr/>
-          <p:nvPr/>
-        </p:nvSpPr>
-        <p:spPr>
-          <a:xfrm>
-            <a:off x="8449056" y="4114800"/>
-            <a:ext cx="3008376" cy="1143000"/>
-          </a:xfrm>
-          <a:prstGeom prst="rect">
-            <a:avLst/>
-          </a:prstGeom>
-          <a:noFill/>
-          <a:ln/>
-        </p:spPr>
-        <p:txBody>
-          <a:bodyPr wrap="square" lIns="0" tIns="0" rIns="0" bIns="0" rtlCol="0" anchor="t"/>
-          <a:lstStyle/>
-          <a:p>
-            <a:pPr indent="0" marL="0">
-              <a:buNone/>
-            </a:pPr>
-            <a:r>
-              <a:rPr lang="en-US" sz="1150" dirty="0">
-                <a:solidFill>
-                  <a:srgbClr val="B6C0CB"/>
-                </a:solidFill>
-                <a:latin typeface="Calibri" pitchFamily="34" charset="0"/>
-                <a:ea typeface="Calibri" pitchFamily="34" charset="-122"/>
-                <a:cs typeface="Calibri" pitchFamily="34" charset="-120"/>
-              </a:rPr>
-              <a:t>The separate OCU Progress Tracker — every student's path through the syllabus — comes into RAPTOR, so training progress lives beside the programme.</a:t>
-            </a:r>
-            <a:endParaRPr lang="en-US" sz="1150" dirty="0"/>
-          </a:p>
-        </p:txBody>
-      </p:sp>
-      <p:sp>
-        <p:nvSpPr>
-          <p:cNvPr id="24" name="Text 20"/>
-          <p:cNvSpPr/>
-          <p:nvPr/>
-        </p:nvSpPr>
-        <p:spPr>
-          <a:xfrm>
-            <a:off x="640080" y="5715000"/>
-            <a:ext cx="10881360" cy="457200"/>
-          </a:xfrm>
-          <a:prstGeom prst="rect">
-            <a:avLst/>
-          </a:prstGeom>
-          <a:noFill/>
-          <a:ln/>
-        </p:spPr>
-        <p:txBody>
-          <a:bodyPr wrap="square" lIns="0" tIns="0" rIns="0" bIns="0" rtlCol="0" anchor="ctr"/>
-          <a:lstStyle/>
-          <a:p>
-            <a:pPr algn="ctr" indent="0" marL="0">
-              <a:buNone/>
-            </a:pPr>
-            <a:r>
-              <a:rPr lang="en-US" sz="1250" i="1" dirty="0">
-                <a:solidFill>
-                  <a:srgbClr val="8A96A3"/>
-                </a:solidFill>
-                <a:latin typeface="Calibri" pitchFamily="34" charset="0"/>
-                <a:ea typeface="Calibri" pitchFamily="34" charset="-122"/>
-                <a:cs typeface="Calibri" pitchFamily="34" charset="-120"/>
-              </a:rPr>
-              <a:t>Built with AI over 500+ rounds of testing and correction, behind six automated quality gates — the same discipline that carries into the RAID-office hardening.</a:t>
-            </a:r>
-            <a:endParaRPr lang="en-US" sz="1250" dirty="0"/>
+              <a:t>Approve a bid and it lands on the programme; leave filed on the Inputs page draws the balances down here.</a:t>
+            </a:r>
+            <a:endParaRPr lang="en-US" sz="1200" dirty="0"/>
           </a:p>
         </p:txBody>
       </p:sp>
@@ -7627,112 +8924,26 @@
           <a:chExt cx="0" cy="0"/>
         </a:xfrm>
       </p:grpSpPr>
-      <p:sp>
-        <p:nvSpPr>
-          <p:cNvPr id="2" name="Shape 0"/>
-          <p:cNvSpPr/>
-          <p:nvPr/>
-        </p:nvSpPr>
-        <p:spPr>
-          <a:xfrm>
-            <a:off x="0" y="0"/>
-            <a:ext cx="12188952" cy="2103120"/>
-          </a:xfrm>
-          <a:prstGeom prst="rect">
-            <a:avLst/>
-          </a:prstGeom>
-          <a:solidFill>
-            <a:srgbClr val="0E1116"/>
-          </a:solidFill>
-          <a:ln/>
-        </p:spPr>
-      </p:sp>
-      <p:sp>
-        <p:nvSpPr>
-          <p:cNvPr id="3" name="Shape 1"/>
-          <p:cNvSpPr/>
-          <p:nvPr/>
-        </p:nvSpPr>
-        <p:spPr>
-          <a:xfrm>
-            <a:off x="8165592" y="2377440"/>
-            <a:ext cx="6035040" cy="6035040"/>
-          </a:xfrm>
-          <a:prstGeom prst="ellipse">
-            <a:avLst/>
-          </a:prstGeom>
-          <a:ln w="12700">
-            <a:solidFill>
-              <a:srgbClr val="2A313A"/>
-            </a:solidFill>
-            <a:prstDash val="solid"/>
-          </a:ln>
-        </p:spPr>
-      </p:sp>
-      <p:sp>
-        <p:nvSpPr>
-          <p:cNvPr id="4" name="Shape 2"/>
-          <p:cNvSpPr/>
-          <p:nvPr/>
-        </p:nvSpPr>
-        <p:spPr>
-          <a:xfrm>
-            <a:off x="9079992" y="3291840"/>
-            <a:ext cx="4114800" cy="4114800"/>
-          </a:xfrm>
-          <a:prstGeom prst="ellipse">
-            <a:avLst/>
-          </a:prstGeom>
-          <a:ln w="12700">
-            <a:solidFill>
-              <a:srgbClr val="2A313A"/>
-            </a:solidFill>
-            <a:prstDash val="solid"/>
-          </a:ln>
-        </p:spPr>
-      </p:sp>
-      <p:sp>
-        <p:nvSpPr>
-          <p:cNvPr id="5" name="Shape 3"/>
-          <p:cNvSpPr/>
-          <p:nvPr/>
-        </p:nvSpPr>
-        <p:spPr>
-          <a:xfrm>
-            <a:off x="9857232" y="4114800"/>
-            <a:ext cx="2560320" cy="2560320"/>
-          </a:xfrm>
-          <a:prstGeom prst="ellipse">
-            <a:avLst/>
-          </a:prstGeom>
-          <a:ln w="12700">
-            <a:solidFill>
-              <a:srgbClr val="2E7F94">
-                <a:alpha val="65000"/>
-              </a:srgbClr>
-            </a:solidFill>
-            <a:prstDash val="solid"/>
-          </a:ln>
-        </p:spPr>
-      </p:sp>
       <p:pic>
         <p:nvPicPr>
-          <p:cNvPr id="6" name="Image 0" descr="preencoded.png">    </p:cNvPr>
+          <p:cNvPr id="2" name="Image 0" descr="preencoded.png">    </p:cNvPr>
           <p:cNvPicPr>
             <a:picLocks noChangeAspect="1"/>
           </p:cNvPicPr>
           <p:nvPr/>
         </p:nvPicPr>
         <p:blipFill>
-          <a:blip r:embed="rId1"/>
+          <a:blip r:embed="rId1">
+            <a:alphaModFix amt="80000"/>
+          </a:blip>
           <a:stretch>
             <a:fillRect/>
           </a:stretch>
         </p:blipFill>
         <p:spPr>
           <a:xfrm>
-            <a:off x="658368" y="731520"/>
-            <a:ext cx="566928" cy="566928"/>
+            <a:off x="640080" y="6291072"/>
+            <a:ext cx="219456" cy="219456"/>
           </a:xfrm>
           <a:prstGeom prst="rect">
             <a:avLst/>
@@ -7741,14 +8952,14 @@
       </p:pic>
       <p:sp>
         <p:nvSpPr>
-          <p:cNvPr id="7" name="Text 4"/>
-          <p:cNvSpPr/>
-          <p:nvPr/>
-        </p:nvSpPr>
-        <p:spPr>
-          <a:xfrm>
-            <a:off x="1417320" y="749808"/>
-            <a:ext cx="5486400" cy="502920"/>
+          <p:cNvPr id="3" name="Text 0"/>
+          <p:cNvSpPr/>
+          <p:nvPr/>
+        </p:nvSpPr>
+        <p:spPr>
+          <a:xfrm>
+            <a:off x="914400" y="6309360"/>
+            <a:ext cx="2743200" cy="219456"/>
           </a:xfrm>
           <a:prstGeom prst="rect">
             <a:avLst/>
@@ -7764,9 +8975,9 @@
               <a:buNone/>
             </a:pPr>
             <a:r>
-              <a:rPr lang="en-US" sz="2200" b="1" spc="300" kern="0" dirty="0">
-                <a:solidFill>
-                  <a:srgbClr val="F1F4F7"/>
+              <a:rPr lang="en-US" sz="900" b="1" spc="200" kern="0" dirty="0">
+                <a:solidFill>
+                  <a:srgbClr val="8A96A3"/>
                 </a:solidFill>
                 <a:latin typeface="Arial" pitchFamily="34" charset="0"/>
                 <a:ea typeface="Arial" pitchFamily="34" charset="-122"/>
@@ -7774,20 +8985,20 @@
               </a:rPr>
               <a:t>RAPTOR</a:t>
             </a:r>
-            <a:endParaRPr lang="en-US" sz="2200" dirty="0"/>
-          </a:p>
-        </p:txBody>
-      </p:sp>
-      <p:sp>
-        <p:nvSpPr>
-          <p:cNvPr id="8" name="Text 5"/>
-          <p:cNvSpPr/>
-          <p:nvPr/>
-        </p:nvSpPr>
-        <p:spPr>
-          <a:xfrm>
-            <a:off x="658368" y="2514600"/>
-            <a:ext cx="8229600" cy="1645920"/>
+            <a:endParaRPr lang="en-US" sz="900" dirty="0"/>
+          </a:p>
+        </p:txBody>
+      </p:sp>
+      <p:sp>
+        <p:nvSpPr>
+          <p:cNvPr id="4" name="Text 1"/>
+          <p:cNvSpPr/>
+          <p:nvPr/>
+        </p:nvSpPr>
+        <p:spPr>
+          <a:xfrm>
+            <a:off x="11228832" y="6309360"/>
+            <a:ext cx="457200" cy="219456"/>
           </a:xfrm>
           <a:prstGeom prst="rect">
             <a:avLst/>
@@ -7797,6 +9008,223 @@
         </p:spPr>
         <p:txBody>
           <a:bodyPr wrap="square" lIns="0" tIns="0" rIns="0" bIns="0" rtlCol="0" anchor="ctr"/>
+          <a:lstStyle/>
+          <a:p>
+            <a:pPr algn="r" indent="0" marL="0">
+              <a:buNone/>
+            </a:pPr>
+            <a:r>
+              <a:rPr lang="en-US" sz="900" dirty="0">
+                <a:solidFill>
+                  <a:srgbClr val="8A96A3"/>
+                </a:solidFill>
+                <a:latin typeface="Arial" pitchFamily="34" charset="0"/>
+                <a:ea typeface="Arial" pitchFamily="34" charset="-122"/>
+                <a:cs typeface="Arial" pitchFamily="34" charset="-120"/>
+              </a:rPr>
+              <a:t>08</a:t>
+            </a:r>
+            <a:endParaRPr lang="en-US" sz="900" dirty="0"/>
+          </a:p>
+        </p:txBody>
+      </p:sp>
+      <p:sp>
+        <p:nvSpPr>
+          <p:cNvPr id="5" name="Text 2"/>
+          <p:cNvSpPr/>
+          <p:nvPr/>
+        </p:nvSpPr>
+        <p:spPr>
+          <a:xfrm>
+            <a:off x="640080" y="512064"/>
+            <a:ext cx="9144000" cy="274320"/>
+          </a:xfrm>
+          <a:prstGeom prst="rect">
+            <a:avLst/>
+          </a:prstGeom>
+          <a:noFill/>
+          <a:ln/>
+        </p:spPr>
+        <p:txBody>
+          <a:bodyPr wrap="square" lIns="0" tIns="0" rIns="0" bIns="0" rtlCol="0" anchor="ctr"/>
+          <a:lstStyle/>
+          <a:p>
+            <a:pPr indent="0" marL="0">
+              <a:buNone/>
+            </a:pPr>
+            <a:r>
+              <a:rPr lang="en-US" sz="1200" b="1" spc="300" kern="0" dirty="0">
+                <a:solidFill>
+                  <a:srgbClr val="3BC6E8"/>
+                </a:solidFill>
+                <a:latin typeface="Arial" pitchFamily="34" charset="0"/>
+                <a:ea typeface="Arial" pitchFamily="34" charset="-122"/>
+                <a:cs typeface="Arial" pitchFamily="34" charset="-120"/>
+              </a:rPr>
+              <a:t>COMING INTO RAPTOR — THE UPGRADE TRACKER</a:t>
+            </a:r>
+            <a:endParaRPr lang="en-US" sz="1200" dirty="0"/>
+          </a:p>
+        </p:txBody>
+      </p:sp>
+      <p:sp>
+        <p:nvSpPr>
+          <p:cNvPr id="6" name="Text 3"/>
+          <p:cNvSpPr/>
+          <p:nvPr/>
+        </p:nvSpPr>
+        <p:spPr>
+          <a:xfrm>
+            <a:off x="640080" y="786384"/>
+            <a:ext cx="11338560" cy="822960"/>
+          </a:xfrm>
+          <a:prstGeom prst="rect">
+            <a:avLst/>
+          </a:prstGeom>
+          <a:noFill/>
+          <a:ln/>
+        </p:spPr>
+        <p:txBody>
+          <a:bodyPr wrap="square" lIns="0" tIns="0" rIns="0" bIns="0" rtlCol="0" anchor="ctr"/>
+          <a:lstStyle/>
+          <a:p>
+            <a:pPr indent="0" marL="0">
+              <a:buNone/>
+            </a:pPr>
+            <a:r>
+              <a:rPr lang="en-US" sz="2800" b="1" dirty="0">
+                <a:solidFill>
+                  <a:srgbClr val="F1F4F7"/>
+                </a:solidFill>
+                <a:latin typeface="Arial" pitchFamily="34" charset="0"/>
+                <a:ea typeface="Arial" pitchFamily="34" charset="-122"/>
+                <a:cs typeface="Arial" pitchFamily="34" charset="-120"/>
+              </a:rPr>
+              <a:t>Every OCU student's syllabus, one click deep</a:t>
+            </a:r>
+            <a:endParaRPr lang="en-US" sz="2800" dirty="0"/>
+          </a:p>
+        </p:txBody>
+      </p:sp>
+      <p:sp>
+        <p:nvSpPr>
+          <p:cNvPr id="7" name="Shape 4"/>
+          <p:cNvSpPr/>
+          <p:nvPr/>
+        </p:nvSpPr>
+        <p:spPr>
+          <a:xfrm>
+            <a:off x="612648" y="1755648"/>
+            <a:ext cx="7278624" cy="4581144"/>
+          </a:xfrm>
+          <a:prstGeom prst="roundRect">
+            <a:avLst>
+              <a:gd name="adj" fmla="val 1996"/>
+            </a:avLst>
+          </a:prstGeom>
+          <a:solidFill>
+            <a:srgbClr val="000000"/>
+          </a:solidFill>
+          <a:ln/>
+          <a:effectLst>
+            <a:outerShdw sx="100000" sy="100000" kx="0" ky="0" algn="bl" rotWithShape="0" blurRad="177800" dist="63500" dir="5400000">
+              <a:srgbClr val="000000">
+                <a:alpha val="55000"/>
+              </a:srgbClr>
+            </a:outerShdw>
+          </a:effectLst>
+        </p:spPr>
+      </p:sp>
+      <p:sp>
+        <p:nvSpPr>
+          <p:cNvPr id="8" name="Shape 5"/>
+          <p:cNvSpPr/>
+          <p:nvPr/>
+        </p:nvSpPr>
+        <p:spPr>
+          <a:xfrm>
+            <a:off x="640080" y="1783080"/>
+            <a:ext cx="7223760" cy="4526280"/>
+          </a:xfrm>
+          <a:prstGeom prst="roundRect">
+            <a:avLst>
+              <a:gd name="adj" fmla="val 1818"/>
+            </a:avLst>
+          </a:prstGeom>
+          <a:solidFill>
+            <a:srgbClr val="0E1116"/>
+          </a:solidFill>
+          <a:ln w="12700">
+            <a:solidFill>
+              <a:srgbClr val="8A8F3C"/>
+            </a:solidFill>
+            <a:prstDash val="solid"/>
+          </a:ln>
+        </p:spPr>
+      </p:sp>
+      <p:pic>
+        <p:nvPicPr>
+          <p:cNvPr id="9" name="Image 1" descr="preencoded.png">    </p:cNvPr>
+          <p:cNvPicPr>
+            <a:picLocks noChangeAspect="1"/>
+          </p:cNvPicPr>
+          <p:nvPr/>
+        </p:nvPicPr>
+        <p:blipFill>
+          <a:blip r:embed="rId2"/>
+          <a:stretch>
+            <a:fillRect/>
+          </a:stretch>
+        </p:blipFill>
+        <p:spPr>
+          <a:xfrm>
+            <a:off x="764242" y="1837944"/>
+            <a:ext cx="6975435" cy="4416552"/>
+          </a:xfrm>
+          <a:prstGeom prst="rect">
+            <a:avLst/>
+          </a:prstGeom>
+        </p:spPr>
+      </p:pic>
+      <p:sp>
+        <p:nvSpPr>
+          <p:cNvPr id="10" name="Shape 6"/>
+          <p:cNvSpPr/>
+          <p:nvPr/>
+        </p:nvSpPr>
+        <p:spPr>
+          <a:xfrm>
+            <a:off x="8138160" y="1929384"/>
+            <a:ext cx="146304" cy="146304"/>
+          </a:xfrm>
+          <a:prstGeom prst="ellipse">
+            <a:avLst/>
+          </a:prstGeom>
+          <a:solidFill>
+            <a:srgbClr val="8A8F3C"/>
+          </a:solidFill>
+          <a:ln/>
+        </p:spPr>
+      </p:sp>
+      <p:sp>
+        <p:nvSpPr>
+          <p:cNvPr id="11" name="Text 7"/>
+          <p:cNvSpPr/>
+          <p:nvPr/>
+        </p:nvSpPr>
+        <p:spPr>
+          <a:xfrm>
+            <a:off x="8412480" y="1828800"/>
+            <a:ext cx="3108960" cy="457200"/>
+          </a:xfrm>
+          <a:prstGeom prst="rect">
+            <a:avLst/>
+          </a:prstGeom>
+          <a:noFill/>
+          <a:ln/>
+        </p:spPr>
+        <p:txBody>
+          <a:bodyPr wrap="square" lIns="0" tIns="0" rIns="0" bIns="0" rtlCol="0" anchor="t"/>
           <a:lstStyle/>
           <a:p>
             <a:pPr indent="0" marL="0">
@@ -7806,48 +9234,526 @@
               <a:buNone/>
             </a:pPr>
             <a:r>
-              <a:rPr lang="en-US" sz="5000" b="1" dirty="0">
+              <a:rPr lang="en-US" sz="1250" b="1" dirty="0">
                 <a:solidFill>
                   <a:srgbClr val="F1F4F7"/>
+                </a:solidFill>
+                <a:latin typeface="Calibri" pitchFamily="34" charset="0"/>
+                <a:ea typeface="Calibri" pitchFamily="34" charset="-122"/>
+                <a:cs typeface="Calibri" pitchFamily="34" charset="-120"/>
+              </a:rPr>
+              <a:t>The whole syllabus, mapped  </a:t>
+            </a:r>
+            <a:pPr indent="0" marL="0">
+              <a:lnSpc>
+                <a:spcPct val="102000"/>
+              </a:lnSpc>
+              <a:buNone/>
+            </a:pPr>
+            <a:r>
+              <a:rPr lang="en-US" sz="1250" dirty="0">
+                <a:solidFill>
+                  <a:srgbClr val="B6C0CB"/>
+                </a:solidFill>
+                <a:latin typeface="Calibri" pitchFamily="34" charset="0"/>
+                <a:ea typeface="Calibri" pitchFamily="34" charset="-122"/>
+                <a:cs typeface="Calibri" pitchFamily="34" charset="-120"/>
+              </a:rPr>
+              <a:t>Every event as an interactive flow chart — flights, academics, sims, tests — graded per student.</a:t>
+            </a:r>
+            <a:endParaRPr lang="en-US" sz="1250" dirty="0"/>
+          </a:p>
+        </p:txBody>
+      </p:sp>
+      <p:sp>
+        <p:nvSpPr>
+          <p:cNvPr id="12" name="Shape 8"/>
+          <p:cNvSpPr/>
+          <p:nvPr/>
+        </p:nvSpPr>
+        <p:spPr>
+          <a:xfrm>
+            <a:off x="8138160" y="2798064"/>
+            <a:ext cx="146304" cy="146304"/>
+          </a:xfrm>
+          <a:prstGeom prst="ellipse">
+            <a:avLst/>
+          </a:prstGeom>
+          <a:solidFill>
+            <a:srgbClr val="3BC6E8"/>
+          </a:solidFill>
+          <a:ln/>
+        </p:spPr>
+      </p:sp>
+      <p:sp>
+        <p:nvSpPr>
+          <p:cNvPr id="13" name="Text 9"/>
+          <p:cNvSpPr/>
+          <p:nvPr/>
+        </p:nvSpPr>
+        <p:spPr>
+          <a:xfrm>
+            <a:off x="8412480" y="2697480"/>
+            <a:ext cx="3108960" cy="457200"/>
+          </a:xfrm>
+          <a:prstGeom prst="rect">
+            <a:avLst/>
+          </a:prstGeom>
+          <a:noFill/>
+          <a:ln/>
+        </p:spPr>
+        <p:txBody>
+          <a:bodyPr wrap="square" lIns="0" tIns="0" rIns="0" bIns="0" rtlCol="0" anchor="t"/>
+          <a:lstStyle/>
+          <a:p>
+            <a:pPr indent="0" marL="0">
+              <a:lnSpc>
+                <a:spcPct val="102000"/>
+              </a:lnSpc>
+              <a:buNone/>
+            </a:pPr>
+            <a:r>
+              <a:rPr lang="en-US" sz="1250" b="1" dirty="0">
+                <a:solidFill>
+                  <a:srgbClr val="F1F4F7"/>
+                </a:solidFill>
+                <a:latin typeface="Calibri" pitchFamily="34" charset="0"/>
+                <a:ea typeface="Calibri" pitchFamily="34" charset="-122"/>
+                <a:cs typeface="Calibri" pitchFamily="34" charset="-120"/>
+              </a:rPr>
+              <a:t>One click, all the stats  </a:t>
+            </a:r>
+            <a:pPr indent="0" marL="0">
+              <a:lnSpc>
+                <a:spcPct val="102000"/>
+              </a:lnSpc>
+              <a:buNone/>
+            </a:pPr>
+            <a:r>
+              <a:rPr lang="en-US" sz="1250" dirty="0">
+                <a:solidFill>
+                  <a:srgbClr val="B6C0CB"/>
+                </a:solidFill>
+                <a:latin typeface="Calibri" pitchFamily="34" charset="0"/>
+                <a:ea typeface="Calibri" pitchFamily="34" charset="-122"/>
+                <a:cs typeface="Calibri" pitchFamily="34" charset="-120"/>
+              </a:rPr>
+              <a:t>Progress by type, currency &amp; flex, what's plannable now, and a forecast of when they should finish.</a:t>
+            </a:r>
+            <a:endParaRPr lang="en-US" sz="1250" dirty="0"/>
+          </a:p>
+        </p:txBody>
+      </p:sp>
+      <p:sp>
+        <p:nvSpPr>
+          <p:cNvPr id="14" name="Shape 10"/>
+          <p:cNvSpPr/>
+          <p:nvPr/>
+        </p:nvSpPr>
+        <p:spPr>
+          <a:xfrm>
+            <a:off x="8138160" y="3666744"/>
+            <a:ext cx="146304" cy="146304"/>
+          </a:xfrm>
+          <a:prstGeom prst="ellipse">
+            <a:avLst/>
+          </a:prstGeom>
+          <a:solidFill>
+            <a:srgbClr val="E5A83B"/>
+          </a:solidFill>
+          <a:ln/>
+        </p:spPr>
+      </p:sp>
+      <p:sp>
+        <p:nvSpPr>
+          <p:cNvPr id="15" name="Text 11"/>
+          <p:cNvSpPr/>
+          <p:nvPr/>
+        </p:nvSpPr>
+        <p:spPr>
+          <a:xfrm>
+            <a:off x="8412480" y="3566160"/>
+            <a:ext cx="3108960" cy="457200"/>
+          </a:xfrm>
+          <a:prstGeom prst="rect">
+            <a:avLst/>
+          </a:prstGeom>
+          <a:noFill/>
+          <a:ln/>
+        </p:spPr>
+        <p:txBody>
+          <a:bodyPr wrap="square" lIns="0" tIns="0" rIns="0" bIns="0" rtlCol="0" anchor="t"/>
+          <a:lstStyle/>
+          <a:p>
+            <a:pPr indent="0" marL="0">
+              <a:lnSpc>
+                <a:spcPct val="102000"/>
+              </a:lnSpc>
+              <a:buNone/>
+            </a:pPr>
+            <a:r>
+              <a:rPr lang="en-US" sz="1250" b="1" dirty="0">
+                <a:solidFill>
+                  <a:srgbClr val="F1F4F7"/>
+                </a:solidFill>
+                <a:latin typeface="Calibri" pitchFamily="34" charset="0"/>
+                <a:ea typeface="Calibri" pitchFamily="34" charset="-122"/>
+                <a:cs typeface="Calibri" pitchFamily="34" charset="-120"/>
+              </a:rPr>
+              <a:t>Crew pairing from the syllabus  </a:t>
+            </a:r>
+            <a:pPr indent="0" marL="0">
+              <a:lnSpc>
+                <a:spcPct val="102000"/>
+              </a:lnSpc>
+              <a:buNone/>
+            </a:pPr>
+            <a:r>
+              <a:rPr lang="en-US" sz="1250" dirty="0">
+                <a:solidFill>
+                  <a:srgbClr val="B6C0CB"/>
+                </a:solidFill>
+                <a:latin typeface="Calibri" pitchFamily="34" charset="0"/>
+                <a:ea typeface="Calibri" pitchFamily="34" charset="-122"/>
+                <a:cs typeface="Calibri" pitchFamily="34" charset="-120"/>
+              </a:rPr>
+              <a:t>It knows when a student needs an IP and when a pairing is allowed — the same rules the schedule flags.</a:t>
+            </a:r>
+            <a:endParaRPr lang="en-US" sz="1250" dirty="0"/>
+          </a:p>
+        </p:txBody>
+      </p:sp>
+      <p:sp>
+        <p:nvSpPr>
+          <p:cNvPr id="16" name="Shape 12"/>
+          <p:cNvSpPr/>
+          <p:nvPr/>
+        </p:nvSpPr>
+        <p:spPr>
+          <a:xfrm>
+            <a:off x="8138160" y="4535424"/>
+            <a:ext cx="146304" cy="146304"/>
+          </a:xfrm>
+          <a:prstGeom prst="ellipse">
+            <a:avLst/>
+          </a:prstGeom>
+          <a:solidFill>
+            <a:srgbClr val="3BD07A"/>
+          </a:solidFill>
+          <a:ln/>
+        </p:spPr>
+      </p:sp>
+      <p:sp>
+        <p:nvSpPr>
+          <p:cNvPr id="17" name="Text 13"/>
+          <p:cNvSpPr/>
+          <p:nvPr/>
+        </p:nvSpPr>
+        <p:spPr>
+          <a:xfrm>
+            <a:off x="8412480" y="4434840"/>
+            <a:ext cx="3108960" cy="457200"/>
+          </a:xfrm>
+          <a:prstGeom prst="rect">
+            <a:avLst/>
+          </a:prstGeom>
+          <a:noFill/>
+          <a:ln/>
+        </p:spPr>
+        <p:txBody>
+          <a:bodyPr wrap="square" lIns="0" tIns="0" rIns="0" bIns="0" rtlCol="0" anchor="t"/>
+          <a:lstStyle/>
+          <a:p>
+            <a:pPr indent="0" marL="0">
+              <a:lnSpc>
+                <a:spcPct val="102000"/>
+              </a:lnSpc>
+              <a:buNone/>
+            </a:pPr>
+            <a:r>
+              <a:rPr lang="en-US" sz="1250" b="1" dirty="0">
+                <a:solidFill>
+                  <a:srgbClr val="F1F4F7"/>
+                </a:solidFill>
+                <a:latin typeface="Calibri" pitchFamily="34" charset="0"/>
+                <a:ea typeface="Calibri" pitchFamily="34" charset="-122"/>
+                <a:cs typeface="Calibri" pitchFamily="34" charset="-120"/>
+              </a:rPr>
+              <a:t>Then just plan them  </a:t>
+            </a:r>
+            <a:pPr indent="0" marL="0">
+              <a:lnSpc>
+                <a:spcPct val="102000"/>
+              </a:lnSpc>
+              <a:buNone/>
+            </a:pPr>
+            <a:r>
+              <a:rPr lang="en-US" sz="1250" dirty="0">
+                <a:solidFill>
+                  <a:srgbClr val="B6C0CB"/>
+                </a:solidFill>
+                <a:latin typeface="Calibri" pitchFamily="34" charset="0"/>
+                <a:ea typeface="Calibri" pitchFamily="34" charset="-122"/>
+                <a:cs typeface="Calibri" pitchFamily="34" charset="-120"/>
+              </a:rPr>
+              <a:t>“Plannable now” says exactly which events are next — the scheduler plans straight off it.</a:t>
+            </a:r>
+            <a:endParaRPr lang="en-US" sz="1250" dirty="0"/>
+          </a:p>
+        </p:txBody>
+      </p:sp>
+      <p:sp>
+        <p:nvSpPr>
+          <p:cNvPr id="18" name="Shape 14"/>
+          <p:cNvSpPr/>
+          <p:nvPr/>
+        </p:nvSpPr>
+        <p:spPr>
+          <a:xfrm>
+            <a:off x="8138160" y="5349240"/>
+            <a:ext cx="3383280" cy="960120"/>
+          </a:xfrm>
+          <a:prstGeom prst="roundRect">
+            <a:avLst>
+              <a:gd name="adj" fmla="val 9524"/>
+            </a:avLst>
+          </a:prstGeom>
+          <a:solidFill>
+            <a:srgbClr val="1A1F26"/>
+          </a:solidFill>
+          <a:ln w="12700">
+            <a:solidFill>
+              <a:srgbClr val="8A8F3C"/>
+            </a:solidFill>
+            <a:prstDash val="solid"/>
+          </a:ln>
+        </p:spPr>
+      </p:sp>
+      <p:sp>
+        <p:nvSpPr>
+          <p:cNvPr id="19" name="Text 15"/>
+          <p:cNvSpPr/>
+          <p:nvPr/>
+        </p:nvSpPr>
+        <p:spPr>
+          <a:xfrm>
+            <a:off x="8339328" y="5440680"/>
+            <a:ext cx="2980944" cy="777240"/>
+          </a:xfrm>
+          <a:prstGeom prst="rect">
+            <a:avLst/>
+          </a:prstGeom>
+          <a:noFill/>
+          <a:ln/>
+        </p:spPr>
+        <p:txBody>
+          <a:bodyPr wrap="square" lIns="0" tIns="0" rIns="0" bIns="0" rtlCol="0" anchor="ctr"/>
+          <a:lstStyle/>
+          <a:p>
+            <a:pPr indent="0" marL="0">
+              <a:buNone/>
+            </a:pPr>
+            <a:r>
+              <a:rPr lang="en-US" sz="1150" b="1" dirty="0">
+                <a:solidFill>
+                  <a:srgbClr val="F1F4F7"/>
+                </a:solidFill>
+                <a:latin typeface="Calibri" pitchFamily="34" charset="0"/>
+                <a:ea typeface="Calibri" pitchFamily="34" charset="-122"/>
+                <a:cs typeface="Calibri" pitchFamily="34" charset="-120"/>
+              </a:rPr>
+              <a:t>The last time the flow chart lives on paper.  </a:t>
+            </a:r>
+            <a:pPr indent="0" marL="0">
+              <a:buNone/>
+            </a:pPr>
+            <a:r>
+              <a:rPr lang="en-US" sz="1150" dirty="0">
+                <a:solidFill>
+                  <a:srgbClr val="B6C0CB"/>
+                </a:solidFill>
+                <a:latin typeface="Calibri" pitchFamily="34" charset="0"/>
+                <a:ea typeface="Calibri" pitchFamily="34" charset="-122"/>
+                <a:cs typeface="Calibri" pitchFamily="34" charset="-120"/>
+              </a:rPr>
+              <a:t>Folded into RAPTOR: one stop shop.</a:t>
+            </a:r>
+            <a:endParaRPr lang="en-US" sz="1150" dirty="0"/>
+          </a:p>
+        </p:txBody>
+      </p:sp>
+    </p:spTree>
+  </p:cSld>
+  <p:clrMapOvr>
+    <a:masterClrMapping/>
+  </p:clrMapOvr>
+</p:sld>
+</file>
+
+<file path=ppt/slides/slide9.xml><?xml version="1.0" encoding="utf-8"?>
+<p:sld xmlns:a="http://schemas.openxmlformats.org/drawingml/2006/main" xmlns:r="http://schemas.openxmlformats.org/officeDocument/2006/relationships" xmlns:p="http://schemas.openxmlformats.org/presentationml/2006/main">
+  <p:cSld name="Slide 9">
+    <p:bg>
+      <p:bgPr>
+        <a:solidFill>
+          <a:srgbClr val="0B0D10"/>
+        </a:solidFill>
+      </p:bgPr>
+    </p:bg>
+    <p:spTree>
+      <p:nvGrpSpPr>
+        <p:cNvPr id="1" name=""/>
+        <p:cNvGrpSpPr/>
+        <p:nvPr/>
+      </p:nvGrpSpPr>
+      <p:grpSpPr>
+        <a:xfrm>
+          <a:off x="0" y="0"/>
+          <a:ext cx="0" cy="0"/>
+          <a:chOff x="0" y="0"/>
+          <a:chExt cx="0" cy="0"/>
+        </a:xfrm>
+      </p:grpSpPr>
+      <p:pic>
+        <p:nvPicPr>
+          <p:cNvPr id="2" name="Image 0" descr="preencoded.png">    </p:cNvPr>
+          <p:cNvPicPr>
+            <a:picLocks noChangeAspect="1"/>
+          </p:cNvPicPr>
+          <p:nvPr/>
+        </p:nvPicPr>
+        <p:blipFill>
+          <a:blip r:embed="rId1">
+            <a:alphaModFix amt="65000"/>
+          </a:blip>
+          <a:stretch>
+            <a:fillRect/>
+          </a:stretch>
+        </p:blipFill>
+        <p:spPr>
+          <a:xfrm>
+            <a:off x="11137392" y="384048"/>
+            <a:ext cx="548640" cy="548640"/>
+          </a:xfrm>
+          <a:prstGeom prst="rect">
+            <a:avLst/>
+          </a:prstGeom>
+        </p:spPr>
+      </p:pic>
+      <p:pic>
+        <p:nvPicPr>
+          <p:cNvPr id="3" name="Image 1" descr="preencoded.png">    </p:cNvPr>
+          <p:cNvPicPr>
+            <a:picLocks noChangeAspect="1"/>
+          </p:cNvPicPr>
+          <p:nvPr/>
+        </p:nvPicPr>
+        <p:blipFill>
+          <a:blip r:embed="rId2">
+            <a:alphaModFix amt="80000"/>
+          </a:blip>
+          <a:stretch>
+            <a:fillRect/>
+          </a:stretch>
+        </p:blipFill>
+        <p:spPr>
+          <a:xfrm>
+            <a:off x="640080" y="6291072"/>
+            <a:ext cx="219456" cy="219456"/>
+          </a:xfrm>
+          <a:prstGeom prst="rect">
+            <a:avLst/>
+          </a:prstGeom>
+        </p:spPr>
+      </p:pic>
+      <p:sp>
+        <p:nvSpPr>
+          <p:cNvPr id="4" name="Text 0"/>
+          <p:cNvSpPr/>
+          <p:nvPr/>
+        </p:nvSpPr>
+        <p:spPr>
+          <a:xfrm>
+            <a:off x="914400" y="6309360"/>
+            <a:ext cx="2743200" cy="219456"/>
+          </a:xfrm>
+          <a:prstGeom prst="rect">
+            <a:avLst/>
+          </a:prstGeom>
+          <a:noFill/>
+          <a:ln/>
+        </p:spPr>
+        <p:txBody>
+          <a:bodyPr wrap="square" lIns="0" tIns="0" rIns="0" bIns="0" rtlCol="0" anchor="ctr"/>
+          <a:lstStyle/>
+          <a:p>
+            <a:pPr indent="0" marL="0">
+              <a:buNone/>
+            </a:pPr>
+            <a:r>
+              <a:rPr lang="en-US" sz="900" b="1" spc="200" kern="0" dirty="0">
+                <a:solidFill>
+                  <a:srgbClr val="8A96A3"/>
                 </a:solidFill>
                 <a:latin typeface="Arial" pitchFamily="34" charset="0"/>
                 <a:ea typeface="Arial" pitchFamily="34" charset="-122"/>
                 <a:cs typeface="Arial" pitchFamily="34" charset="-120"/>
               </a:rPr>
-              <a:t>One squadron.
-</a:t>
-            </a:r>
-            <a:pPr indent="0" marL="0">
-              <a:lnSpc>
-                <a:spcPct val="102000"/>
-              </a:lnSpc>
-              <a:buNone/>
-            </a:pPr>
-            <a:r>
-              <a:rPr lang="en-US" sz="5000" b="1" dirty="0">
-                <a:solidFill>
-                  <a:srgbClr val="3BC6E8"/>
+              <a:t>RAPTOR</a:t>
+            </a:r>
+            <a:endParaRPr lang="en-US" sz="900" dirty="0"/>
+          </a:p>
+        </p:txBody>
+      </p:sp>
+      <p:sp>
+        <p:nvSpPr>
+          <p:cNvPr id="5" name="Text 1"/>
+          <p:cNvSpPr/>
+          <p:nvPr/>
+        </p:nvSpPr>
+        <p:spPr>
+          <a:xfrm>
+            <a:off x="11228832" y="6309360"/>
+            <a:ext cx="457200" cy="219456"/>
+          </a:xfrm>
+          <a:prstGeom prst="rect">
+            <a:avLst/>
+          </a:prstGeom>
+          <a:noFill/>
+          <a:ln/>
+        </p:spPr>
+        <p:txBody>
+          <a:bodyPr wrap="square" lIns="0" tIns="0" rIns="0" bIns="0" rtlCol="0" anchor="ctr"/>
+          <a:lstStyle/>
+          <a:p>
+            <a:pPr algn="r" indent="0" marL="0">
+              <a:buNone/>
+            </a:pPr>
+            <a:r>
+              <a:rPr lang="en-US" sz="900" dirty="0">
+                <a:solidFill>
+                  <a:srgbClr val="8A96A3"/>
                 </a:solidFill>
                 <a:latin typeface="Arial" pitchFamily="34" charset="0"/>
                 <a:ea typeface="Arial" pitchFamily="34" charset="-122"/>
                 <a:cs typeface="Arial" pitchFamily="34" charset="-120"/>
               </a:rPr>
-              <a:t>One source of truth.</a:t>
-            </a:r>
-            <a:endParaRPr lang="en-US" sz="5000" dirty="0"/>
-          </a:p>
-        </p:txBody>
-      </p:sp>
-      <p:sp>
-        <p:nvSpPr>
-          <p:cNvPr id="9" name="Text 6"/>
-          <p:cNvSpPr/>
-          <p:nvPr/>
-        </p:nvSpPr>
-        <p:spPr>
-          <a:xfrm>
-            <a:off x="685800" y="4297680"/>
-            <a:ext cx="7498080" cy="822960"/>
+              <a:t>09</a:t>
+            </a:r>
+            <a:endParaRPr lang="en-US" sz="900" dirty="0"/>
+          </a:p>
+        </p:txBody>
+      </p:sp>
+      <p:sp>
+        <p:nvSpPr>
+          <p:cNvPr id="6" name="Text 2"/>
+          <p:cNvSpPr/>
+          <p:nvPr/>
+        </p:nvSpPr>
+        <p:spPr>
+          <a:xfrm>
+            <a:off x="640080" y="512064"/>
+            <a:ext cx="9144000" cy="274320"/>
           </a:xfrm>
           <a:prstGeom prst="rect">
             <a:avLst/>
@@ -7863,7 +9769,85 @@
               <a:buNone/>
             </a:pPr>
             <a:r>
-              <a:rPr lang="en-US" sz="1600" dirty="0">
+              <a:rPr lang="en-US" sz="1200" b="1" spc="300" kern="0" dirty="0">
+                <a:solidFill>
+                  <a:srgbClr val="3BC6E8"/>
+                </a:solidFill>
+                <a:latin typeface="Arial" pitchFamily="34" charset="0"/>
+                <a:ea typeface="Arial" pitchFamily="34" charset="-122"/>
+                <a:cs typeface="Arial" pitchFamily="34" charset="-120"/>
+              </a:rPr>
+              <a:t>BUILT FOR THE WAY THE SQUADRON WORKS</a:t>
+            </a:r>
+            <a:endParaRPr lang="en-US" sz="1200" dirty="0"/>
+          </a:p>
+        </p:txBody>
+      </p:sp>
+      <p:sp>
+        <p:nvSpPr>
+          <p:cNvPr id="7" name="Text 3"/>
+          <p:cNvSpPr/>
+          <p:nvPr/>
+        </p:nvSpPr>
+        <p:spPr>
+          <a:xfrm>
+            <a:off x="640080" y="822960"/>
+            <a:ext cx="10607040" cy="822960"/>
+          </a:xfrm>
+          <a:prstGeom prst="rect">
+            <a:avLst/>
+          </a:prstGeom>
+          <a:noFill/>
+          <a:ln/>
+        </p:spPr>
+        <p:txBody>
+          <a:bodyPr wrap="square" lIns="0" tIns="0" rIns="0" bIns="0" rtlCol="0" anchor="ctr"/>
+          <a:lstStyle/>
+          <a:p>
+            <a:pPr indent="0" marL="0">
+              <a:buNone/>
+            </a:pPr>
+            <a:r>
+              <a:rPr lang="en-US" sz="3300" b="1" dirty="0">
+                <a:solidFill>
+                  <a:srgbClr val="F1F4F7"/>
+                </a:solidFill>
+                <a:latin typeface="Arial" pitchFamily="34" charset="0"/>
+                <a:ea typeface="Arial" pitchFamily="34" charset="-122"/>
+                <a:cs typeface="Arial" pitchFamily="34" charset="-120"/>
+              </a:rPr>
+              <a:t>Full-power at the desk, thumb-friendly on a phone</a:t>
+            </a:r>
+            <a:endParaRPr lang="en-US" sz="3300" dirty="0"/>
+          </a:p>
+        </p:txBody>
+      </p:sp>
+      <p:sp>
+        <p:nvSpPr>
+          <p:cNvPr id="8" name="Text 4"/>
+          <p:cNvSpPr/>
+          <p:nvPr/>
+        </p:nvSpPr>
+        <p:spPr>
+          <a:xfrm>
+            <a:off x="640080" y="1572768"/>
+            <a:ext cx="10881360" cy="365760"/>
+          </a:xfrm>
+          <a:prstGeom prst="rect">
+            <a:avLst/>
+          </a:prstGeom>
+          <a:noFill/>
+          <a:ln/>
+        </p:spPr>
+        <p:txBody>
+          <a:bodyPr wrap="square" lIns="0" tIns="0" rIns="0" bIns="0" rtlCol="0" anchor="ctr"/>
+          <a:lstStyle/>
+          <a:p>
+            <a:pPr indent="0" marL="0">
+              <a:buNone/>
+            </a:pPr>
+            <a:r>
+              <a:rPr lang="en-US" sz="1400" dirty="0">
                 <a:solidFill>
                   <a:srgbClr val="B6C0CB"/>
                 </a:solidFill>
@@ -7871,32 +9855,61 @@
                 <a:ea typeface="Calibri" pitchFamily="34" charset="-122"/>
                 <a:cs typeface="Calibri" pitchFamily="34" charset="-120"/>
               </a:rPr>
-              <a:t>The programme, the crew, the rules and the manpower — planned, checked and synced in one place. A wingman that catches the mistake before it flies.</a:t>
-            </a:r>
-            <a:endParaRPr lang="en-US" sz="1600" dirty="0"/>
-          </a:p>
-        </p:txBody>
-      </p:sp>
-      <p:sp>
-        <p:nvSpPr>
-          <p:cNvPr id="10" name="Shape 7"/>
-          <p:cNvSpPr/>
-          <p:nvPr/>
-        </p:nvSpPr>
-        <p:spPr>
-          <a:xfrm>
-            <a:off x="685800" y="5349240"/>
-            <a:ext cx="3200400" cy="868680"/>
+              <a:t>The same tool, designed for both screens — spacious and readable on a phone, and using the whole width on a desktop.</a:t>
+            </a:r>
+            <a:endParaRPr lang="en-US" sz="1400" dirty="0"/>
+          </a:p>
+        </p:txBody>
+      </p:sp>
+      <p:sp>
+        <p:nvSpPr>
+          <p:cNvPr id="9" name="Shape 5"/>
+          <p:cNvSpPr/>
+          <p:nvPr/>
+        </p:nvSpPr>
+        <p:spPr>
+          <a:xfrm>
+            <a:off x="932688" y="2121408"/>
+            <a:ext cx="2340864" cy="4261104"/>
           </a:xfrm>
           <a:prstGeom prst="roundRect">
             <a:avLst>
-              <a:gd name="adj" fmla="val 10526"/>
+              <a:gd name="adj" fmla="val 3906"/>
             </a:avLst>
           </a:prstGeom>
           <a:solidFill>
-            <a:srgbClr val="14181D"/>
+            <a:srgbClr val="000000"/>
           </a:solidFill>
-          <a:ln w="19050">
+          <a:ln/>
+          <a:effectLst>
+            <a:outerShdw sx="100000" sy="100000" kx="0" ky="0" algn="bl" rotWithShape="0" blurRad="177800" dist="63500" dir="5400000">
+              <a:srgbClr val="000000">
+                <a:alpha val="55000"/>
+              </a:srgbClr>
+            </a:outerShdw>
+          </a:effectLst>
+        </p:spPr>
+      </p:sp>
+      <p:sp>
+        <p:nvSpPr>
+          <p:cNvPr id="10" name="Shape 6"/>
+          <p:cNvSpPr/>
+          <p:nvPr/>
+        </p:nvSpPr>
+        <p:spPr>
+          <a:xfrm>
+            <a:off x="960120" y="2148840"/>
+            <a:ext cx="2286000" cy="4206240"/>
+          </a:xfrm>
+          <a:prstGeom prst="roundRect">
+            <a:avLst>
+              <a:gd name="adj" fmla="val 3600"/>
+            </a:avLst>
+          </a:prstGeom>
+          <a:solidFill>
+            <a:srgbClr val="0E1116"/>
+          </a:solidFill>
+          <a:ln w="12700">
             <a:solidFill>
               <a:srgbClr val="3BC6E8"/>
             </a:solidFill>
@@ -7904,16 +9917,40 @@
           </a:ln>
         </p:spPr>
       </p:sp>
-      <p:sp>
-        <p:nvSpPr>
-          <p:cNvPr id="11" name="Text 8"/>
-          <p:cNvSpPr/>
-          <p:nvPr/>
-        </p:nvSpPr>
-        <p:spPr>
-          <a:xfrm>
-            <a:off x="914400" y="5468112"/>
-            <a:ext cx="2743200" cy="320040"/>
+      <p:pic>
+        <p:nvPicPr>
+          <p:cNvPr id="11" name="Image 2" descr="preencoded.png">    </p:cNvPr>
+          <p:cNvPicPr>
+            <a:picLocks noChangeAspect="1"/>
+          </p:cNvPicPr>
+          <p:nvPr/>
+        </p:nvPicPr>
+        <p:blipFill>
+          <a:blip r:embed="rId3"/>
+          <a:stretch>
+            <a:fillRect/>
+          </a:stretch>
+        </p:blipFill>
+        <p:spPr>
+          <a:xfrm>
+            <a:off x="1148635" y="2185416"/>
+            <a:ext cx="1908970" cy="4133088"/>
+          </a:xfrm>
+          <a:prstGeom prst="rect">
+            <a:avLst/>
+          </a:prstGeom>
+        </p:spPr>
+      </p:pic>
+      <p:sp>
+        <p:nvSpPr>
+          <p:cNvPr id="12" name="Text 7"/>
+          <p:cNvSpPr/>
+          <p:nvPr/>
+        </p:nvSpPr>
+        <p:spPr>
+          <a:xfrm>
+            <a:off x="960120" y="6382512"/>
+            <a:ext cx="2286000" cy="237744"/>
           </a:xfrm>
           <a:prstGeom prst="rect">
             <a:avLst/>
@@ -7925,34 +9962,114 @@
           <a:bodyPr wrap="square" lIns="0" tIns="0" rIns="0" bIns="0" rtlCol="0" anchor="ctr"/>
           <a:lstStyle/>
           <a:p>
-            <a:pPr indent="0" marL="0">
-              <a:buNone/>
-            </a:pPr>
-            <a:r>
-              <a:rPr lang="en-US" sz="1600" b="1" dirty="0">
-                <a:solidFill>
-                  <a:srgbClr val="F1F4F7"/>
+            <a:pPr algn="ctr" indent="0" marL="0">
+              <a:buNone/>
+            </a:pPr>
+            <a:r>
+              <a:rPr lang="en-US" sz="1000" b="1" spc="300" kern="0" dirty="0">
+                <a:solidFill>
+                  <a:srgbClr val="8A96A3"/>
                 </a:solidFill>
                 <a:latin typeface="Arial" pitchFamily="34" charset="0"/>
                 <a:ea typeface="Arial" pitchFamily="34" charset="-122"/>
                 <a:cs typeface="Arial" pitchFamily="34" charset="-120"/>
               </a:rPr>
-              <a:t>142 SQN</a:t>
-            </a:r>
-            <a:endParaRPr lang="en-US" sz="1600" dirty="0"/>
-          </a:p>
-        </p:txBody>
-      </p:sp>
-      <p:sp>
-        <p:nvSpPr>
-          <p:cNvPr id="12" name="Text 9"/>
-          <p:cNvSpPr/>
-          <p:nvPr/>
-        </p:nvSpPr>
-        <p:spPr>
-          <a:xfrm>
-            <a:off x="914400" y="5797296"/>
-            <a:ext cx="2834640" cy="320040"/>
+              <a:t>PHONE</a:t>
+            </a:r>
+            <a:endParaRPr lang="en-US" sz="1000" dirty="0"/>
+          </a:p>
+        </p:txBody>
+      </p:sp>
+      <p:sp>
+        <p:nvSpPr>
+          <p:cNvPr id="13" name="Shape 8"/>
+          <p:cNvSpPr/>
+          <p:nvPr/>
+        </p:nvSpPr>
+        <p:spPr>
+          <a:xfrm>
+            <a:off x="3813048" y="2304288"/>
+            <a:ext cx="7735824" cy="3968496"/>
+          </a:xfrm>
+          <a:prstGeom prst="roundRect">
+            <a:avLst>
+              <a:gd name="adj" fmla="val 2304"/>
+            </a:avLst>
+          </a:prstGeom>
+          <a:solidFill>
+            <a:srgbClr val="000000"/>
+          </a:solidFill>
+          <a:ln/>
+          <a:effectLst>
+            <a:outerShdw sx="100000" sy="100000" kx="0" ky="0" algn="bl" rotWithShape="0" blurRad="177800" dist="63500" dir="5400000">
+              <a:srgbClr val="000000">
+                <a:alpha val="55000"/>
+              </a:srgbClr>
+            </a:outerShdw>
+          </a:effectLst>
+        </p:spPr>
+      </p:sp>
+      <p:sp>
+        <p:nvSpPr>
+          <p:cNvPr id="14" name="Shape 9"/>
+          <p:cNvSpPr/>
+          <p:nvPr/>
+        </p:nvSpPr>
+        <p:spPr>
+          <a:xfrm>
+            <a:off x="3840480" y="2331720"/>
+            <a:ext cx="7680960" cy="3913632"/>
+          </a:xfrm>
+          <a:prstGeom prst="roundRect">
+            <a:avLst>
+              <a:gd name="adj" fmla="val 2103"/>
+            </a:avLst>
+          </a:prstGeom>
+          <a:solidFill>
+            <a:srgbClr val="0E1116"/>
+          </a:solidFill>
+          <a:ln w="12700">
+            <a:solidFill>
+              <a:srgbClr val="3BC6E8"/>
+            </a:solidFill>
+            <a:prstDash val="solid"/>
+          </a:ln>
+        </p:spPr>
+      </p:sp>
+      <p:pic>
+        <p:nvPicPr>
+          <p:cNvPr id="15" name="Image 3" descr="preencoded.png">    </p:cNvPr>
+          <p:cNvPicPr>
+            <a:picLocks noChangeAspect="1"/>
+          </p:cNvPicPr>
+          <p:nvPr/>
+        </p:nvPicPr>
+        <p:blipFill>
+          <a:blip r:embed="rId4"/>
+          <a:stretch>
+            <a:fillRect/>
+          </a:stretch>
+        </p:blipFill>
+        <p:spPr>
+          <a:xfrm>
+            <a:off x="4677046" y="2386584"/>
+            <a:ext cx="6007828" cy="3803904"/>
+          </a:xfrm>
+          <a:prstGeom prst="rect">
+            <a:avLst/>
+          </a:prstGeom>
+        </p:spPr>
+      </p:pic>
+      <p:sp>
+        <p:nvSpPr>
+          <p:cNvPr id="16" name="Text 10"/>
+          <p:cNvSpPr/>
+          <p:nvPr/>
+        </p:nvSpPr>
+        <p:spPr>
+          <a:xfrm>
+            <a:off x="3840480" y="6309360"/>
+            <a:ext cx="7680960" cy="237744"/>
           </a:xfrm>
           <a:prstGeom prst="rect">
             <a:avLst/>
@@ -7964,50 +10081,11 @@
           <a:bodyPr wrap="square" lIns="0" tIns="0" rIns="0" bIns="0" rtlCol="0" anchor="ctr"/>
           <a:lstStyle/>
           <a:p>
-            <a:pPr indent="0" marL="0">
-              <a:buNone/>
-            </a:pPr>
-            <a:r>
-              <a:rPr lang="en-US" sz="1100" dirty="0">
-                <a:solidFill>
-                  <a:srgbClr val="8A96A3"/>
-                </a:solidFill>
-                <a:latin typeface="Calibri" pitchFamily="34" charset="0"/>
-                <a:ea typeface="Calibri" pitchFamily="34" charset="-122"/>
-                <a:cs typeface="Calibri" pitchFamily="34" charset="-120"/>
-              </a:rPr>
-              <a:t>now → 3 months, with RAID office</a:t>
-            </a:r>
-            <a:endParaRPr lang="en-US" sz="1100" dirty="0"/>
-          </a:p>
-        </p:txBody>
-      </p:sp>
-      <p:sp>
-        <p:nvSpPr>
-          <p:cNvPr id="13" name="Text 10"/>
-          <p:cNvSpPr/>
-          <p:nvPr/>
-        </p:nvSpPr>
-        <p:spPr>
-          <a:xfrm>
-            <a:off x="3886200" y="5349240"/>
-            <a:ext cx="548640" cy="868680"/>
-          </a:xfrm>
-          <a:prstGeom prst="rect">
-            <a:avLst/>
-          </a:prstGeom>
-          <a:noFill/>
-          <a:ln/>
-        </p:spPr>
-        <p:txBody>
-          <a:bodyPr wrap="square" lIns="0" tIns="0" rIns="0" bIns="0" rtlCol="0" anchor="ctr"/>
-          <a:lstStyle/>
-          <a:p>
             <a:pPr algn="ctr" indent="0" marL="0">
               <a:buNone/>
             </a:pPr>
             <a:r>
-              <a:rPr lang="en-US" sz="2000" b="1" dirty="0">
+              <a:rPr lang="en-US" sz="1000" b="1" spc="300" kern="0" dirty="0">
                 <a:solidFill>
                   <a:srgbClr val="8A96A3"/>
                 </a:solidFill>
@@ -8015,258 +10093,9 @@
                 <a:ea typeface="Arial" pitchFamily="34" charset="-122"/>
                 <a:cs typeface="Arial" pitchFamily="34" charset="-120"/>
               </a:rPr>
-              <a:t>→</a:t>
-            </a:r>
-            <a:endParaRPr lang="en-US" sz="2000" dirty="0"/>
-          </a:p>
-        </p:txBody>
-      </p:sp>
-      <p:sp>
-        <p:nvSpPr>
-          <p:cNvPr id="14" name="Shape 11"/>
-          <p:cNvSpPr/>
-          <p:nvPr/>
-        </p:nvSpPr>
-        <p:spPr>
-          <a:xfrm>
-            <a:off x="4434840" y="5349240"/>
-            <a:ext cx="3200400" cy="868680"/>
-          </a:xfrm>
-          <a:prstGeom prst="roundRect">
-            <a:avLst>
-              <a:gd name="adj" fmla="val 10526"/>
-            </a:avLst>
-          </a:prstGeom>
-          <a:solidFill>
-            <a:srgbClr val="14181D"/>
-          </a:solidFill>
-          <a:ln w="12700">
-            <a:solidFill>
-              <a:srgbClr val="2A313A"/>
-            </a:solidFill>
-            <a:prstDash val="solid"/>
-          </a:ln>
-        </p:spPr>
-      </p:sp>
-      <p:sp>
-        <p:nvSpPr>
-          <p:cNvPr id="15" name="Text 12"/>
-          <p:cNvSpPr/>
-          <p:nvPr/>
-        </p:nvSpPr>
-        <p:spPr>
-          <a:xfrm>
-            <a:off x="4663440" y="5468112"/>
-            <a:ext cx="2743200" cy="320040"/>
-          </a:xfrm>
-          <a:prstGeom prst="rect">
-            <a:avLst/>
-          </a:prstGeom>
-          <a:noFill/>
-          <a:ln/>
-        </p:spPr>
-        <p:txBody>
-          <a:bodyPr wrap="square" lIns="0" tIns="0" rIns="0" bIns="0" rtlCol="0" anchor="ctr"/>
-          <a:lstStyle/>
-          <a:p>
-            <a:pPr indent="0" marL="0">
-              <a:buNone/>
-            </a:pPr>
-            <a:r>
-              <a:rPr lang="en-US" sz="1600" b="1" dirty="0">
-                <a:solidFill>
-                  <a:srgbClr val="B6C0CB"/>
-                </a:solidFill>
-                <a:latin typeface="Arial" pitchFamily="34" charset="0"/>
-                <a:ea typeface="Arial" pitchFamily="34" charset="-122"/>
-                <a:cs typeface="Arial" pitchFamily="34" charset="-120"/>
-              </a:rPr>
-              <a:t>149 SQN</a:t>
-            </a:r>
-            <a:endParaRPr lang="en-US" sz="1600" dirty="0"/>
-          </a:p>
-        </p:txBody>
-      </p:sp>
-      <p:sp>
-        <p:nvSpPr>
-          <p:cNvPr id="16" name="Text 13"/>
-          <p:cNvSpPr/>
-          <p:nvPr/>
-        </p:nvSpPr>
-        <p:spPr>
-          <a:xfrm>
-            <a:off x="4663440" y="5797296"/>
-            <a:ext cx="2834640" cy="320040"/>
-          </a:xfrm>
-          <a:prstGeom prst="rect">
-            <a:avLst/>
-          </a:prstGeom>
-          <a:noFill/>
-          <a:ln/>
-        </p:spPr>
-        <p:txBody>
-          <a:bodyPr wrap="square" lIns="0" tIns="0" rIns="0" bIns="0" rtlCol="0" anchor="ctr"/>
-          <a:lstStyle/>
-          <a:p>
-            <a:pPr indent="0" marL="0">
-              <a:buNone/>
-            </a:pPr>
-            <a:r>
-              <a:rPr lang="en-US" sz="1100" dirty="0">
-                <a:solidFill>
-                  <a:srgbClr val="8A96A3"/>
-                </a:solidFill>
-                <a:latin typeface="Calibri" pitchFamily="34" charset="0"/>
-                <a:ea typeface="Calibri" pitchFamily="34" charset="-122"/>
-                <a:cs typeface="Calibri" pitchFamily="34" charset="-120"/>
-              </a:rPr>
-              <a:t>once proven</a:t>
-            </a:r>
-            <a:endParaRPr lang="en-US" sz="1100" dirty="0"/>
-          </a:p>
-        </p:txBody>
-      </p:sp>
-      <p:sp>
-        <p:nvSpPr>
-          <p:cNvPr id="17" name="Text 14"/>
-          <p:cNvSpPr/>
-          <p:nvPr/>
-        </p:nvSpPr>
-        <p:spPr>
-          <a:xfrm>
-            <a:off x="7635240" y="5349240"/>
-            <a:ext cx="548640" cy="868680"/>
-          </a:xfrm>
-          <a:prstGeom prst="rect">
-            <a:avLst/>
-          </a:prstGeom>
-          <a:noFill/>
-          <a:ln/>
-        </p:spPr>
-        <p:txBody>
-          <a:bodyPr wrap="square" lIns="0" tIns="0" rIns="0" bIns="0" rtlCol="0" anchor="ctr"/>
-          <a:lstStyle/>
-          <a:p>
-            <a:pPr algn="ctr" indent="0" marL="0">
-              <a:buNone/>
-            </a:pPr>
-            <a:r>
-              <a:rPr lang="en-US" sz="2000" b="1" dirty="0">
-                <a:solidFill>
-                  <a:srgbClr val="8A96A3"/>
-                </a:solidFill>
-                <a:latin typeface="Arial" pitchFamily="34" charset="0"/>
-                <a:ea typeface="Arial" pitchFamily="34" charset="-122"/>
-                <a:cs typeface="Arial" pitchFamily="34" charset="-120"/>
-              </a:rPr>
-              <a:t>→</a:t>
-            </a:r>
-            <a:endParaRPr lang="en-US" sz="2000" dirty="0"/>
-          </a:p>
-        </p:txBody>
-      </p:sp>
-      <p:sp>
-        <p:nvSpPr>
-          <p:cNvPr id="18" name="Shape 15"/>
-          <p:cNvSpPr/>
-          <p:nvPr/>
-        </p:nvSpPr>
-        <p:spPr>
-          <a:xfrm>
-            <a:off x="8183880" y="5349240"/>
-            <a:ext cx="3200400" cy="868680"/>
-          </a:xfrm>
-          <a:prstGeom prst="roundRect">
-            <a:avLst>
-              <a:gd name="adj" fmla="val 10526"/>
-            </a:avLst>
-          </a:prstGeom>
-          <a:solidFill>
-            <a:srgbClr val="14181D"/>
-          </a:solidFill>
-          <a:ln w="12700">
-            <a:solidFill>
-              <a:srgbClr val="2A313A"/>
-            </a:solidFill>
-            <a:prstDash val="solid"/>
-          </a:ln>
-        </p:spPr>
-      </p:sp>
-      <p:sp>
-        <p:nvSpPr>
-          <p:cNvPr id="19" name="Text 16"/>
-          <p:cNvSpPr/>
-          <p:nvPr/>
-        </p:nvSpPr>
-        <p:spPr>
-          <a:xfrm>
-            <a:off x="8412480" y="5468112"/>
-            <a:ext cx="2743200" cy="320040"/>
-          </a:xfrm>
-          <a:prstGeom prst="rect">
-            <a:avLst/>
-          </a:prstGeom>
-          <a:noFill/>
-          <a:ln/>
-        </p:spPr>
-        <p:txBody>
-          <a:bodyPr wrap="square" lIns="0" tIns="0" rIns="0" bIns="0" rtlCol="0" anchor="ctr"/>
-          <a:lstStyle/>
-          <a:p>
-            <a:pPr indent="0" marL="0">
-              <a:buNone/>
-            </a:pPr>
-            <a:r>
-              <a:rPr lang="en-US" sz="1600" b="1" dirty="0">
-                <a:solidFill>
-                  <a:srgbClr val="B6C0CB"/>
-                </a:solidFill>
-                <a:latin typeface="Arial" pitchFamily="34" charset="0"/>
-                <a:ea typeface="Arial" pitchFamily="34" charset="-122"/>
-                <a:cs typeface="Arial" pitchFamily="34" charset="-120"/>
-              </a:rPr>
-              <a:t>FG</a:t>
-            </a:r>
-            <a:endParaRPr lang="en-US" sz="1600" dirty="0"/>
-          </a:p>
-        </p:txBody>
-      </p:sp>
-      <p:sp>
-        <p:nvSpPr>
-          <p:cNvPr id="20" name="Text 17"/>
-          <p:cNvSpPr/>
-          <p:nvPr/>
-        </p:nvSpPr>
-        <p:spPr>
-          <a:xfrm>
-            <a:off x="8412480" y="5797296"/>
-            <a:ext cx="2834640" cy="320040"/>
-          </a:xfrm>
-          <a:prstGeom prst="rect">
-            <a:avLst/>
-          </a:prstGeom>
-          <a:noFill/>
-          <a:ln/>
-        </p:spPr>
-        <p:txBody>
-          <a:bodyPr wrap="square" lIns="0" tIns="0" rIns="0" bIns="0" rtlCol="0" anchor="ctr"/>
-          <a:lstStyle/>
-          <a:p>
-            <a:pPr indent="0" marL="0">
-              <a:buNone/>
-            </a:pPr>
-            <a:r>
-              <a:rPr lang="en-US" sz="1100" dirty="0">
-                <a:solidFill>
-                  <a:srgbClr val="8A96A3"/>
-                </a:solidFill>
-                <a:latin typeface="Calibri" pitchFamily="34" charset="0"/>
-                <a:ea typeface="Calibri" pitchFamily="34" charset="-122"/>
-                <a:cs typeface="Calibri" pitchFamily="34" charset="-120"/>
-              </a:rPr>
-              <a:t>potential wider roll-out</a:t>
-            </a:r>
-            <a:endParaRPr lang="en-US" sz="1100" dirty="0"/>
+              <a:t>DESKTOP</a:t>
+            </a:r>
+            <a:endParaRPr lang="en-US" sz="1000" dirty="0"/>
           </a:p>
         </p:txBody>
       </p:sp>
